--- a/docs/seminar/slides/세션5_객체지향API_라이브러리_캡스톤.pptx
+++ b/docs/seminar/slides/세션5_객체지향API_라이브러리_캡스톤.pptx
@@ -14,9 +14,11 @@
     <p:sldId id="262" r:id="rId8"/>
     <p:sldId id="263" r:id="rId9"/>
     <p:sldId id="264" r:id="rId10"/>
+    <p:sldId id="265" r:id="rId11"/>
+    <p:sldId id="266" r:id="rId12"/>
   </p:sldIdLst>
   <p:notesMasterIdLst>
-    <p:notesMasterId r:id="rId11"/>
+    <p:notesMasterId r:id="rId13"/>
   </p:notesMasterIdLst>
   <p:sldSz cx="12192000" cy="6858000"/>
   <p:notesSz cx="6858000" cy="12192000"/>
@@ -552,6 +554,182 @@
 </p:notes>
 </file>
 
+<file path=ppt/notesSlides/notesSlide10.xml><?xml version="1.0" encoding="utf-8"?>
+<p:notes xmlns:a="http://schemas.openxmlformats.org/drawingml/2006/main" xmlns:r="http://schemas.openxmlformats.org/officeDocument/2006/relationships" xmlns:p="http://schemas.openxmlformats.org/presentationml/2006/main">
+  <p:cSld>
+    <p:spTree>
+      <p:nvGrpSpPr>
+        <p:cNvPr id="1" name=""/>
+        <p:cNvGrpSpPr/>
+        <p:nvPr/>
+      </p:nvGrpSpPr>
+      <p:grpSpPr>
+        <a:xfrm>
+          <a:off x="0" y="0"/>
+          <a:ext cx="0" cy="0"/>
+          <a:chOff x="0" y="0"/>
+          <a:chExt cx="0" cy="0"/>
+        </a:xfrm>
+      </p:grpSpPr>
+      <p:sp>
+        <p:nvSpPr>
+          <p:cNvPr id="2" name="Slide Image Placeholder 1"/>
+          <p:cNvSpPr>
+            <a:spLocks noGrp="1" noRot="1" noChangeAspect="1"/>
+          </p:cNvSpPr>
+          <p:nvPr>
+            <p:ph type="sldImg"/>
+          </p:nvPr>
+        </p:nvSpPr>
+        <p:spPr/>
+      </p:sp>
+      <p:sp>
+        <p:nvSpPr>
+          <p:cNvPr id="3" name="Notes Placeholder 2"/>
+          <p:cNvSpPr>
+            <a:spLocks noGrp="1"/>
+          </p:cNvSpPr>
+          <p:nvPr>
+            <p:ph type="body" idx="1"/>
+          </p:nvPr>
+        </p:nvSpPr>
+        <p:spPr/>
+        <p:txBody>
+          <a:bodyPr/>
+          <a:lstStyle/>
+          <a:p>
+            <a:r>
+              <a:rPr lang="en-US" dirty="0"/>
+              <a:t>각 세션의 핵심 한 줄로 여정을 되짚으세요. THREAD_ADDRESS와 리덕션이 전체를 관통했음을 강조.</a:t>
+            </a:r>
+            <a:endParaRPr lang="en-US" dirty="0"/>
+          </a:p>
+        </p:txBody>
+      </p:sp>
+      <p:sp>
+        <p:nvSpPr>
+          <p:cNvPr id="4" name="Slide Number Placeholder 3"/>
+          <p:cNvSpPr>
+            <a:spLocks noGrp="1"/>
+          </p:cNvSpPr>
+          <p:nvPr>
+            <p:ph type="sldNum" sz="quarter" idx="10"/>
+          </p:nvPr>
+        </p:nvSpPr>
+        <p:spPr/>
+        <p:txBody>
+          <a:bodyPr/>
+          <a:lstStyle/>
+          <a:p>
+            <a:fld id="{F7021451-1387-4CA6-816F-3879F97B5CBC}" type="slidenum">
+              <a:rPr lang="en-US"/>
+              <a:t>10</a:t>
+            </a:fld>
+            <a:endParaRPr lang="en-US"/>
+          </a:p>
+        </p:txBody>
+      </p:sp>
+    </p:spTree>
+    <p:extLst>
+      <p:ext uri="{BB962C8B-B14F-4D97-AF65-F5344CB8AC3E}">
+        <p14:creationId xmlns:p14="http://schemas.microsoft.com/office/powerpoint/2010/main" val="1024086991"/>
+      </p:ext>
+    </p:extLst>
+  </p:cSld>
+  <p:clrMapOvr>
+    <a:masterClrMapping/>
+  </p:clrMapOvr>
+</p:notes>
+</file>
+
+<file path=ppt/notesSlides/notesSlide11.xml><?xml version="1.0" encoding="utf-8"?>
+<p:notes xmlns:a="http://schemas.openxmlformats.org/drawingml/2006/main" xmlns:r="http://schemas.openxmlformats.org/officeDocument/2006/relationships" xmlns:p="http://schemas.openxmlformats.org/presentationml/2006/main">
+  <p:cSld>
+    <p:spTree>
+      <p:nvGrpSpPr>
+        <p:cNvPr id="1" name=""/>
+        <p:cNvGrpSpPr/>
+        <p:nvPr/>
+      </p:nvGrpSpPr>
+      <p:grpSpPr>
+        <a:xfrm>
+          <a:off x="0" y="0"/>
+          <a:ext cx="0" cy="0"/>
+          <a:chOff x="0" y="0"/>
+          <a:chExt cx="0" cy="0"/>
+        </a:xfrm>
+      </p:grpSpPr>
+      <p:sp>
+        <p:nvSpPr>
+          <p:cNvPr id="2" name="Slide Image Placeholder 1"/>
+          <p:cNvSpPr>
+            <a:spLocks noGrp="1" noRot="1" noChangeAspect="1"/>
+          </p:cNvSpPr>
+          <p:nvPr>
+            <p:ph type="sldImg"/>
+          </p:nvPr>
+        </p:nvSpPr>
+        <p:spPr/>
+      </p:sp>
+      <p:sp>
+        <p:nvSpPr>
+          <p:cNvPr id="3" name="Notes Placeholder 2"/>
+          <p:cNvSpPr>
+            <a:spLocks noGrp="1"/>
+          </p:cNvSpPr>
+          <p:nvPr>
+            <p:ph type="body" idx="1"/>
+          </p:nvPr>
+        </p:nvSpPr>
+        <p:spPr/>
+        <p:txBody>
+          <a:bodyPr/>
+          <a:lstStyle/>
+          <a:p>
+            <a:r>
+              <a:rPr lang="en-US" dirty="0"/>
+              <a:t/>
+            </a:r>
+            <a:endParaRPr lang="en-US" dirty="0"/>
+          </a:p>
+        </p:txBody>
+      </p:sp>
+      <p:sp>
+        <p:nvSpPr>
+          <p:cNvPr id="4" name="Slide Number Placeholder 3"/>
+          <p:cNvSpPr>
+            <a:spLocks noGrp="1"/>
+          </p:cNvSpPr>
+          <p:nvPr>
+            <p:ph type="sldNum" sz="quarter" idx="10"/>
+          </p:nvPr>
+        </p:nvSpPr>
+        <p:spPr/>
+        <p:txBody>
+          <a:bodyPr/>
+          <a:lstStyle/>
+          <a:p>
+            <a:fld id="{F7021451-1387-4CA6-816F-3879F97B5CBC}" type="slidenum">
+              <a:rPr lang="en-US"/>
+              <a:t>11</a:t>
+            </a:fld>
+            <a:endParaRPr lang="en-US"/>
+          </a:p>
+        </p:txBody>
+      </p:sp>
+    </p:spTree>
+    <p:extLst>
+      <p:ext uri="{BB962C8B-B14F-4D97-AF65-F5344CB8AC3E}">
+        <p14:creationId xmlns:p14="http://schemas.microsoft.com/office/powerpoint/2010/main" val="1024086991"/>
+      </p:ext>
+    </p:extLst>
+  </p:cSld>
+  <p:clrMapOvr>
+    <a:masterClrMapping/>
+  </p:clrMapOvr>
+</p:notes>
+</file>
+
 <file path=ppt/notesSlides/notesSlide2.xml><?xml version="1.0" encoding="utf-8"?>
 <p:notes xmlns:a="http://schemas.openxmlformats.org/drawingml/2006/main" xmlns:r="http://schemas.openxmlformats.org/officeDocument/2006/relationships" xmlns:p="http://schemas.openxmlformats.org/presentationml/2006/main">
   <p:cSld>
@@ -774,7 +952,7 @@
           <a:p>
             <a:r>
               <a:rPr lang="en-US" dirty="0"/>
-              <a:t>C++ RAII 패턴이 GPU 자원에도 그대로 적용됨. try/throw로 부분 할당을 정리하는 부분(core.cu:64)을 짚으세요.</a:t>
+              <a:t>호출은 아래로(요청), 결과는 위로(반환). 각 계층은 자기 몫만 하고 아래에 위임한다는 캡슐화를 강조.</a:t>
             </a:r>
             <a:endParaRPr lang="en-US" dirty="0"/>
           </a:p>
@@ -862,7 +1040,7 @@
           <a:p>
             <a:r>
               <a:rPr lang="en-US" dirty="0"/>
-              <a:t>cli.cu가 바로 이 패턴의 실제 예제(tester.allocate → 각 gpuXxx 호출). 반환 bool로 성공/실패를 판단.</a:t>
+              <a:t>C++ RAII 패턴이 GPU 자원에도 그대로 적용됨. try/throw로 부분 할당을 정리하는 부분(core.cu:64)을 짚으세요.</a:t>
             </a:r>
             <a:endParaRPr lang="en-US" dirty="0"/>
           </a:p>
@@ -950,7 +1128,7 @@
           <a:p>
             <a:r>
               <a:rPr lang="en-US" dirty="0"/>
-              <a:t>uint 반환값에 센티넬을 얹는 관례. 클래스의 gpuXxx 메서드는 이 센티넬을 걸러 bool로 변환(core.cu:102).</a:t>
+              <a:t>cli.cu가 바로 이 패턴의 실제 예제(tester.allocate → 각 gpuXxx 호출). 반환 bool로 성공/실패를 판단.</a:t>
             </a:r>
             <a:endParaRPr lang="en-US" dirty="0"/>
           </a:p>
@@ -1038,7 +1216,7 @@
           <a:p>
             <a:r>
               <a:rPr lang="en-US" dirty="0"/>
-              <a:t>A는 세션 1~3 종합, B는 세션 3(리덕션) 응용, C는 세션 4·5 구조 이해. 참석자 수준에 맞게 안내하세요.</a:t>
+              <a:t>생성→할당→검사→판정→소멸의 생애주기. 소멸자가 자동 해제한다는 RAII의 이점을 흐름으로 시각화.</a:t>
             </a:r>
             <a:endParaRPr lang="en-US" dirty="0"/>
           </a:p>
@@ -1126,7 +1304,7 @@
           <a:p>
             <a:r>
               <a:rPr lang="en-US" dirty="0"/>
-              <a:t>각 세션의 핵심 한 줄로 여정을 되짚으세요. THREAD_ADDRESS와 리덕션이 전체를 관통했음을 강조.</a:t>
+              <a:t>uint 반환값에 센티넬을 얹는 관례. 클래스의 gpuXxx 메서드는 이 센티넬을 걸러 bool로 변환(core.cu:102).</a:t>
             </a:r>
             <a:endParaRPr lang="en-US" dirty="0"/>
           </a:p>
@@ -1214,7 +1392,7 @@
           <a:p>
             <a:r>
               <a:rPr lang="en-US" dirty="0"/>
-              <a:t/>
+              <a:t>A는 세션 1~3 종합, B는 세션 3(리덕션) 응용, C는 세션 4·5 구조 이해. 참석자 수준에 맞게 안내하세요.</a:t>
             </a:r>
             <a:endParaRPr lang="en-US" dirty="0"/>
           </a:p>
@@ -1863,6 +2041,962 @@
 </p:sld>
 </file>
 
+<file path=ppt/slides/slide10.xml><?xml version="1.0" encoding="utf-8"?>
+<p:sld xmlns:a="http://schemas.openxmlformats.org/drawingml/2006/main" xmlns:r="http://schemas.openxmlformats.org/officeDocument/2006/relationships" xmlns:p="http://schemas.openxmlformats.org/presentationml/2006/main">
+  <p:cSld name="Slide 10">
+    <p:bg>
+      <p:bgPr>
+        <a:solidFill>
+          <a:srgbClr val="101722"/>
+        </a:solidFill>
+      </p:bgPr>
+    </p:bg>
+    <p:spTree>
+      <p:nvGrpSpPr>
+        <p:cNvPr id="1" name=""/>
+        <p:cNvGrpSpPr/>
+        <p:nvPr/>
+      </p:nvGrpSpPr>
+      <p:grpSpPr>
+        <a:xfrm>
+          <a:off x="0" y="0"/>
+          <a:ext cx="0" cy="0"/>
+          <a:chOff x="0" y="0"/>
+          <a:chExt cx="0" cy="0"/>
+        </a:xfrm>
+      </p:grpSpPr>
+      <p:sp>
+        <p:nvSpPr>
+          <p:cNvPr id="2" name="Text 0"/>
+          <p:cNvSpPr/>
+          <p:nvPr/>
+        </p:nvSpPr>
+        <p:spPr>
+          <a:xfrm>
+            <a:off x="548640" y="411480"/>
+            <a:ext cx="658368" cy="658368"/>
+          </a:xfrm>
+          <a:prstGeom prst="roundRect">
+            <a:avLst>
+              <a:gd name="adj" fmla="val 13889"/>
+            </a:avLst>
+          </a:prstGeom>
+          <a:solidFill>
+            <a:srgbClr val="E8A33D"/>
+          </a:solidFill>
+          <a:ln/>
+        </p:spPr>
+        <p:txBody>
+          <a:bodyPr wrap="square" rtlCol="0" anchor="ctr"/>
+          <a:lstStyle/>
+          <a:p>
+            <a:pPr algn="ctr" indent="0" marL="0">
+              <a:buNone/>
+            </a:pPr>
+            <a:r>
+              <a:rPr lang="en-US" sz="2200" b="1" dirty="0">
+                <a:solidFill>
+                  <a:srgbClr val="101722"/>
+                </a:solidFill>
+                <a:latin typeface="Courier New" pitchFamily="34" charset="0"/>
+                <a:ea typeface="Courier New" pitchFamily="34" charset="-122"/>
+                <a:cs typeface="Courier New" pitchFamily="34" charset="-120"/>
+              </a:rPr>
+              <a:t>7</a:t>
+            </a:r>
+            <a:endParaRPr lang="en-US" sz="2200" dirty="0"/>
+          </a:p>
+        </p:txBody>
+      </p:sp>
+      <p:sp>
+        <p:nvSpPr>
+          <p:cNvPr id="3" name="Text 1"/>
+          <p:cNvSpPr/>
+          <p:nvPr/>
+        </p:nvSpPr>
+        <p:spPr>
+          <a:xfrm>
+            <a:off x="1371600" y="384048"/>
+            <a:ext cx="10241280" cy="713232"/>
+          </a:xfrm>
+          <a:prstGeom prst="rect">
+            <a:avLst/>
+          </a:prstGeom>
+          <a:noFill/>
+          <a:ln/>
+        </p:spPr>
+        <p:txBody>
+          <a:bodyPr wrap="square" lIns="0" tIns="0" rIns="0" bIns="0" rtlCol="0" anchor="ctr"/>
+          <a:lstStyle/>
+          <a:p>
+            <a:pPr algn="l" indent="0" marL="0">
+              <a:buNone/>
+            </a:pPr>
+            <a:r>
+              <a:rPr lang="en-US" sz="2900" b="1" dirty="0">
+                <a:solidFill>
+                  <a:srgbClr val="E7EDF5"/>
+                </a:solidFill>
+                <a:latin typeface="Malgun Gothic" pitchFamily="34" charset="0"/>
+                <a:ea typeface="Malgun Gothic" pitchFamily="34" charset="-122"/>
+                <a:cs typeface="Malgun Gothic" pitchFamily="34" charset="-120"/>
+              </a:rPr>
+              <a:t>시리즈 총정리</a:t>
+            </a:r>
+            <a:endParaRPr lang="en-US" sz="2900" dirty="0"/>
+          </a:p>
+        </p:txBody>
+      </p:sp>
+      <p:sp>
+        <p:nvSpPr>
+          <p:cNvPr id="4" name="Shape 2"/>
+          <p:cNvSpPr/>
+          <p:nvPr/>
+        </p:nvSpPr>
+        <p:spPr>
+          <a:xfrm>
+            <a:off x="548640" y="1737360"/>
+            <a:ext cx="11064240" cy="749808"/>
+          </a:xfrm>
+          <a:prstGeom prst="roundRect">
+            <a:avLst>
+              <a:gd name="adj" fmla="val 9756"/>
+            </a:avLst>
+          </a:prstGeom>
+          <a:solidFill>
+            <a:srgbClr val="18212E"/>
+          </a:solidFill>
+          <a:ln/>
+        </p:spPr>
+      </p:sp>
+      <p:sp>
+        <p:nvSpPr>
+          <p:cNvPr id="5" name="Text 3"/>
+          <p:cNvSpPr/>
+          <p:nvPr/>
+        </p:nvSpPr>
+        <p:spPr>
+          <a:xfrm>
+            <a:off x="822960" y="1810512"/>
+            <a:ext cx="1463040" cy="603504"/>
+          </a:xfrm>
+          <a:prstGeom prst="rect">
+            <a:avLst/>
+          </a:prstGeom>
+          <a:noFill/>
+          <a:ln/>
+        </p:spPr>
+        <p:txBody>
+          <a:bodyPr wrap="square" lIns="0" tIns="0" rIns="0" bIns="0" rtlCol="0" anchor="ctr"/>
+          <a:lstStyle/>
+          <a:p>
+            <a:pPr indent="0" marL="0">
+              <a:buNone/>
+            </a:pPr>
+            <a:r>
+              <a:rPr lang="en-US" sz="1600" b="1" dirty="0">
+                <a:solidFill>
+                  <a:srgbClr val="3FB8C4"/>
+                </a:solidFill>
+                <a:latin typeface="Courier New" pitchFamily="34" charset="0"/>
+                <a:ea typeface="Courier New" pitchFamily="34" charset="-122"/>
+                <a:cs typeface="Courier New" pitchFamily="34" charset="-120"/>
+              </a:rPr>
+              <a:t>세션 1</a:t>
+            </a:r>
+            <a:endParaRPr lang="en-US" sz="1600" dirty="0"/>
+          </a:p>
+        </p:txBody>
+      </p:sp>
+      <p:sp>
+        <p:nvSpPr>
+          <p:cNvPr id="6" name="Text 4"/>
+          <p:cNvSpPr/>
+          <p:nvPr/>
+        </p:nvSpPr>
+        <p:spPr>
+          <a:xfrm>
+            <a:off x="2468880" y="1810512"/>
+            <a:ext cx="8869680" cy="603504"/>
+          </a:xfrm>
+          <a:prstGeom prst="rect">
+            <a:avLst/>
+          </a:prstGeom>
+          <a:noFill/>
+          <a:ln/>
+        </p:spPr>
+        <p:txBody>
+          <a:bodyPr wrap="square" lIns="0" tIns="0" rIns="0" bIns="0" rtlCol="0" anchor="ctr"/>
+          <a:lstStyle/>
+          <a:p>
+            <a:pPr indent="0" marL="0">
+              <a:buNone/>
+            </a:pPr>
+            <a:r>
+              <a:rPr lang="en-US" sz="1550" dirty="0">
+                <a:solidFill>
+                  <a:srgbClr val="E7EDF5"/>
+                </a:solidFill>
+                <a:latin typeface="Malgun Gothic" pitchFamily="34" charset="0"/>
+                <a:ea typeface="Malgun Gothic" pitchFamily="34" charset="-122"/>
+                <a:cs typeface="Malgun Gothic" pitchFamily="34" charset="-120"/>
+              </a:rPr>
+              <a:t>스레드 모델 · THREAD_ADDRESS · coalescing</a:t>
+            </a:r>
+            <a:endParaRPr lang="en-US" sz="1550" dirty="0"/>
+          </a:p>
+        </p:txBody>
+      </p:sp>
+      <p:sp>
+        <p:nvSpPr>
+          <p:cNvPr id="7" name="Shape 5"/>
+          <p:cNvSpPr/>
+          <p:nvPr/>
+        </p:nvSpPr>
+        <p:spPr>
+          <a:xfrm>
+            <a:off x="548640" y="2606040"/>
+            <a:ext cx="11064240" cy="749808"/>
+          </a:xfrm>
+          <a:prstGeom prst="roundRect">
+            <a:avLst>
+              <a:gd name="adj" fmla="val 9756"/>
+            </a:avLst>
+          </a:prstGeom>
+          <a:solidFill>
+            <a:srgbClr val="18212E"/>
+          </a:solidFill>
+          <a:ln/>
+        </p:spPr>
+      </p:sp>
+      <p:sp>
+        <p:nvSpPr>
+          <p:cNvPr id="8" name="Text 6"/>
+          <p:cNvSpPr/>
+          <p:nvPr/>
+        </p:nvSpPr>
+        <p:spPr>
+          <a:xfrm>
+            <a:off x="822960" y="2679192"/>
+            <a:ext cx="1463040" cy="603504"/>
+          </a:xfrm>
+          <a:prstGeom prst="rect">
+            <a:avLst/>
+          </a:prstGeom>
+          <a:noFill/>
+          <a:ln/>
+        </p:spPr>
+        <p:txBody>
+          <a:bodyPr wrap="square" lIns="0" tIns="0" rIns="0" bIns="0" rtlCol="0" anchor="ctr"/>
+          <a:lstStyle/>
+          <a:p>
+            <a:pPr indent="0" marL="0">
+              <a:buNone/>
+            </a:pPr>
+            <a:r>
+              <a:rPr lang="en-US" sz="1600" b="1" dirty="0">
+                <a:solidFill>
+                  <a:srgbClr val="E8A33D"/>
+                </a:solidFill>
+                <a:latin typeface="Courier New" pitchFamily="34" charset="0"/>
+                <a:ea typeface="Courier New" pitchFamily="34" charset="-122"/>
+                <a:cs typeface="Courier New" pitchFamily="34" charset="-120"/>
+              </a:rPr>
+              <a:t>세션 2</a:t>
+            </a:r>
+            <a:endParaRPr lang="en-US" sz="1600" dirty="0"/>
+          </a:p>
+        </p:txBody>
+      </p:sp>
+      <p:sp>
+        <p:nvSpPr>
+          <p:cNvPr id="9" name="Text 7"/>
+          <p:cNvSpPr/>
+          <p:nvPr/>
+        </p:nvSpPr>
+        <p:spPr>
+          <a:xfrm>
+            <a:off x="2468880" y="2679192"/>
+            <a:ext cx="8869680" cy="603504"/>
+          </a:xfrm>
+          <a:prstGeom prst="rect">
+            <a:avLst/>
+          </a:prstGeom>
+          <a:noFill/>
+          <a:ln/>
+        </p:spPr>
+        <p:txBody>
+          <a:bodyPr wrap="square" lIns="0" tIns="0" rIns="0" bIns="0" rtlCol="0" anchor="ctr"/>
+          <a:lstStyle/>
+          <a:p>
+            <a:pPr indent="0" marL="0">
+              <a:buNone/>
+            </a:pPr>
+            <a:r>
+              <a:rPr lang="en-US" sz="1550" dirty="0">
+                <a:solidFill>
+                  <a:srgbClr val="E7EDF5"/>
+                </a:solidFill>
+                <a:latin typeface="Malgun Gothic" pitchFamily="34" charset="0"/>
+                <a:ea typeface="Malgun Gothic" pitchFamily="34" charset="-122"/>
+                <a:cs typeface="Malgun Gothic" pitchFamily="34" charset="-120"/>
+              </a:rPr>
+              <a:t>메모리 계층 · 쓰기→검증 · Moving Inversions</a:t>
+            </a:r>
+            <a:endParaRPr lang="en-US" sz="1550" dirty="0"/>
+          </a:p>
+        </p:txBody>
+      </p:sp>
+      <p:sp>
+        <p:nvSpPr>
+          <p:cNvPr id="10" name="Shape 8"/>
+          <p:cNvSpPr/>
+          <p:nvPr/>
+        </p:nvSpPr>
+        <p:spPr>
+          <a:xfrm>
+            <a:off x="548640" y="3474720"/>
+            <a:ext cx="11064240" cy="749808"/>
+          </a:xfrm>
+          <a:prstGeom prst="roundRect">
+            <a:avLst>
+              <a:gd name="adj" fmla="val 9756"/>
+            </a:avLst>
+          </a:prstGeom>
+          <a:solidFill>
+            <a:srgbClr val="18212E"/>
+          </a:solidFill>
+          <a:ln/>
+        </p:spPr>
+      </p:sp>
+      <p:sp>
+        <p:nvSpPr>
+          <p:cNvPr id="11" name="Text 9"/>
+          <p:cNvSpPr/>
+          <p:nvPr/>
+        </p:nvSpPr>
+        <p:spPr>
+          <a:xfrm>
+            <a:off x="822960" y="3547872"/>
+            <a:ext cx="1463040" cy="603504"/>
+          </a:xfrm>
+          <a:prstGeom prst="rect">
+            <a:avLst/>
+          </a:prstGeom>
+          <a:noFill/>
+          <a:ln/>
+        </p:spPr>
+        <p:txBody>
+          <a:bodyPr wrap="square" lIns="0" tIns="0" rIns="0" bIns="0" rtlCol="0" anchor="ctr"/>
+          <a:lstStyle/>
+          <a:p>
+            <a:pPr indent="0" marL="0">
+              <a:buNone/>
+            </a:pPr>
+            <a:r>
+              <a:rPr lang="en-US" sz="1600" b="1" dirty="0">
+                <a:solidFill>
+                  <a:srgbClr val="3FB8C4"/>
+                </a:solidFill>
+                <a:latin typeface="Courier New" pitchFamily="34" charset="0"/>
+                <a:ea typeface="Courier New" pitchFamily="34" charset="-122"/>
+                <a:cs typeface="Courier New" pitchFamily="34" charset="-120"/>
+              </a:rPr>
+              <a:t>세션 3</a:t>
+            </a:r>
+            <a:endParaRPr lang="en-US" sz="1600" dirty="0"/>
+          </a:p>
+        </p:txBody>
+      </p:sp>
+      <p:sp>
+        <p:nvSpPr>
+          <p:cNvPr id="12" name="Text 10"/>
+          <p:cNvSpPr/>
+          <p:nvPr/>
+        </p:nvSpPr>
+        <p:spPr>
+          <a:xfrm>
+            <a:off x="2468880" y="3547872"/>
+            <a:ext cx="8869680" cy="603504"/>
+          </a:xfrm>
+          <a:prstGeom prst="rect">
+            <a:avLst/>
+          </a:prstGeom>
+          <a:noFill/>
+          <a:ln/>
+        </p:spPr>
+        <p:txBody>
+          <a:bodyPr wrap="square" lIns="0" tIns="0" rIns="0" bIns="0" rtlCol="0" anchor="ctr"/>
+          <a:lstStyle/>
+          <a:p>
+            <a:pPr indent="0" marL="0">
+              <a:buNone/>
+            </a:pPr>
+            <a:r>
+              <a:rPr lang="en-US" sz="1550" dirty="0">
+                <a:solidFill>
+                  <a:srgbClr val="E7EDF5"/>
+                </a:solidFill>
+                <a:latin typeface="Malgun Gothic" pitchFamily="34" charset="0"/>
+                <a:ea typeface="Malgun Gothic" pitchFamily="34" charset="-122"/>
+                <a:cs typeface="Malgun Gothic" pitchFamily="34" charset="-120"/>
+              </a:rPr>
+              <a:t>공유 메모리 · __popc · 병렬 리덕션</a:t>
+            </a:r>
+            <a:endParaRPr lang="en-US" sz="1550" dirty="0"/>
+          </a:p>
+        </p:txBody>
+      </p:sp>
+      <p:sp>
+        <p:nvSpPr>
+          <p:cNvPr id="13" name="Shape 11"/>
+          <p:cNvSpPr/>
+          <p:nvPr/>
+        </p:nvSpPr>
+        <p:spPr>
+          <a:xfrm>
+            <a:off x="548640" y="4343400"/>
+            <a:ext cx="11064240" cy="749808"/>
+          </a:xfrm>
+          <a:prstGeom prst="roundRect">
+            <a:avLst>
+              <a:gd name="adj" fmla="val 9756"/>
+            </a:avLst>
+          </a:prstGeom>
+          <a:solidFill>
+            <a:srgbClr val="18212E"/>
+          </a:solidFill>
+          <a:ln/>
+        </p:spPr>
+      </p:sp>
+      <p:sp>
+        <p:nvSpPr>
+          <p:cNvPr id="14" name="Text 12"/>
+          <p:cNvSpPr/>
+          <p:nvPr/>
+        </p:nvSpPr>
+        <p:spPr>
+          <a:xfrm>
+            <a:off x="822960" y="4416552"/>
+            <a:ext cx="1463040" cy="603504"/>
+          </a:xfrm>
+          <a:prstGeom prst="rect">
+            <a:avLst/>
+          </a:prstGeom>
+          <a:noFill/>
+          <a:ln/>
+        </p:spPr>
+        <p:txBody>
+          <a:bodyPr wrap="square" lIns="0" tIns="0" rIns="0" bIns="0" rtlCol="0" anchor="ctr"/>
+          <a:lstStyle/>
+          <a:p>
+            <a:pPr indent="0" marL="0">
+              <a:buNone/>
+            </a:pPr>
+            <a:r>
+              <a:rPr lang="en-US" sz="1600" b="1" dirty="0">
+                <a:solidFill>
+                  <a:srgbClr val="E8A33D"/>
+                </a:solidFill>
+                <a:latin typeface="Courier New" pitchFamily="34" charset="0"/>
+                <a:ea typeface="Courier New" pitchFamily="34" charset="-122"/>
+                <a:cs typeface="Courier New" pitchFamily="34" charset="-120"/>
+              </a:rPr>
+              <a:t>세션 4</a:t>
+            </a:r>
+            <a:endParaRPr lang="en-US" sz="1600" dirty="0"/>
+          </a:p>
+        </p:txBody>
+      </p:sp>
+      <p:sp>
+        <p:nvSpPr>
+          <p:cNvPr id="15" name="Text 13"/>
+          <p:cNvSpPr/>
+          <p:nvPr/>
+        </p:nvSpPr>
+        <p:spPr>
+          <a:xfrm>
+            <a:off x="2468880" y="4416552"/>
+            <a:ext cx="8869680" cy="603504"/>
+          </a:xfrm>
+          <a:prstGeom prst="rect">
+            <a:avLst/>
+          </a:prstGeom>
+          <a:noFill/>
+          <a:ln/>
+        </p:spPr>
+        <p:txBody>
+          <a:bodyPr wrap="square" lIns="0" tIns="0" rIns="0" bIns="0" rtlCol="0" anchor="ctr"/>
+          <a:lstStyle/>
+          <a:p>
+            <a:pPr indent="0" marL="0">
+              <a:buNone/>
+            </a:pPr>
+            <a:r>
+              <a:rPr lang="en-US" sz="1550" dirty="0">
+                <a:solidFill>
+                  <a:srgbClr val="E7EDF5"/>
+                </a:solidFill>
+                <a:latin typeface="Malgun Gothic" pitchFamily="34" charset="0"/>
+                <a:ea typeface="Malgun Gothic" pitchFamily="34" charset="-122"/>
+                <a:cs typeface="Malgun Gothic" pitchFamily="34" charset="-120"/>
+              </a:rPr>
+              <a:t>13종 테스트 카탈로그 · 패턴 생성 · 대역폭</a:t>
+            </a:r>
+            <a:endParaRPr lang="en-US" sz="1550" dirty="0"/>
+          </a:p>
+        </p:txBody>
+      </p:sp>
+      <p:sp>
+        <p:nvSpPr>
+          <p:cNvPr id="16" name="Shape 14"/>
+          <p:cNvSpPr/>
+          <p:nvPr/>
+        </p:nvSpPr>
+        <p:spPr>
+          <a:xfrm>
+            <a:off x="548640" y="5212080"/>
+            <a:ext cx="11064240" cy="749808"/>
+          </a:xfrm>
+          <a:prstGeom prst="roundRect">
+            <a:avLst>
+              <a:gd name="adj" fmla="val 9756"/>
+            </a:avLst>
+          </a:prstGeom>
+          <a:solidFill>
+            <a:srgbClr val="18212E"/>
+          </a:solidFill>
+          <a:ln/>
+        </p:spPr>
+      </p:sp>
+      <p:sp>
+        <p:nvSpPr>
+          <p:cNvPr id="17" name="Text 15"/>
+          <p:cNvSpPr/>
+          <p:nvPr/>
+        </p:nvSpPr>
+        <p:spPr>
+          <a:xfrm>
+            <a:off x="822960" y="5285232"/>
+            <a:ext cx="1463040" cy="603504"/>
+          </a:xfrm>
+          <a:prstGeom prst="rect">
+            <a:avLst/>
+          </a:prstGeom>
+          <a:noFill/>
+          <a:ln/>
+        </p:spPr>
+        <p:txBody>
+          <a:bodyPr wrap="square" lIns="0" tIns="0" rIns="0" bIns="0" rtlCol="0" anchor="ctr"/>
+          <a:lstStyle/>
+          <a:p>
+            <a:pPr indent="0" marL="0">
+              <a:buNone/>
+            </a:pPr>
+            <a:r>
+              <a:rPr lang="en-US" sz="1600" b="1" dirty="0">
+                <a:solidFill>
+                  <a:srgbClr val="3FB8C4"/>
+                </a:solidFill>
+                <a:latin typeface="Courier New" pitchFamily="34" charset="0"/>
+                <a:ea typeface="Courier New" pitchFamily="34" charset="-122"/>
+                <a:cs typeface="Courier New" pitchFamily="34" charset="-120"/>
+              </a:rPr>
+              <a:t>세션 5</a:t>
+            </a:r>
+            <a:endParaRPr lang="en-US" sz="1600" dirty="0"/>
+          </a:p>
+        </p:txBody>
+      </p:sp>
+      <p:sp>
+        <p:nvSpPr>
+          <p:cNvPr id="18" name="Text 16"/>
+          <p:cNvSpPr/>
+          <p:nvPr/>
+        </p:nvSpPr>
+        <p:spPr>
+          <a:xfrm>
+            <a:off x="2468880" y="5285232"/>
+            <a:ext cx="8869680" cy="603504"/>
+          </a:xfrm>
+          <a:prstGeom prst="rect">
+            <a:avLst/>
+          </a:prstGeom>
+          <a:noFill/>
+          <a:ln/>
+        </p:spPr>
+        <p:txBody>
+          <a:bodyPr wrap="square" lIns="0" tIns="0" rIns="0" bIns="0" rtlCol="0" anchor="ctr"/>
+          <a:lstStyle/>
+          <a:p>
+            <a:pPr indent="0" marL="0">
+              <a:buNone/>
+            </a:pPr>
+            <a:r>
+              <a:rPr lang="en-US" sz="1550" dirty="0">
+                <a:solidFill>
+                  <a:srgbClr val="E7EDF5"/>
+                </a:solidFill>
+                <a:latin typeface="Malgun Gothic" pitchFamily="34" charset="0"/>
+                <a:ea typeface="Malgun Gothic" pitchFamily="34" charset="-122"/>
+                <a:cs typeface="Malgun Gothic" pitchFamily="34" charset="-120"/>
+              </a:rPr>
+              <a:t>3계층 API · RAII · 라이브러리 임베드 · 캡스톤</a:t>
+            </a:r>
+            <a:endParaRPr lang="en-US" sz="1550" dirty="0"/>
+          </a:p>
+        </p:txBody>
+      </p:sp>
+      <p:sp>
+        <p:nvSpPr>
+          <p:cNvPr id="19" name="Text 17"/>
+          <p:cNvSpPr/>
+          <p:nvPr/>
+        </p:nvSpPr>
+        <p:spPr>
+          <a:xfrm>
+            <a:off x="548640" y="5989320"/>
+            <a:ext cx="11064240" cy="365760"/>
+          </a:xfrm>
+          <a:prstGeom prst="rect">
+            <a:avLst/>
+          </a:prstGeom>
+          <a:noFill/>
+          <a:ln/>
+        </p:spPr>
+        <p:txBody>
+          <a:bodyPr wrap="square" lIns="0" tIns="0" rIns="0" bIns="0" rtlCol="0" anchor="ctr"/>
+          <a:lstStyle/>
+          <a:p>
+            <a:pPr algn="ctr" indent="0" marL="0">
+              <a:buNone/>
+            </a:pPr>
+            <a:r>
+              <a:rPr lang="en-US" sz="1400" i="1" dirty="0">
+                <a:solidFill>
+                  <a:srgbClr val="9FB0C4"/>
+                </a:solidFill>
+                <a:latin typeface="Malgun Gothic" pitchFamily="34" charset="0"/>
+                <a:ea typeface="Malgun Gothic" pitchFamily="34" charset="-122"/>
+                <a:cs typeface="Malgun Gothic" pitchFamily="34" charset="-120"/>
+              </a:rPr>
+              <a:t>500줄의 실제 코드로 CUDA의 핵심을 모두 만졌습니다.</a:t>
+            </a:r>
+            <a:endParaRPr lang="en-US" sz="1400" dirty="0"/>
+          </a:p>
+        </p:txBody>
+      </p:sp>
+    </p:spTree>
+  </p:cSld>
+  <p:clrMapOvr>
+    <a:masterClrMapping/>
+  </p:clrMapOvr>
+</p:sld>
+</file>
+
+<file path=ppt/slides/slide11.xml><?xml version="1.0" encoding="utf-8"?>
+<p:sld xmlns:a="http://schemas.openxmlformats.org/drawingml/2006/main" xmlns:r="http://schemas.openxmlformats.org/officeDocument/2006/relationships" xmlns:p="http://schemas.openxmlformats.org/presentationml/2006/main">
+  <p:cSld name="Slide 11">
+    <p:bg>
+      <p:bgPr>
+        <a:solidFill>
+          <a:srgbClr val="101722"/>
+        </a:solidFill>
+      </p:bgPr>
+    </p:bg>
+    <p:spTree>
+      <p:nvGrpSpPr>
+        <p:cNvPr id="1" name=""/>
+        <p:cNvGrpSpPr/>
+        <p:nvPr/>
+      </p:nvGrpSpPr>
+      <p:grpSpPr>
+        <a:xfrm>
+          <a:off x="0" y="0"/>
+          <a:ext cx="0" cy="0"/>
+          <a:chOff x="0" y="0"/>
+          <a:chExt cx="0" cy="0"/>
+        </a:xfrm>
+      </p:grpSpPr>
+      <p:sp>
+        <p:nvSpPr>
+          <p:cNvPr id="2" name="Text 0"/>
+          <p:cNvSpPr/>
+          <p:nvPr/>
+        </p:nvSpPr>
+        <p:spPr>
+          <a:xfrm>
+            <a:off x="548640" y="1463040"/>
+            <a:ext cx="10058400" cy="457200"/>
+          </a:xfrm>
+          <a:prstGeom prst="rect">
+            <a:avLst/>
+          </a:prstGeom>
+          <a:noFill/>
+          <a:ln/>
+        </p:spPr>
+        <p:txBody>
+          <a:bodyPr wrap="square" lIns="0" tIns="0" rIns="0" bIns="0" rtlCol="0" anchor="ctr"/>
+          <a:lstStyle/>
+          <a:p>
+            <a:pPr indent="0" marL="0">
+              <a:buNone/>
+            </a:pPr>
+            <a:r>
+              <a:rPr lang="en-US" sz="1800" b="1" dirty="0">
+                <a:solidFill>
+                  <a:srgbClr val="E8A33D"/>
+                </a:solidFill>
+                <a:latin typeface="Malgun Gothic" pitchFamily="34" charset="0"/>
+                <a:ea typeface="Malgun Gothic" pitchFamily="34" charset="-122"/>
+                <a:cs typeface="Malgun Gothic" pitchFamily="34" charset="-120"/>
+              </a:rPr>
+              <a:t>수고하셨습니다</a:t>
+            </a:r>
+            <a:endParaRPr lang="en-US" sz="1800" dirty="0"/>
+          </a:p>
+        </p:txBody>
+      </p:sp>
+      <p:sp>
+        <p:nvSpPr>
+          <p:cNvPr id="3" name="Text 1"/>
+          <p:cNvSpPr/>
+          <p:nvPr/>
+        </p:nvSpPr>
+        <p:spPr>
+          <a:xfrm>
+            <a:off x="548640" y="1965960"/>
+            <a:ext cx="10972800" cy="914400"/>
+          </a:xfrm>
+          <a:prstGeom prst="rect">
+            <a:avLst/>
+          </a:prstGeom>
+          <a:noFill/>
+          <a:ln/>
+        </p:spPr>
+        <p:txBody>
+          <a:bodyPr wrap="square" lIns="0" tIns="0" rIns="0" bIns="0" rtlCol="0" anchor="ctr"/>
+          <a:lstStyle/>
+          <a:p>
+            <a:pPr indent="0" marL="0">
+              <a:buNone/>
+            </a:pPr>
+            <a:r>
+              <a:rPr lang="en-US" sz="3700" b="1" dirty="0">
+                <a:solidFill>
+                  <a:srgbClr val="E7EDF5"/>
+                </a:solidFill>
+                <a:latin typeface="Malgun Gothic" pitchFamily="34" charset="0"/>
+                <a:ea typeface="Malgun Gothic" pitchFamily="34" charset="-122"/>
+                <a:cs typeface="Malgun Gothic" pitchFamily="34" charset="-120"/>
+              </a:rPr>
+              <a:t>이제 당신은 GPU를 검증할 수 있습니다</a:t>
+            </a:r>
+            <a:endParaRPr lang="en-US" sz="3700" dirty="0"/>
+          </a:p>
+        </p:txBody>
+      </p:sp>
+      <p:sp>
+        <p:nvSpPr>
+          <p:cNvPr id="4" name="Text 2"/>
+          <p:cNvSpPr/>
+          <p:nvPr/>
+        </p:nvSpPr>
+        <p:spPr>
+          <a:xfrm>
+            <a:off x="548640" y="3063240"/>
+            <a:ext cx="10972800" cy="1280160"/>
+          </a:xfrm>
+          <a:prstGeom prst="rect">
+            <a:avLst/>
+          </a:prstGeom>
+          <a:noFill/>
+          <a:ln/>
+        </p:spPr>
+        <p:txBody>
+          <a:bodyPr wrap="square" lIns="0" tIns="0" rIns="0" bIns="0" rtlCol="0" anchor="t"/>
+          <a:lstStyle/>
+          <a:p>
+            <a:pPr indent="0" marL="0">
+              <a:lnSpc>
+                <a:spcPct val="120000"/>
+              </a:lnSpc>
+              <a:spcAft>
+                <a:spcPts val="600"/>
+              </a:spcAft>
+              <a:buNone/>
+            </a:pPr>
+            <a:r>
+              <a:rPr lang="en-US" sz="1700" dirty="0">
+                <a:solidFill>
+                  <a:srgbClr val="E7EDF5"/>
+                </a:solidFill>
+                <a:latin typeface="Malgun Gothic" pitchFamily="34" charset="0"/>
+                <a:ea typeface="Malgun Gothic" pitchFamily="34" charset="-122"/>
+                <a:cs typeface="Malgun Gothic" pitchFamily="34" charset="-120"/>
+              </a:rPr>
+              <a:t>읽을 순서 제안: cli.cu 메인 루프 → core.cu의 THREAD_ADDRESS → deviceVerifyConstant 리덕션.</a:t>
+            </a:r>
+            <a:endParaRPr lang="en-US" sz="1700" dirty="0"/>
+          </a:p>
+          <a:p>
+            <a:pPr indent="0" marL="0">
+              <a:lnSpc>
+                <a:spcPct val="120000"/>
+              </a:lnSpc>
+              <a:buNone/>
+            </a:pPr>
+            <a:r>
+              <a:rPr lang="en-US" sz="1700" dirty="0">
+                <a:solidFill>
+                  <a:srgbClr val="9FB0C4"/>
+                </a:solidFill>
+                <a:latin typeface="Malgun Gothic" pitchFamily="34" charset="0"/>
+                <a:ea typeface="Malgun Gothic" pitchFamily="34" charset="-122"/>
+                <a:cs typeface="Malgun Gothic" pitchFamily="34" charset="-120"/>
+              </a:rPr>
+              <a:t>이 세 곳이 MemtestG80 전체를 관통합니다.</a:t>
+            </a:r>
+            <a:endParaRPr lang="en-US" sz="1700" dirty="0"/>
+          </a:p>
+        </p:txBody>
+      </p:sp>
+      <p:sp>
+        <p:nvSpPr>
+          <p:cNvPr id="5" name="Shape 3"/>
+          <p:cNvSpPr/>
+          <p:nvPr/>
+        </p:nvSpPr>
+        <p:spPr>
+          <a:xfrm>
+            <a:off x="548640" y="4937760"/>
+            <a:ext cx="8412480" cy="1005840"/>
+          </a:xfrm>
+          <a:prstGeom prst="roundRect">
+            <a:avLst>
+              <a:gd name="adj" fmla="val 4545"/>
+            </a:avLst>
+          </a:prstGeom>
+          <a:solidFill>
+            <a:srgbClr val="0B1119"/>
+          </a:solidFill>
+          <a:ln w="12700">
+            <a:solidFill>
+              <a:srgbClr val="2C3A4E"/>
+            </a:solidFill>
+            <a:prstDash val="solid"/>
+          </a:ln>
+        </p:spPr>
+      </p:sp>
+      <p:sp>
+        <p:nvSpPr>
+          <p:cNvPr id="6" name="Text 4"/>
+          <p:cNvSpPr/>
+          <p:nvPr/>
+        </p:nvSpPr>
+        <p:spPr>
+          <a:xfrm>
+            <a:off x="768096" y="5084064"/>
+            <a:ext cx="7973568" cy="713232"/>
+          </a:xfrm>
+          <a:prstGeom prst="rect">
+            <a:avLst/>
+          </a:prstGeom>
+          <a:noFill/>
+          <a:ln/>
+        </p:spPr>
+        <p:txBody>
+          <a:bodyPr wrap="square" lIns="0" tIns="0" rIns="0" bIns="0" rtlCol="0" anchor="t"/>
+          <a:lstStyle/>
+          <a:p>
+            <a:pPr algn="l" indent="0" marL="0">
+              <a:lnSpc>
+                <a:spcPct val="110000"/>
+              </a:lnSpc>
+              <a:buNone/>
+            </a:pPr>
+            <a:r>
+              <a:rPr lang="en-US" sz="1250" dirty="0">
+                <a:solidFill>
+                  <a:srgbClr val="F2C079"/>
+                </a:solidFill>
+                <a:latin typeface="Courier New" pitchFamily="34" charset="0"/>
+                <a:ea typeface="Courier New" pitchFamily="34" charset="-122"/>
+                <a:cs typeface="Courier New" pitchFamily="34" charset="-120"/>
+              </a:rPr>
+              <a:t>원본: github.com/ihaque/memtestG80   ·   라이선스: LGPL v3</a:t>
+            </a:r>
+            <a:endParaRPr lang="en-US" sz="1250" dirty="0"/>
+          </a:p>
+          <a:p>
+            <a:pPr algn="l" indent="0" marL="0">
+              <a:lnSpc>
+                <a:spcPct val="110000"/>
+              </a:lnSpc>
+              <a:buNone/>
+            </a:pPr>
+            <a:r>
+              <a:rPr lang="en-US" sz="1250" dirty="0">
+                <a:solidFill>
+                  <a:srgbClr val="3FB8C4"/>
+                </a:solidFill>
+                <a:latin typeface="Courier New" pitchFamily="34" charset="0"/>
+                <a:ea typeface="Courier New" pitchFamily="34" charset="-122"/>
+                <a:cs typeface="Courier New" pitchFamily="34" charset="-120"/>
+              </a:rPr>
+              <a:t>NVIDIA CUDA C++ Programming Guide — 다음 학습 자료</a:t>
+            </a:r>
+            <a:endParaRPr lang="en-US" sz="1250" dirty="0"/>
+          </a:p>
+        </p:txBody>
+      </p:sp>
+      <p:sp>
+        <p:nvSpPr>
+          <p:cNvPr id="7" name="Text 5"/>
+          <p:cNvSpPr/>
+          <p:nvPr/>
+        </p:nvSpPr>
+        <p:spPr>
+          <a:xfrm>
+            <a:off x="548640" y="6126480"/>
+            <a:ext cx="10972800" cy="365760"/>
+          </a:xfrm>
+          <a:prstGeom prst="rect">
+            <a:avLst/>
+          </a:prstGeom>
+          <a:noFill/>
+          <a:ln/>
+        </p:spPr>
+        <p:txBody>
+          <a:bodyPr wrap="square" lIns="0" tIns="0" rIns="0" bIns="0" rtlCol="0" anchor="ctr"/>
+          <a:lstStyle/>
+          <a:p>
+            <a:pPr indent="0" marL="0">
+              <a:buNone/>
+            </a:pPr>
+            <a:r>
+              <a:rPr lang="en-US" sz="1350" i="1" dirty="0">
+                <a:solidFill>
+                  <a:srgbClr val="9FB0C4"/>
+                </a:solidFill>
+                <a:latin typeface="Malgun Gothic" pitchFamily="34" charset="0"/>
+                <a:ea typeface="Malgun Gothic" pitchFamily="34" charset="-122"/>
+                <a:cs typeface="Malgun Gothic" pitchFamily="34" charset="-120"/>
+              </a:rPr>
+              <a:t>질문 환영합니다 · 캡스톤 발표를 기대합니다</a:t>
+            </a:r>
+            <a:endParaRPr lang="en-US" sz="1350" dirty="0"/>
+          </a:p>
+        </p:txBody>
+      </p:sp>
+    </p:spTree>
+  </p:cSld>
+  <p:clrMapOvr>
+    <a:masterClrMapping/>
+  </p:clrMapOvr>
+</p:sld>
+</file>
+
 <file path=ppt/slides/slide2.xml><?xml version="1.0" encoding="utf-8"?>
 <p:sld xmlns:a="http://schemas.openxmlformats.org/drawingml/2006/main" xmlns:r="http://schemas.openxmlformats.org/officeDocument/2006/relationships" xmlns:p="http://schemas.openxmlformats.org/presentationml/2006/main">
   <p:cSld name="Slide 2">
@@ -3262,7 +4396,7 @@
             </a:avLst>
           </a:prstGeom>
           <a:solidFill>
-            <a:srgbClr val="E8A33D"/>
+            <a:srgbClr val="3FB8C4"/>
           </a:solidFill>
           <a:ln/>
         </p:spPr>
@@ -3282,7 +4416,7 @@
                 <a:ea typeface="Courier New" pitchFamily="34" charset="-122"/>
                 <a:cs typeface="Courier New" pitchFamily="34" charset="-120"/>
               </a:rPr>
-              <a:t>3</a:t>
+              <a:t>2</a:t>
             </a:r>
             <a:endParaRPr lang="en-US" sz="2200" dirty="0"/>
           </a:p>
@@ -3321,7 +4455,7 @@
                 <a:ea typeface="Malgun Gothic" pitchFamily="34" charset="-122"/>
                 <a:cs typeface="Malgun Gothic" pitchFamily="34" charset="-120"/>
               </a:rPr>
-              <a:t>자원 관리 · allocate / deallocate (RAII)</a:t>
+              <a:t>한 번의 호출이 3계층을 타고 내려간다</a:t>
             </a:r>
             <a:endParaRPr lang="en-US" sz="2900" dirty="0"/>
           </a:p>
@@ -3329,26 +4463,65 @@
       </p:sp>
       <p:sp>
         <p:nvSpPr>
-          <p:cNvPr id="4" name="Shape 2"/>
-          <p:cNvSpPr/>
-          <p:nvPr/>
-        </p:nvSpPr>
-        <p:spPr>
-          <a:xfrm>
-            <a:off x="548640" y="1508760"/>
-            <a:ext cx="11064240" cy="2377440"/>
+          <p:cNvPr id="4" name="Text 2"/>
+          <p:cNvSpPr/>
+          <p:nvPr/>
+        </p:nvSpPr>
+        <p:spPr>
+          <a:xfrm>
+            <a:off x="548640" y="1371600"/>
+            <a:ext cx="11064240" cy="411480"/>
+          </a:xfrm>
+          <a:prstGeom prst="rect">
+            <a:avLst/>
+          </a:prstGeom>
+          <a:noFill/>
+          <a:ln/>
+        </p:spPr>
+        <p:txBody>
+          <a:bodyPr wrap="square" lIns="0" tIns="0" rIns="0" bIns="0" rtlCol="0" anchor="ctr"/>
+          <a:lstStyle/>
+          <a:p>
+            <a:pPr indent="0" marL="0">
+              <a:buNone/>
+            </a:pPr>
+            <a:r>
+              <a:rPr lang="en-US" sz="1450" dirty="0">
+                <a:solidFill>
+                  <a:srgbClr val="9FB0C4"/>
+                </a:solidFill>
+                <a:latin typeface="Malgun Gothic" pitchFamily="34" charset="0"/>
+                <a:ea typeface="Malgun Gothic" pitchFamily="34" charset="-122"/>
+                <a:cs typeface="Malgun Gothic" pitchFamily="34" charset="-120"/>
+              </a:rPr>
+              <a:t>사용자가 메서드 하나를 부르면, 호출이 계층을 타고 GPU까지 내려갔다가 결과가 되돌아옵니다.</a:t>
+            </a:r>
+            <a:endParaRPr lang="en-US" sz="1450" dirty="0"/>
+          </a:p>
+        </p:txBody>
+      </p:sp>
+      <p:sp>
+        <p:nvSpPr>
+          <p:cNvPr id="5" name="Shape 3"/>
+          <p:cNvSpPr/>
+          <p:nvPr/>
+        </p:nvSpPr>
+        <p:spPr>
+          <a:xfrm>
+            <a:off x="1005840" y="1920240"/>
+            <a:ext cx="7498080" cy="868680"/>
           </a:xfrm>
           <a:prstGeom prst="roundRect">
             <a:avLst>
-              <a:gd name="adj" fmla="val 1923"/>
+              <a:gd name="adj" fmla="val 8421"/>
             </a:avLst>
           </a:prstGeom>
           <a:solidFill>
-            <a:srgbClr val="0B1119"/>
+            <a:srgbClr val="18212E"/>
           </a:solidFill>
-          <a:ln w="12700">
+          <a:ln w="19050">
             <a:solidFill>
-              <a:srgbClr val="2C3A4E"/>
+              <a:srgbClr val="E8A33D"/>
             </a:solidFill>
             <a:prstDash val="solid"/>
           </a:ln>
@@ -3356,53 +4529,69 @@
       </p:sp>
       <p:sp>
         <p:nvSpPr>
-          <p:cNvPr id="5" name="Text 3"/>
-          <p:cNvSpPr/>
-          <p:nvPr/>
-        </p:nvSpPr>
-        <p:spPr>
-          <a:xfrm>
-            <a:off x="768096" y="1655064"/>
-            <a:ext cx="10625328" cy="2084832"/>
-          </a:xfrm>
-          <a:prstGeom prst="rect">
-            <a:avLst/>
-          </a:prstGeom>
-          <a:noFill/>
-          <a:ln/>
-        </p:spPr>
-        <p:txBody>
-          <a:bodyPr wrap="square" lIns="0" tIns="0" rIns="0" bIns="0" rtlCol="0" anchor="t"/>
-          <a:lstStyle/>
-          <a:p>
-            <a:pPr algn="l" indent="0" marL="0">
-              <a:lnSpc>
-                <a:spcPct val="110000"/>
-              </a:lnSpc>
-              <a:buNone/>
-            </a:pPr>
-            <a:r>
-              <a:rPr lang="en-US" sz="1300" dirty="0">
-                <a:solidFill>
-                  <a:srgbClr val="6B7D94"/>
+          <p:cNvPr id="6" name="Text 4"/>
+          <p:cNvSpPr/>
+          <p:nvPr/>
+        </p:nvSpPr>
+        <p:spPr>
+          <a:xfrm>
+            <a:off x="1207008" y="2011680"/>
+            <a:ext cx="1371600" cy="685800"/>
+          </a:xfrm>
+          <a:prstGeom prst="rect">
+            <a:avLst/>
+          </a:prstGeom>
+          <a:noFill/>
+          <a:ln/>
+        </p:spPr>
+        <p:txBody>
+          <a:bodyPr wrap="square" lIns="0" tIns="0" rIns="0" bIns="0" rtlCol="0" anchor="ctr"/>
+          <a:lstStyle/>
+          <a:p>
+            <a:pPr indent="0" marL="0">
+              <a:buNone/>
+            </a:pPr>
+            <a:r>
+              <a:rPr lang="en-US" sz="1200" b="1" dirty="0">
+                <a:solidFill>
+                  <a:srgbClr val="E8A33D"/>
                 </a:solidFill>
                 <a:latin typeface="Courier New" pitchFamily="34" charset="0"/>
                 <a:ea typeface="Courier New" pitchFamily="34" charset="-122"/>
                 <a:cs typeface="Courier New" pitchFamily="34" charset="-120"/>
               </a:rPr>
-              <a:t>// core.h:78 — 생성자에서 상수·기본값 초기화</a:t>
-            </a:r>
-            <a:endParaRPr lang="en-US" sz="1300" dirty="0"/>
-          </a:p>
-          <a:p>
-            <a:pPr algn="l" indent="0" marL="0">
-              <a:lnSpc>
-                <a:spcPct val="110000"/>
-              </a:lnSpc>
-              <a:buNone/>
-            </a:pPr>
-            <a:r>
-              <a:rPr lang="en-US" sz="1300" dirty="0">
+              <a:t>LAYER 3</a:t>
+            </a:r>
+            <a:endParaRPr lang="en-US" sz="1200" dirty="0"/>
+          </a:p>
+        </p:txBody>
+      </p:sp>
+      <p:sp>
+        <p:nvSpPr>
+          <p:cNvPr id="7" name="Text 5"/>
+          <p:cNvSpPr/>
+          <p:nvPr/>
+        </p:nvSpPr>
+        <p:spPr>
+          <a:xfrm>
+            <a:off x="2606040" y="2029968"/>
+            <a:ext cx="5715000" cy="384048"/>
+          </a:xfrm>
+          <a:prstGeom prst="rect">
+            <a:avLst/>
+          </a:prstGeom>
+          <a:noFill/>
+          <a:ln/>
+        </p:spPr>
+        <p:txBody>
+          <a:bodyPr wrap="square" lIns="0" tIns="0" rIns="0" bIns="0" rtlCol="0" anchor="ctr"/>
+          <a:lstStyle/>
+          <a:p>
+            <a:pPr indent="0" marL="0">
+              <a:buNone/>
+            </a:pPr>
+            <a:r>
+              <a:rPr lang="en-US" sz="1250" dirty="0">
                 <a:solidFill>
                   <a:srgbClr val="E7EDF5"/>
                 </a:solidFill>
@@ -3410,192 +4599,649 @@
                 <a:ea typeface="Courier New" pitchFamily="34" charset="-122"/>
                 <a:cs typeface="Courier New" pitchFamily="34" charset="-120"/>
               </a:rPr>
-              <a:t>memtestState() : nBlocks(1024), nThreads(512), allocated(false),</a:t>
-            </a:r>
-            <a:endParaRPr lang="en-US" sz="1300" dirty="0"/>
-          </a:p>
-          <a:p>
-            <a:pPr algn="l" indent="0" marL="0">
-              <a:lnSpc>
-                <a:spcPct val="110000"/>
-              </a:lnSpc>
-              <a:buNone/>
-            </a:pPr>
-            <a:r>
-              <a:rPr lang="en-US" sz="1300" dirty="0">
-                <a:solidFill>
-                  <a:srgbClr val="E7EDF5"/>
+              <a:t>tester.gpuMovingInversionsOnesZeros(e)</a:t>
+            </a:r>
+            <a:endParaRPr lang="en-US" sz="1250" dirty="0"/>
+          </a:p>
+        </p:txBody>
+      </p:sp>
+      <p:sp>
+        <p:nvSpPr>
+          <p:cNvPr id="8" name="Text 6"/>
+          <p:cNvSpPr/>
+          <p:nvPr/>
+        </p:nvSpPr>
+        <p:spPr>
+          <a:xfrm>
+            <a:off x="2606040" y="2395728"/>
+            <a:ext cx="5715000" cy="329184"/>
+          </a:xfrm>
+          <a:prstGeom prst="rect">
+            <a:avLst/>
+          </a:prstGeom>
+          <a:noFill/>
+          <a:ln/>
+        </p:spPr>
+        <p:txBody>
+          <a:bodyPr wrap="square" lIns="0" tIns="0" rIns="0" bIns="0" rtlCol="0" anchor="ctr"/>
+          <a:lstStyle/>
+          <a:p>
+            <a:pPr indent="0" marL="0">
+              <a:buNone/>
+            </a:pPr>
+            <a:r>
+              <a:rPr lang="en-US" sz="1200" dirty="0">
+                <a:solidFill>
+                  <a:srgbClr val="9FB0C4"/>
+                </a:solidFill>
+                <a:latin typeface="Malgun Gothic" pitchFamily="34" charset="0"/>
+                <a:ea typeface="Malgun Gothic" pitchFamily="34" charset="-122"/>
+                <a:cs typeface="Malgun Gothic" pitchFamily="34" charset="-120"/>
+              </a:rPr>
+              <a:t>memtestState 메서드</a:t>
+            </a:r>
+            <a:endParaRPr lang="en-US" sz="1200" dirty="0"/>
+          </a:p>
+        </p:txBody>
+      </p:sp>
+      <p:sp>
+        <p:nvSpPr>
+          <p:cNvPr id="9" name="Shape 7"/>
+          <p:cNvSpPr/>
+          <p:nvPr/>
+        </p:nvSpPr>
+        <p:spPr>
+          <a:xfrm>
+            <a:off x="4754880" y="2807208"/>
+            <a:ext cx="0" cy="347472"/>
+          </a:xfrm>
+          <a:prstGeom prst="line">
+            <a:avLst/>
+          </a:prstGeom>
+          <a:noFill/>
+          <a:ln w="25400">
+            <a:solidFill>
+              <a:srgbClr val="E8A33D"/>
+            </a:solidFill>
+            <a:prstDash val="solid"/>
+            <a:tailEnd type="triangle"/>
+          </a:ln>
+        </p:spPr>
+      </p:sp>
+      <p:sp>
+        <p:nvSpPr>
+          <p:cNvPr id="10" name="Shape 8"/>
+          <p:cNvSpPr/>
+          <p:nvPr/>
+        </p:nvSpPr>
+        <p:spPr>
+          <a:xfrm>
+            <a:off x="1005840" y="3172968"/>
+            <a:ext cx="7498080" cy="868680"/>
+          </a:xfrm>
+          <a:prstGeom prst="roundRect">
+            <a:avLst>
+              <a:gd name="adj" fmla="val 8421"/>
+            </a:avLst>
+          </a:prstGeom>
+          <a:solidFill>
+            <a:srgbClr val="18212E"/>
+          </a:solidFill>
+          <a:ln w="19050">
+            <a:solidFill>
+              <a:srgbClr val="3FB8C4"/>
+            </a:solidFill>
+            <a:prstDash val="solid"/>
+          </a:ln>
+        </p:spPr>
+      </p:sp>
+      <p:sp>
+        <p:nvSpPr>
+          <p:cNvPr id="11" name="Text 9"/>
+          <p:cNvSpPr/>
+          <p:nvPr/>
+        </p:nvSpPr>
+        <p:spPr>
+          <a:xfrm>
+            <a:off x="1207008" y="3264408"/>
+            <a:ext cx="1371600" cy="685800"/>
+          </a:xfrm>
+          <a:prstGeom prst="rect">
+            <a:avLst/>
+          </a:prstGeom>
+          <a:noFill/>
+          <a:ln/>
+        </p:spPr>
+        <p:txBody>
+          <a:bodyPr wrap="square" lIns="0" tIns="0" rIns="0" bIns="0" rtlCol="0" anchor="ctr"/>
+          <a:lstStyle/>
+          <a:p>
+            <a:pPr indent="0" marL="0">
+              <a:buNone/>
+            </a:pPr>
+            <a:r>
+              <a:rPr lang="en-US" sz="1200" b="1" dirty="0">
+                <a:solidFill>
+                  <a:srgbClr val="3FB8C4"/>
                 </a:solidFill>
                 <a:latin typeface="Courier New" pitchFamily="34" charset="0"/>
                 <a:ea typeface="Courier New" pitchFamily="34" charset="-122"/>
                 <a:cs typeface="Courier New" pitchFamily="34" charset="-120"/>
               </a:rPr>
-              <a:t>                devTestMem(NULL), ..., lcgPeriod(1024) {};</a:t>
-            </a:r>
-            <a:endParaRPr lang="en-US" sz="1300" dirty="0"/>
-          </a:p>
-          <a:p>
-            <a:pPr algn="l" indent="0" marL="0">
-              <a:lnSpc>
-                <a:spcPct val="110000"/>
-              </a:lnSpc>
-              <a:buNone/>
-            </a:pPr>
-            <a:r>
-              <a:rPr lang="en-US" sz="1300" dirty="0">
-                <a:solidFill>
-                  <a:srgbClr val="F2C079"/>
+              <a:t>LAYER 2</a:t>
+            </a:r>
+            <a:endParaRPr lang="en-US" sz="1200" dirty="0"/>
+          </a:p>
+        </p:txBody>
+      </p:sp>
+      <p:sp>
+        <p:nvSpPr>
+          <p:cNvPr id="12" name="Text 10"/>
+          <p:cNvSpPr/>
+          <p:nvPr/>
+        </p:nvSpPr>
+        <p:spPr>
+          <a:xfrm>
+            <a:off x="2606040" y="3282696"/>
+            <a:ext cx="5715000" cy="384048"/>
+          </a:xfrm>
+          <a:prstGeom prst="rect">
+            <a:avLst/>
+          </a:prstGeom>
+          <a:noFill/>
+          <a:ln/>
+        </p:spPr>
+        <p:txBody>
+          <a:bodyPr wrap="square" lIns="0" tIns="0" rIns="0" bIns="0" rtlCol="0" anchor="ctr"/>
+          <a:lstStyle/>
+          <a:p>
+            <a:pPr indent="0" marL="0">
+              <a:buNone/>
+            </a:pPr>
+            <a:r>
+              <a:rPr lang="en-US" sz="1250" dirty="0">
+                <a:solidFill>
+                  <a:srgbClr val="E7EDF5"/>
                 </a:solidFill>
                 <a:latin typeface="Courier New" pitchFamily="34" charset="0"/>
                 <a:ea typeface="Courier New" pitchFamily="34" charset="-122"/>
                 <a:cs typeface="Courier New" pitchFamily="34" charset="-120"/>
               </a:rPr>
-              <a:t>~memtestState() { deallocate(); }        // 소멸자가 자동으로 해제</a:t>
-            </a:r>
-            <a:endParaRPr lang="en-US" sz="1300" dirty="0"/>
-          </a:p>
-          <a:p>
-            <a:pPr algn="l" indent="0" marL="0">
-              <a:lnSpc>
-                <a:spcPct val="110000"/>
-              </a:lnSpc>
-              <a:buNone/>
-            </a:pPr>
-            <a:endParaRPr lang="en-US" sz="1300" dirty="0"/>
-          </a:p>
-          <a:p>
-            <a:pPr algn="l" indent="0" marL="0">
-              <a:lnSpc>
-                <a:spcPct val="110000"/>
-              </a:lnSpc>
-              <a:buNone/>
-            </a:pPr>
-            <a:r>
-              <a:rPr lang="en-US" sz="1300" dirty="0">
-                <a:solidFill>
-                  <a:srgbClr val="6B7D94"/>
+              <a:t>gpuWriteConstant / gpuVerifyConstant</a:t>
+            </a:r>
+            <a:endParaRPr lang="en-US" sz="1250" dirty="0"/>
+          </a:p>
+        </p:txBody>
+      </p:sp>
+      <p:sp>
+        <p:nvSpPr>
+          <p:cNvPr id="13" name="Text 11"/>
+          <p:cNvSpPr/>
+          <p:nvPr/>
+        </p:nvSpPr>
+        <p:spPr>
+          <a:xfrm>
+            <a:off x="2606040" y="3648456"/>
+            <a:ext cx="5715000" cy="329184"/>
+          </a:xfrm>
+          <a:prstGeom prst="rect">
+            <a:avLst/>
+          </a:prstGeom>
+          <a:noFill/>
+          <a:ln/>
+        </p:spPr>
+        <p:txBody>
+          <a:bodyPr wrap="square" lIns="0" tIns="0" rIns="0" bIns="0" rtlCol="0" anchor="ctr"/>
+          <a:lstStyle/>
+          <a:p>
+            <a:pPr indent="0" marL="0">
+              <a:buNone/>
+            </a:pPr>
+            <a:r>
+              <a:rPr lang="en-US" sz="1200" dirty="0">
+                <a:solidFill>
+                  <a:srgbClr val="9FB0C4"/>
+                </a:solidFill>
+                <a:latin typeface="Malgun Gothic" pitchFamily="34" charset="0"/>
+                <a:ea typeface="Malgun Gothic" pitchFamily="34" charset="-122"/>
+                <a:cs typeface="Malgun Gothic" pitchFamily="34" charset="-120"/>
+              </a:rPr>
+              <a:t>__host__ 함수 — 커널 실행 + 리덕션</a:t>
+            </a:r>
+            <a:endParaRPr lang="en-US" sz="1200" dirty="0"/>
+          </a:p>
+        </p:txBody>
+      </p:sp>
+      <p:sp>
+        <p:nvSpPr>
+          <p:cNvPr id="14" name="Shape 12"/>
+          <p:cNvSpPr/>
+          <p:nvPr/>
+        </p:nvSpPr>
+        <p:spPr>
+          <a:xfrm>
+            <a:off x="4754880" y="4059936"/>
+            <a:ext cx="0" cy="347472"/>
+          </a:xfrm>
+          <a:prstGeom prst="line">
+            <a:avLst/>
+          </a:prstGeom>
+          <a:noFill/>
+          <a:ln w="25400">
+            <a:solidFill>
+              <a:srgbClr val="3FB8C4"/>
+            </a:solidFill>
+            <a:prstDash val="solid"/>
+            <a:tailEnd type="triangle"/>
+          </a:ln>
+        </p:spPr>
+      </p:sp>
+      <p:sp>
+        <p:nvSpPr>
+          <p:cNvPr id="15" name="Shape 13"/>
+          <p:cNvSpPr/>
+          <p:nvPr/>
+        </p:nvSpPr>
+        <p:spPr>
+          <a:xfrm>
+            <a:off x="1005840" y="4425696"/>
+            <a:ext cx="7498080" cy="868680"/>
+          </a:xfrm>
+          <a:prstGeom prst="roundRect">
+            <a:avLst>
+              <a:gd name="adj" fmla="val 8421"/>
+            </a:avLst>
+          </a:prstGeom>
+          <a:solidFill>
+            <a:srgbClr val="18212E"/>
+          </a:solidFill>
+          <a:ln w="19050">
+            <a:solidFill>
+              <a:srgbClr val="9FB0C4"/>
+            </a:solidFill>
+            <a:prstDash val="solid"/>
+          </a:ln>
+        </p:spPr>
+      </p:sp>
+      <p:sp>
+        <p:nvSpPr>
+          <p:cNvPr id="16" name="Text 14"/>
+          <p:cNvSpPr/>
+          <p:nvPr/>
+        </p:nvSpPr>
+        <p:spPr>
+          <a:xfrm>
+            <a:off x="1207008" y="4517136"/>
+            <a:ext cx="1371600" cy="685800"/>
+          </a:xfrm>
+          <a:prstGeom prst="rect">
+            <a:avLst/>
+          </a:prstGeom>
+          <a:noFill/>
+          <a:ln/>
+        </p:spPr>
+        <p:txBody>
+          <a:bodyPr wrap="square" lIns="0" tIns="0" rIns="0" bIns="0" rtlCol="0" anchor="ctr"/>
+          <a:lstStyle/>
+          <a:p>
+            <a:pPr indent="0" marL="0">
+              <a:buNone/>
+            </a:pPr>
+            <a:r>
+              <a:rPr lang="en-US" sz="1200" b="1" dirty="0">
+                <a:solidFill>
+                  <a:srgbClr val="9FB0C4"/>
                 </a:solidFill>
                 <a:latin typeface="Courier New" pitchFamily="34" charset="0"/>
                 <a:ea typeface="Courier New" pitchFamily="34" charset="-122"/>
                 <a:cs typeface="Courier New" pitchFamily="34" charset="-120"/>
               </a:rPr>
-              <a:t>// core.cu:38 — deallocate: cudaFree + free, 포인터를 NULL로</a:t>
-            </a:r>
-            <a:endParaRPr lang="en-US" sz="1300" dirty="0"/>
-          </a:p>
-          <a:p>
-            <a:pPr algn="l" indent="0" marL="0">
-              <a:lnSpc>
-                <a:spcPct val="110000"/>
-              </a:lnSpc>
-              <a:buNone/>
-            </a:pPr>
-            <a:r>
-              <a:rPr lang="en-US" sz="1300" dirty="0">
-                <a:solidFill>
-                  <a:srgbClr val="3FB8C4"/>
+              <a:t>LAYER 1</a:t>
+            </a:r>
+            <a:endParaRPr lang="en-US" sz="1200" dirty="0"/>
+          </a:p>
+        </p:txBody>
+      </p:sp>
+      <p:sp>
+        <p:nvSpPr>
+          <p:cNvPr id="17" name="Text 15"/>
+          <p:cNvSpPr/>
+          <p:nvPr/>
+        </p:nvSpPr>
+        <p:spPr>
+          <a:xfrm>
+            <a:off x="2606040" y="4535424"/>
+            <a:ext cx="5715000" cy="384048"/>
+          </a:xfrm>
+          <a:prstGeom prst="rect">
+            <a:avLst/>
+          </a:prstGeom>
+          <a:noFill/>
+          <a:ln/>
+        </p:spPr>
+        <p:txBody>
+          <a:bodyPr wrap="square" lIns="0" tIns="0" rIns="0" bIns="0" rtlCol="0" anchor="ctr"/>
+          <a:lstStyle/>
+          <a:p>
+            <a:pPr indent="0" marL="0">
+              <a:buNone/>
+            </a:pPr>
+            <a:r>
+              <a:rPr lang="en-US" sz="1250" dirty="0">
+                <a:solidFill>
+                  <a:srgbClr val="E7EDF5"/>
                 </a:solidFill>
                 <a:latin typeface="Courier New" pitchFamily="34" charset="0"/>
                 <a:ea typeface="Courier New" pitchFamily="34" charset="-122"/>
                 <a:cs typeface="Courier New" pitchFamily="34" charset="-120"/>
               </a:rPr>
-              <a:t>uint allocate(uint mbToTest);            // 실패 시 0 반환, 부분 할당 정리</a:t>
-            </a:r>
-            <a:endParaRPr lang="en-US" sz="1300" dirty="0"/>
-          </a:p>
-        </p:txBody>
-      </p:sp>
-      <p:sp>
-        <p:nvSpPr>
-          <p:cNvPr id="6" name="Text 4"/>
-          <p:cNvSpPr/>
-          <p:nvPr/>
-        </p:nvSpPr>
-        <p:spPr>
-          <a:xfrm>
-            <a:off x="548640" y="4023360"/>
-            <a:ext cx="11064240" cy="1645920"/>
-          </a:xfrm>
-          <a:prstGeom prst="rect">
-            <a:avLst/>
-          </a:prstGeom>
-          <a:noFill/>
-          <a:ln/>
-        </p:spPr>
-        <p:txBody>
-          <a:bodyPr wrap="square" lIns="0" tIns="0" rIns="0" bIns="0" rtlCol="0" anchor="t"/>
-          <a:lstStyle/>
-          <a:p>
-            <a:pPr marL="342900" indent="-342900">
-              <a:lnSpc>
-                <a:spcPct val="105000"/>
-              </a:lnSpc>
-              <a:spcAft>
-                <a:spcPts val="900"/>
-              </a:spcAft>
-              <a:buSzPct val="100000"/>
-              <a:buChar char="•"/>
-            </a:pPr>
-            <a:r>
-              <a:rPr lang="en-US" sz="1400" dirty="0">
-                <a:solidFill>
-                  <a:srgbClr val="E7EDF5"/>
+              <a:t>deviceWriteConstant&lt;&lt;&lt;1024,512&gt;&gt;&gt;</a:t>
+            </a:r>
+            <a:endParaRPr lang="en-US" sz="1250" dirty="0"/>
+          </a:p>
+        </p:txBody>
+      </p:sp>
+      <p:sp>
+        <p:nvSpPr>
+          <p:cNvPr id="18" name="Text 16"/>
+          <p:cNvSpPr/>
+          <p:nvPr/>
+        </p:nvSpPr>
+        <p:spPr>
+          <a:xfrm>
+            <a:off x="2606040" y="4901184"/>
+            <a:ext cx="5715000" cy="329184"/>
+          </a:xfrm>
+          <a:prstGeom prst="rect">
+            <a:avLst/>
+          </a:prstGeom>
+          <a:noFill/>
+          <a:ln/>
+        </p:spPr>
+        <p:txBody>
+          <a:bodyPr wrap="square" lIns="0" tIns="0" rIns="0" bIns="0" rtlCol="0" anchor="ctr"/>
+          <a:lstStyle/>
+          <a:p>
+            <a:pPr indent="0" marL="0">
+              <a:buNone/>
+            </a:pPr>
+            <a:r>
+              <a:rPr lang="en-US" sz="1200" dirty="0">
+                <a:solidFill>
+                  <a:srgbClr val="9FB0C4"/>
                 </a:solidFill>
                 <a:latin typeface="Malgun Gothic" pitchFamily="34" charset="0"/>
                 <a:ea typeface="Malgun Gothic" pitchFamily="34" charset="-122"/>
                 <a:cs typeface="Malgun Gothic" pitchFamily="34" charset="-120"/>
               </a:rPr>
-              <a:t>소멸자가 deallocate를 호출 → 객체가 스코프를 벗어나면 GPU 메모리가 자동 해제 (누수 방지)</a:t>
-            </a:r>
-            <a:endParaRPr lang="en-US" sz="1400" dirty="0"/>
-          </a:p>
-          <a:p>
-            <a:pPr marL="342900" indent="-342900">
-              <a:lnSpc>
-                <a:spcPct val="105000"/>
-              </a:lnSpc>
-              <a:spcAft>
-                <a:spcPts val="900"/>
-              </a:spcAft>
-              <a:buSzPct val="100000"/>
-              <a:buChar char="•"/>
-            </a:pPr>
-            <a:r>
-              <a:rPr lang="en-US" sz="1400" dirty="0">
+              <a:t>__global__ 커널 — GPU에서 실행</a:t>
+            </a:r>
+            <a:endParaRPr lang="en-US" sz="1200" dirty="0"/>
+          </a:p>
+        </p:txBody>
+      </p:sp>
+      <p:sp>
+        <p:nvSpPr>
+          <p:cNvPr id="19" name="Shape 17"/>
+          <p:cNvSpPr/>
+          <p:nvPr/>
+        </p:nvSpPr>
+        <p:spPr>
+          <a:xfrm>
+            <a:off x="4754880" y="5312664"/>
+            <a:ext cx="0" cy="347472"/>
+          </a:xfrm>
+          <a:prstGeom prst="line">
+            <a:avLst/>
+          </a:prstGeom>
+          <a:noFill/>
+          <a:ln w="25400">
+            <a:solidFill>
+              <a:srgbClr val="9FB0C4"/>
+            </a:solidFill>
+            <a:prstDash val="solid"/>
+            <a:tailEnd type="triangle"/>
+          </a:ln>
+        </p:spPr>
+      </p:sp>
+      <p:sp>
+        <p:nvSpPr>
+          <p:cNvPr id="20" name="Shape 18"/>
+          <p:cNvSpPr/>
+          <p:nvPr/>
+        </p:nvSpPr>
+        <p:spPr>
+          <a:xfrm>
+            <a:off x="1005840" y="5678424"/>
+            <a:ext cx="7498080" cy="868680"/>
+          </a:xfrm>
+          <a:prstGeom prst="roundRect">
+            <a:avLst>
+              <a:gd name="adj" fmla="val 8421"/>
+            </a:avLst>
+          </a:prstGeom>
+          <a:solidFill>
+            <a:srgbClr val="241A16"/>
+          </a:solidFill>
+          <a:ln w="19050">
+            <a:solidFill>
+              <a:srgbClr val="E8A33D"/>
+            </a:solidFill>
+            <a:prstDash val="solid"/>
+          </a:ln>
+        </p:spPr>
+      </p:sp>
+      <p:sp>
+        <p:nvSpPr>
+          <p:cNvPr id="21" name="Text 19"/>
+          <p:cNvSpPr/>
+          <p:nvPr/>
+        </p:nvSpPr>
+        <p:spPr>
+          <a:xfrm>
+            <a:off x="1207008" y="5769864"/>
+            <a:ext cx="1371600" cy="685800"/>
+          </a:xfrm>
+          <a:prstGeom prst="rect">
+            <a:avLst/>
+          </a:prstGeom>
+          <a:noFill/>
+          <a:ln/>
+        </p:spPr>
+        <p:txBody>
+          <a:bodyPr wrap="square" lIns="0" tIns="0" rIns="0" bIns="0" rtlCol="0" anchor="ctr"/>
+          <a:lstStyle/>
+          <a:p>
+            <a:pPr indent="0" marL="0">
+              <a:buNone/>
+            </a:pPr>
+            <a:r>
+              <a:rPr lang="en-US" sz="1200" b="1" dirty="0">
+                <a:solidFill>
+                  <a:srgbClr val="E8A33D"/>
+                </a:solidFill>
+                <a:latin typeface="Courier New" pitchFamily="34" charset="0"/>
+                <a:ea typeface="Courier New" pitchFamily="34" charset="-122"/>
+                <a:cs typeface="Courier New" pitchFamily="34" charset="-120"/>
+              </a:rPr>
+              <a:t>GPU</a:t>
+            </a:r>
+            <a:endParaRPr lang="en-US" sz="1200" dirty="0"/>
+          </a:p>
+        </p:txBody>
+      </p:sp>
+      <p:sp>
+        <p:nvSpPr>
+          <p:cNvPr id="22" name="Text 20"/>
+          <p:cNvSpPr/>
+          <p:nvPr/>
+        </p:nvSpPr>
+        <p:spPr>
+          <a:xfrm>
+            <a:off x="2606040" y="5788152"/>
+            <a:ext cx="5715000" cy="384048"/>
+          </a:xfrm>
+          <a:prstGeom prst="rect">
+            <a:avLst/>
+          </a:prstGeom>
+          <a:noFill/>
+          <a:ln/>
+        </p:spPr>
+        <p:txBody>
+          <a:bodyPr wrap="square" lIns="0" tIns="0" rIns="0" bIns="0" rtlCol="0" anchor="ctr"/>
+          <a:lstStyle/>
+          <a:p>
+            <a:pPr indent="0" marL="0">
+              <a:buNone/>
+            </a:pPr>
+            <a:r>
+              <a:rPr lang="en-US" sz="1250" dirty="0">
                 <a:solidFill>
                   <a:srgbClr val="E7EDF5"/>
+                </a:solidFill>
+                <a:latin typeface="Courier New" pitchFamily="34" charset="0"/>
+                <a:ea typeface="Courier New" pitchFamily="34" charset="-122"/>
+                <a:cs typeface="Courier New" pitchFamily="34" charset="-120"/>
+              </a:rPr>
+              <a:t>524,288 스레드가 전역 메모리를 검사</a:t>
+            </a:r>
+            <a:endParaRPr lang="en-US" sz="1250" dirty="0"/>
+          </a:p>
+        </p:txBody>
+      </p:sp>
+      <p:sp>
+        <p:nvSpPr>
+          <p:cNvPr id="23" name="Text 21"/>
+          <p:cNvSpPr/>
+          <p:nvPr/>
+        </p:nvSpPr>
+        <p:spPr>
+          <a:xfrm>
+            <a:off x="2606040" y="6153912"/>
+            <a:ext cx="5715000" cy="329184"/>
+          </a:xfrm>
+          <a:prstGeom prst="rect">
+            <a:avLst/>
+          </a:prstGeom>
+          <a:noFill/>
+          <a:ln/>
+        </p:spPr>
+        <p:txBody>
+          <a:bodyPr wrap="square" lIns="0" tIns="0" rIns="0" bIns="0" rtlCol="0" anchor="ctr"/>
+          <a:lstStyle/>
+          <a:p>
+            <a:pPr indent="0" marL="0">
+              <a:buNone/>
+            </a:pPr>
+            <a:r>
+              <a:rPr lang="en-US" sz="1200" dirty="0">
+                <a:solidFill>
+                  <a:srgbClr val="9FB0C4"/>
                 </a:solidFill>
                 <a:latin typeface="Malgun Gothic" pitchFamily="34" charset="0"/>
                 <a:ea typeface="Malgun Gothic" pitchFamily="34" charset="-122"/>
                 <a:cs typeface="Malgun Gothic" pitchFamily="34" charset="-120"/>
               </a:rPr>
-              <a:t>allocate는 세 번의 할당 중 하나라도 실패하면 이미 잡은 것을 되돌리고 0을 반환 (예외 안전)</a:t>
-            </a:r>
-            <a:endParaRPr lang="en-US" sz="1400" dirty="0"/>
-          </a:p>
-          <a:p>
-            <a:pPr marL="342900" indent="-342900">
-              <a:lnSpc>
-                <a:spcPct val="105000"/>
-              </a:lnSpc>
-              <a:spcAft>
-                <a:spcPts val="900"/>
-              </a:spcAft>
-              <a:buSzPct val="100000"/>
-              <a:buChar char="•"/>
-            </a:pPr>
-            <a:r>
-              <a:rPr lang="en-US" sz="1400" dirty="0">
-                <a:solidFill>
-                  <a:srgbClr val="E7EDF5"/>
+              <a:t>하드웨어</a:t>
+            </a:r>
+            <a:endParaRPr lang="en-US" sz="1200" dirty="0"/>
+          </a:p>
+        </p:txBody>
+      </p:sp>
+      <p:sp>
+        <p:nvSpPr>
+          <p:cNvPr id="24" name="Shape 22"/>
+          <p:cNvSpPr/>
+          <p:nvPr/>
+        </p:nvSpPr>
+        <p:spPr>
+          <a:xfrm>
+            <a:off x="9006840" y="2011680"/>
+            <a:ext cx="0" cy="4535424"/>
+          </a:xfrm>
+          <a:prstGeom prst="line">
+            <a:avLst/>
+          </a:prstGeom>
+          <a:noFill/>
+          <a:ln w="25400">
+            <a:solidFill>
+              <a:srgbClr val="3FB8C4"/>
+            </a:solidFill>
+            <a:prstDash val="solid"/>
+            <a:headEnd type="triangle"/>
+          </a:ln>
+        </p:spPr>
+      </p:sp>
+      <p:sp>
+        <p:nvSpPr>
+          <p:cNvPr id="25" name="Text 23"/>
+          <p:cNvSpPr/>
+          <p:nvPr/>
+        </p:nvSpPr>
+        <p:spPr>
+          <a:xfrm>
+            <a:off x="9116568" y="3877056"/>
+            <a:ext cx="1554480" cy="1097280"/>
+          </a:xfrm>
+          <a:prstGeom prst="rect">
+            <a:avLst/>
+          </a:prstGeom>
+          <a:noFill/>
+          <a:ln/>
+        </p:spPr>
+        <p:txBody>
+          <a:bodyPr wrap="square" lIns="0" tIns="0" rIns="0" bIns="0" rtlCol="0" anchor="ctr"/>
+          <a:lstStyle/>
+          <a:p>
+            <a:pPr indent="0" marL="0">
+              <a:buNone/>
+            </a:pPr>
+            <a:r>
+              <a:rPr lang="en-US" sz="1150" dirty="0">
+                <a:solidFill>
+                  <a:srgbClr val="3FB8C4"/>
                 </a:solidFill>
                 <a:latin typeface="Malgun Gothic" pitchFamily="34" charset="0"/>
                 <a:ea typeface="Malgun Gothic" pitchFamily="34" charset="-122"/>
                 <a:cs typeface="Malgun Gothic" pitchFamily="34" charset="-120"/>
               </a:rPr>
-              <a:t>cudaGetLastError()로 CUDA 오류 플래그를 청소해 바깥 세계에 새지 않게 함</a:t>
-            </a:r>
-            <a:endParaRPr lang="en-US" sz="1400" dirty="0"/>
+              <a:t>오류 수</a:t>
+            </a:r>
+            <a:endParaRPr lang="en-US" sz="1150" dirty="0"/>
+          </a:p>
+          <a:p>
+            <a:pPr indent="0" marL="0">
+              <a:buNone/>
+            </a:pPr>
+            <a:r>
+              <a:rPr lang="en-US" sz="1150" dirty="0">
+                <a:solidFill>
+                  <a:srgbClr val="3FB8C4"/>
+                </a:solidFill>
+                <a:latin typeface="Malgun Gothic" pitchFamily="34" charset="0"/>
+                <a:ea typeface="Malgun Gothic" pitchFamily="34" charset="-122"/>
+                <a:cs typeface="Malgun Gothic" pitchFamily="34" charset="-120"/>
+              </a:rPr>
+              <a:t>(bool·uint)</a:t>
+            </a:r>
+            <a:endParaRPr lang="en-US" sz="1150" dirty="0"/>
+          </a:p>
+          <a:p>
+            <a:pPr indent="0" marL="0">
+              <a:buNone/>
+            </a:pPr>
+            <a:r>
+              <a:rPr lang="en-US" sz="1150" dirty="0">
+                <a:solidFill>
+                  <a:srgbClr val="3FB8C4"/>
+                </a:solidFill>
+                <a:latin typeface="Malgun Gothic" pitchFamily="34" charset="0"/>
+                <a:ea typeface="Malgun Gothic" pitchFamily="34" charset="-122"/>
+                <a:cs typeface="Malgun Gothic" pitchFamily="34" charset="-120"/>
+              </a:rPr>
+              <a:t>되돌아옴</a:t>
+            </a:r>
+            <a:endParaRPr lang="en-US" sz="1150" dirty="0"/>
           </a:p>
         </p:txBody>
       </p:sp>
@@ -3668,7 +5314,7 @@
                 <a:ea typeface="Courier New" pitchFamily="34" charset="-122"/>
                 <a:cs typeface="Courier New" pitchFamily="34" charset="-120"/>
               </a:rPr>
-              <a:t>4</a:t>
+              <a:t>3</a:t>
             </a:r>
             <a:endParaRPr lang="en-US" sz="2200" dirty="0"/>
           </a:p>
@@ -3707,7 +5353,7 @@
                 <a:ea typeface="Malgun Gothic" pitchFamily="34" charset="-122"/>
                 <a:cs typeface="Malgun Gothic" pitchFamily="34" charset="-120"/>
               </a:rPr>
-              <a:t>내 프로그램에 임베드하기</a:t>
+              <a:t>자원 관리 · allocate / deallocate (RAII)</a:t>
             </a:r>
             <a:endParaRPr lang="en-US" sz="2900" dirty="0"/>
           </a:p>
@@ -3715,57 +5361,18 @@
       </p:sp>
       <p:sp>
         <p:nvSpPr>
-          <p:cNvPr id="4" name="Text 2"/>
-          <p:cNvSpPr/>
-          <p:nvPr/>
-        </p:nvSpPr>
-        <p:spPr>
-          <a:xfrm>
-            <a:off x="548640" y="1463040"/>
-            <a:ext cx="11064240" cy="457200"/>
-          </a:xfrm>
-          <a:prstGeom prst="rect">
-            <a:avLst/>
-          </a:prstGeom>
-          <a:noFill/>
-          <a:ln/>
-        </p:spPr>
-        <p:txBody>
-          <a:bodyPr wrap="square" lIns="0" tIns="0" rIns="0" bIns="0" rtlCol="0" anchor="ctr"/>
-          <a:lstStyle/>
-          <a:p>
-            <a:pPr indent="0" marL="0">
-              <a:buNone/>
-            </a:pPr>
-            <a:r>
-              <a:rPr lang="en-US" sz="1600" dirty="0">
-                <a:solidFill>
-                  <a:srgbClr val="9FB0C4"/>
-                </a:solidFill>
-                <a:latin typeface="Malgun Gothic" pitchFamily="34" charset="0"/>
-                <a:ea typeface="Malgun Gothic" pitchFamily="34" charset="-122"/>
-                <a:cs typeface="Malgun Gothic" pitchFamily="34" charset="-120"/>
-              </a:rPr>
-              <a:t>이것이 MemtestG80의 원래 목적 — 다른 소프트웨어가 실행 전 GPU 건전성을 검증하도록.</a:t>
-            </a:r>
-            <a:endParaRPr lang="en-US" sz="1600" dirty="0"/>
-          </a:p>
-        </p:txBody>
-      </p:sp>
-      <p:sp>
-        <p:nvSpPr>
-          <p:cNvPr id="5" name="Shape 3"/>
-          <p:cNvSpPr/>
-          <p:nvPr/>
-        </p:nvSpPr>
-        <p:spPr>
-          <a:xfrm>
-            <a:off x="548640" y="2011680"/>
-            <a:ext cx="11064240" cy="3108960"/>
+          <p:cNvPr id="4" name="Shape 2"/>
+          <p:cNvSpPr/>
+          <p:nvPr/>
+        </p:nvSpPr>
+        <p:spPr>
+          <a:xfrm>
+            <a:off x="548640" y="1508760"/>
+            <a:ext cx="11064240" cy="2377440"/>
           </a:xfrm>
           <a:prstGeom prst="roundRect">
             <a:avLst>
-              <a:gd name="adj" fmla="val 1471"/>
+              <a:gd name="adj" fmla="val 1923"/>
             </a:avLst>
           </a:prstGeom>
           <a:solidFill>
@@ -3781,14 +5388,14 @@
       </p:sp>
       <p:sp>
         <p:nvSpPr>
-          <p:cNvPr id="6" name="Text 4"/>
-          <p:cNvSpPr/>
-          <p:nvPr/>
-        </p:nvSpPr>
-        <p:spPr>
-          <a:xfrm>
-            <a:off x="768096" y="2157984"/>
-            <a:ext cx="10625328" cy="2816352"/>
+          <p:cNvPr id="5" name="Text 3"/>
+          <p:cNvSpPr/>
+          <p:nvPr/>
+        </p:nvSpPr>
+        <p:spPr>
+          <a:xfrm>
+            <a:off x="768096" y="1655064"/>
+            <a:ext cx="10625328" cy="2084832"/>
           </a:xfrm>
           <a:prstGeom prst="rect">
             <a:avLst/>
@@ -3809,13 +5416,13 @@
             <a:r>
               <a:rPr lang="en-US" sz="1300" dirty="0">
                 <a:solidFill>
-                  <a:srgbClr val="3FB8C4"/>
+                  <a:srgbClr val="6B7D94"/>
                 </a:solidFill>
                 <a:latin typeface="Courier New" pitchFamily="34" charset="0"/>
                 <a:ea typeface="Courier New" pitchFamily="34" charset="-122"/>
                 <a:cs typeface="Courier New" pitchFamily="34" charset="-120"/>
               </a:rPr>
-              <a:t>#include "memtestG80_core.h"</a:t>
+              <a:t>// core.h:78 — 생성자에서 상수·기본값 초기화</a:t>
             </a:r>
             <a:endParaRPr lang="en-US" sz="1300" dirty="0"/>
           </a:p>
@@ -3826,6 +5433,17 @@
               </a:lnSpc>
               <a:buNone/>
             </a:pPr>
+            <a:r>
+              <a:rPr lang="en-US" sz="1300" dirty="0">
+                <a:solidFill>
+                  <a:srgbClr val="E7EDF5"/>
+                </a:solidFill>
+                <a:latin typeface="Courier New" pitchFamily="34" charset="0"/>
+                <a:ea typeface="Courier New" pitchFamily="34" charset="-122"/>
+                <a:cs typeface="Courier New" pitchFamily="34" charset="-120"/>
+              </a:rPr>
+              <a:t>memtestState() : nBlocks(1024), nThreads(512), allocated(false),</a:t>
+            </a:r>
             <a:endParaRPr lang="en-US" sz="1300" dirty="0"/>
           </a:p>
           <a:p>
@@ -3844,7 +5462,7 @@
                 <a:ea typeface="Courier New" pitchFamily="34" charset="-122"/>
                 <a:cs typeface="Courier New" pitchFamily="34" charset="-120"/>
               </a:rPr>
-              <a:t>bool gpuIsHealthy(int mb) {</a:t>
+              <a:t>                devTestMem(NULL), ..., lcgPeriod(1024) {};</a:t>
             </a:r>
             <a:endParaRPr lang="en-US" sz="1300" dirty="0"/>
           </a:p>
@@ -3864,7 +5482,7 @@
                 <a:ea typeface="Courier New" pitchFamily="34" charset="-122"/>
                 <a:cs typeface="Courier New" pitchFamily="34" charset="-120"/>
               </a:rPr>
-              <a:t>    memtestState tester;</a:t>
+              <a:t>~memtestState() { deallocate(); }        // 소멸자가 자동으로 해제</a:t>
             </a:r>
             <a:endParaRPr lang="en-US" sz="1300" dirty="0"/>
           </a:p>
@@ -3875,17 +5493,6 @@
               </a:lnSpc>
               <a:buNone/>
             </a:pPr>
-            <a:r>
-              <a:rPr lang="en-US" sz="1300" dirty="0">
-                <a:solidFill>
-                  <a:srgbClr val="E7EDF5"/>
-                </a:solidFill>
-                <a:latin typeface="Courier New" pitchFamily="34" charset="0"/>
-                <a:ea typeface="Courier New" pitchFamily="34" charset="-122"/>
-                <a:cs typeface="Courier New" pitchFamily="34" charset="-120"/>
-              </a:rPr>
-              <a:t>    if (!tester.allocate(mb)) return false;      // 메모리 확보 실패</a:t>
-            </a:r>
             <a:endParaRPr lang="en-US" sz="1300" dirty="0"/>
           </a:p>
           <a:p>
@@ -3895,6 +5502,17 @@
               </a:lnSpc>
               <a:buNone/>
             </a:pPr>
+            <a:r>
+              <a:rPr lang="en-US" sz="1300" dirty="0">
+                <a:solidFill>
+                  <a:srgbClr val="6B7D94"/>
+                </a:solidFill>
+                <a:latin typeface="Courier New" pitchFamily="34" charset="0"/>
+                <a:ea typeface="Courier New" pitchFamily="34" charset="-122"/>
+                <a:cs typeface="Courier New" pitchFamily="34" charset="-120"/>
+              </a:rPr>
+              <a:t>// core.cu:38 — deallocate: cudaFree + free, 포인터를 NULL로</a:t>
+            </a:r>
             <a:endParaRPr lang="en-US" sz="1300" dirty="0"/>
           </a:p>
           <a:p>
@@ -3907,174 +5525,109 @@
             <a:r>
               <a:rPr lang="en-US" sz="1300" dirty="0">
                 <a:solidFill>
-                  <a:srgbClr val="E7EDF5"/>
+                  <a:srgbClr val="3FB8C4"/>
                 </a:solidFill>
                 <a:latin typeface="Courier New" pitchFamily="34" charset="0"/>
                 <a:ea typeface="Courier New" pitchFamily="34" charset="-122"/>
                 <a:cs typeface="Courier New" pitchFamily="34" charset="-120"/>
               </a:rPr>
-              <a:t>    uint errors = 0, e;</a:t>
+              <a:t>uint allocate(uint mbToTest);            // 실패 시 0 반환, 부분 할당 정리</a:t>
             </a:r>
             <a:endParaRPr lang="en-US" sz="1300" dirty="0"/>
           </a:p>
-          <a:p>
-            <a:pPr algn="l" indent="0" marL="0">
+        </p:txBody>
+      </p:sp>
+      <p:sp>
+        <p:nvSpPr>
+          <p:cNvPr id="6" name="Text 4"/>
+          <p:cNvSpPr/>
+          <p:nvPr/>
+        </p:nvSpPr>
+        <p:spPr>
+          <a:xfrm>
+            <a:off x="548640" y="4023360"/>
+            <a:ext cx="11064240" cy="1645920"/>
+          </a:xfrm>
+          <a:prstGeom prst="rect">
+            <a:avLst/>
+          </a:prstGeom>
+          <a:noFill/>
+          <a:ln/>
+        </p:spPr>
+        <p:txBody>
+          <a:bodyPr wrap="square" lIns="0" tIns="0" rIns="0" bIns="0" rtlCol="0" anchor="t"/>
+          <a:lstStyle/>
+          <a:p>
+            <a:pPr marL="342900" indent="-342900">
               <a:lnSpc>
-                <a:spcPct val="110000"/>
+                <a:spcPct val="105000"/>
               </a:lnSpc>
-              <a:buNone/>
-            </a:pPr>
-            <a:r>
-              <a:rPr lang="en-US" sz="1300" dirty="0">
-                <a:solidFill>
-                  <a:srgbClr val="3FB8C4"/>
-                </a:solidFill>
-                <a:latin typeface="Courier New" pitchFamily="34" charset="0"/>
-                <a:ea typeface="Courier New" pitchFamily="34" charset="-122"/>
-                <a:cs typeface="Courier New" pitchFamily="34" charset="-120"/>
-              </a:rPr>
-              <a:t>    tester.gpuMovingInversionsOnesZeros(e); errors += e;</a:t>
-            </a:r>
-            <a:endParaRPr lang="en-US" sz="1300" dirty="0"/>
-          </a:p>
-          <a:p>
-            <a:pPr algn="l" indent="0" marL="0">
-              <a:lnSpc>
-                <a:spcPct val="110000"/>
-              </a:lnSpc>
-              <a:buNone/>
-            </a:pPr>
-            <a:r>
-              <a:rPr lang="en-US" sz="1300" dirty="0">
+              <a:spcAft>
+                <a:spcPts val="900"/>
+              </a:spcAft>
+              <a:buSzPct val="100000"/>
+              <a:buChar char="•"/>
+            </a:pPr>
+            <a:r>
+              <a:rPr lang="en-US" sz="1400" dirty="0">
                 <a:solidFill>
                   <a:srgbClr val="E7EDF5"/>
-                </a:solidFill>
-                <a:latin typeface="Courier New" pitchFamily="34" charset="0"/>
-                <a:ea typeface="Courier New" pitchFamily="34" charset="-122"/>
-                <a:cs typeface="Courier New" pitchFamily="34" charset="-120"/>
-              </a:rPr>
-              <a:t>    for (uint s = 0; s &lt; 32; s++) {</a:t>
-            </a:r>
-            <a:endParaRPr lang="en-US" sz="1300" dirty="0"/>
-          </a:p>
-          <a:p>
-            <a:pPr algn="l" indent="0" marL="0">
-              <a:lnSpc>
-                <a:spcPct val="110000"/>
-              </a:lnSpc>
-              <a:buNone/>
-            </a:pPr>
-            <a:r>
-              <a:rPr lang="en-US" sz="1300" dirty="0">
-                <a:solidFill>
-                  <a:srgbClr val="3FB8C4"/>
-                </a:solidFill>
-                <a:latin typeface="Courier New" pitchFamily="34" charset="0"/>
-                <a:ea typeface="Courier New" pitchFamily="34" charset="-122"/>
-                <a:cs typeface="Courier New" pitchFamily="34" charset="-120"/>
-              </a:rPr>
-              <a:t>        tester.gpuWalking32Bit(e, true, s); errors += e;</a:t>
-            </a:r>
-            <a:endParaRPr lang="en-US" sz="1300" dirty="0"/>
-          </a:p>
-          <a:p>
-            <a:pPr algn="l" indent="0" marL="0">
-              <a:lnSpc>
-                <a:spcPct val="110000"/>
-              </a:lnSpc>
-              <a:buNone/>
-            </a:pPr>
-            <a:r>
-              <a:rPr lang="en-US" sz="1300" dirty="0">
-                <a:solidFill>
-                  <a:srgbClr val="E7EDF5"/>
-                </a:solidFill>
-                <a:latin typeface="Courier New" pitchFamily="34" charset="0"/>
-                <a:ea typeface="Courier New" pitchFamily="34" charset="-122"/>
-                <a:cs typeface="Courier New" pitchFamily="34" charset="-120"/>
-              </a:rPr>
-              <a:t>    }</a:t>
-            </a:r>
-            <a:endParaRPr lang="en-US" sz="1300" dirty="0"/>
-          </a:p>
-          <a:p>
-            <a:pPr algn="l" indent="0" marL="0">
-              <a:lnSpc>
-                <a:spcPct val="110000"/>
-              </a:lnSpc>
-              <a:buNone/>
-            </a:pPr>
-            <a:r>
-              <a:rPr lang="en-US" sz="1300" dirty="0">
-                <a:solidFill>
-                  <a:srgbClr val="F2C079"/>
-                </a:solidFill>
-                <a:latin typeface="Courier New" pitchFamily="34" charset="0"/>
-                <a:ea typeface="Courier New" pitchFamily="34" charset="-122"/>
-                <a:cs typeface="Courier New" pitchFamily="34" charset="-120"/>
-              </a:rPr>
-              <a:t>    return errors == 0;                          // 소멸자가 자동 해제</a:t>
-            </a:r>
-            <a:endParaRPr lang="en-US" sz="1300" dirty="0"/>
-          </a:p>
-          <a:p>
-            <a:pPr algn="l" indent="0" marL="0">
-              <a:lnSpc>
-                <a:spcPct val="110000"/>
-              </a:lnSpc>
-              <a:buNone/>
-            </a:pPr>
-            <a:r>
-              <a:rPr lang="en-US" sz="1300" dirty="0">
-                <a:solidFill>
-                  <a:srgbClr val="E7EDF5"/>
-                </a:solidFill>
-                <a:latin typeface="Courier New" pitchFamily="34" charset="0"/>
-                <a:ea typeface="Courier New" pitchFamily="34" charset="-122"/>
-                <a:cs typeface="Courier New" pitchFamily="34" charset="-120"/>
-              </a:rPr>
-              <a:t>}</a:t>
-            </a:r>
-            <a:endParaRPr lang="en-US" sz="1300" dirty="0"/>
-          </a:p>
-        </p:txBody>
-      </p:sp>
-      <p:sp>
-        <p:nvSpPr>
-          <p:cNvPr id="7" name="Text 5"/>
-          <p:cNvSpPr/>
-          <p:nvPr/>
-        </p:nvSpPr>
-        <p:spPr>
-          <a:xfrm>
-            <a:off x="548640" y="5257800"/>
-            <a:ext cx="11064240" cy="457200"/>
-          </a:xfrm>
-          <a:prstGeom prst="rect">
-            <a:avLst/>
-          </a:prstGeom>
-          <a:noFill/>
-          <a:ln/>
-        </p:spPr>
-        <p:txBody>
-          <a:bodyPr wrap="square" lIns="0" tIns="0" rIns="0" bIns="0" rtlCol="0" anchor="ctr"/>
-          <a:lstStyle/>
-          <a:p>
-            <a:pPr indent="0" marL="0">
-              <a:buNone/>
-            </a:pPr>
-            <a:r>
-              <a:rPr lang="en-US" sz="1300" i="1" dirty="0">
-                <a:solidFill>
-                  <a:srgbClr val="9FB0C4"/>
                 </a:solidFill>
                 <a:latin typeface="Malgun Gothic" pitchFamily="34" charset="0"/>
                 <a:ea typeface="Malgun Gothic" pitchFamily="34" charset="-122"/>
                 <a:cs typeface="Malgun Gothic" pitchFamily="34" charset="-120"/>
               </a:rPr>
-              <a:t>LGPL: 오픈소스는 정적 링크, 클로즈드 소스는 공유 라이브러리(.so/.dll)로 링크해야 합니다.</a:t>
-            </a:r>
-            <a:endParaRPr lang="en-US" sz="1300" dirty="0"/>
+              <a:t>소멸자가 deallocate를 호출 → 객체가 스코프를 벗어나면 GPU 메모리가 자동 해제 (누수 방지)</a:t>
+            </a:r>
+            <a:endParaRPr lang="en-US" sz="1400" dirty="0"/>
+          </a:p>
+          <a:p>
+            <a:pPr marL="342900" indent="-342900">
+              <a:lnSpc>
+                <a:spcPct val="105000"/>
+              </a:lnSpc>
+              <a:spcAft>
+                <a:spcPts val="900"/>
+              </a:spcAft>
+              <a:buSzPct val="100000"/>
+              <a:buChar char="•"/>
+            </a:pPr>
+            <a:r>
+              <a:rPr lang="en-US" sz="1400" dirty="0">
+                <a:solidFill>
+                  <a:srgbClr val="E7EDF5"/>
+                </a:solidFill>
+                <a:latin typeface="Malgun Gothic" pitchFamily="34" charset="0"/>
+                <a:ea typeface="Malgun Gothic" pitchFamily="34" charset="-122"/>
+                <a:cs typeface="Malgun Gothic" pitchFamily="34" charset="-120"/>
+              </a:rPr>
+              <a:t>allocate는 세 번의 할당 중 하나라도 실패하면 이미 잡은 것을 되돌리고 0을 반환 (예외 안전)</a:t>
+            </a:r>
+            <a:endParaRPr lang="en-US" sz="1400" dirty="0"/>
+          </a:p>
+          <a:p>
+            <a:pPr marL="342900" indent="-342900">
+              <a:lnSpc>
+                <a:spcPct val="105000"/>
+              </a:lnSpc>
+              <a:spcAft>
+                <a:spcPts val="900"/>
+              </a:spcAft>
+              <a:buSzPct val="100000"/>
+              <a:buChar char="•"/>
+            </a:pPr>
+            <a:r>
+              <a:rPr lang="en-US" sz="1400" dirty="0">
+                <a:solidFill>
+                  <a:srgbClr val="E7EDF5"/>
+                </a:solidFill>
+                <a:latin typeface="Malgun Gothic" pitchFamily="34" charset="0"/>
+                <a:ea typeface="Malgun Gothic" pitchFamily="34" charset="-122"/>
+                <a:cs typeface="Malgun Gothic" pitchFamily="34" charset="-120"/>
+              </a:rPr>
+              <a:t>cudaGetLastError()로 CUDA 오류 플래그를 청소해 바깥 세계에 새지 않게 함</a:t>
+            </a:r>
+            <a:endParaRPr lang="en-US" sz="1400" dirty="0"/>
           </a:p>
         </p:txBody>
       </p:sp>
@@ -4147,7 +5700,7 @@
                 <a:ea typeface="Courier New" pitchFamily="34" charset="-122"/>
                 <a:cs typeface="Courier New" pitchFamily="34" charset="-120"/>
               </a:rPr>
-              <a:t>5</a:t>
+              <a:t>4</a:t>
             </a:r>
             <a:endParaRPr lang="en-US" sz="2200" dirty="0"/>
           </a:p>
@@ -4186,7 +5739,7 @@
                 <a:ea typeface="Malgun Gothic" pitchFamily="34" charset="-122"/>
                 <a:cs typeface="Malgun Gothic" pitchFamily="34" charset="-120"/>
               </a:rPr>
-              <a:t>오류 관례 · 4억을 넘는 '오류'의 정체</a:t>
+              <a:t>내 프로그램에 임베드하기</a:t>
             </a:r>
             <a:endParaRPr lang="en-US" sz="2900" dirty="0"/>
           </a:p>
@@ -4194,75 +5747,340 @@
       </p:sp>
       <p:sp>
         <p:nvSpPr>
-          <p:cNvPr id="4" name="Shape 2"/>
-          <p:cNvSpPr/>
-          <p:nvPr/>
-        </p:nvSpPr>
-        <p:spPr>
-          <a:xfrm>
-            <a:off x="548640" y="1737360"/>
-            <a:ext cx="11064240" cy="960120"/>
+          <p:cNvPr id="4" name="Text 2"/>
+          <p:cNvSpPr/>
+          <p:nvPr/>
+        </p:nvSpPr>
+        <p:spPr>
+          <a:xfrm>
+            <a:off x="548640" y="1463040"/>
+            <a:ext cx="11064240" cy="457200"/>
+          </a:xfrm>
+          <a:prstGeom prst="rect">
+            <a:avLst/>
+          </a:prstGeom>
+          <a:noFill/>
+          <a:ln/>
+        </p:spPr>
+        <p:txBody>
+          <a:bodyPr wrap="square" lIns="0" tIns="0" rIns="0" bIns="0" rtlCol="0" anchor="ctr"/>
+          <a:lstStyle/>
+          <a:p>
+            <a:pPr indent="0" marL="0">
+              <a:buNone/>
+            </a:pPr>
+            <a:r>
+              <a:rPr lang="en-US" sz="1600" dirty="0">
+                <a:solidFill>
+                  <a:srgbClr val="9FB0C4"/>
+                </a:solidFill>
+                <a:latin typeface="Malgun Gothic" pitchFamily="34" charset="0"/>
+                <a:ea typeface="Malgun Gothic" pitchFamily="34" charset="-122"/>
+                <a:cs typeface="Malgun Gothic" pitchFamily="34" charset="-120"/>
+              </a:rPr>
+              <a:t>이것이 MemtestG80의 원래 목적 — 다른 소프트웨어가 실행 전 GPU 건전성을 검증하도록.</a:t>
+            </a:r>
+            <a:endParaRPr lang="en-US" sz="1600" dirty="0"/>
+          </a:p>
+        </p:txBody>
+      </p:sp>
+      <p:sp>
+        <p:nvSpPr>
+          <p:cNvPr id="5" name="Shape 3"/>
+          <p:cNvSpPr/>
+          <p:nvPr/>
+        </p:nvSpPr>
+        <p:spPr>
+          <a:xfrm>
+            <a:off x="548640" y="2011680"/>
+            <a:ext cx="11064240" cy="3108960"/>
           </a:xfrm>
           <a:prstGeom prst="roundRect">
             <a:avLst>
-              <a:gd name="adj" fmla="val 7619"/>
+              <a:gd name="adj" fmla="val 1471"/>
             </a:avLst>
           </a:prstGeom>
           <a:solidFill>
-            <a:srgbClr val="18212E"/>
+            <a:srgbClr val="0B1119"/>
           </a:solidFill>
-          <a:ln/>
-        </p:spPr>
-      </p:sp>
-      <p:sp>
-        <p:nvSpPr>
-          <p:cNvPr id="5" name="Text 3"/>
-          <p:cNvSpPr/>
-          <p:nvPr/>
-        </p:nvSpPr>
-        <p:spPr>
-          <a:xfrm>
-            <a:off x="822960" y="1828800"/>
-            <a:ext cx="2926080" cy="777240"/>
-          </a:xfrm>
-          <a:prstGeom prst="rect">
-            <a:avLst/>
-          </a:prstGeom>
-          <a:noFill/>
-          <a:ln/>
-        </p:spPr>
-        <p:txBody>
-          <a:bodyPr wrap="square" lIns="0" tIns="0" rIns="0" bIns="0" rtlCol="0" anchor="ctr"/>
-          <a:lstStyle/>
-          <a:p>
-            <a:pPr indent="0" marL="0">
-              <a:buNone/>
-            </a:pPr>
-            <a:r>
-              <a:rPr lang="en-US" sz="1700" b="1" dirty="0">
-                <a:solidFill>
-                  <a:srgbClr val="E6604F"/>
+          <a:ln w="12700">
+            <a:solidFill>
+              <a:srgbClr val="2C3A4E"/>
+            </a:solidFill>
+            <a:prstDash val="solid"/>
+          </a:ln>
+        </p:spPr>
+      </p:sp>
+      <p:sp>
+        <p:nvSpPr>
+          <p:cNvPr id="6" name="Text 4"/>
+          <p:cNvSpPr/>
+          <p:nvPr/>
+        </p:nvSpPr>
+        <p:spPr>
+          <a:xfrm>
+            <a:off x="768096" y="2157984"/>
+            <a:ext cx="10625328" cy="2816352"/>
+          </a:xfrm>
+          <a:prstGeom prst="rect">
+            <a:avLst/>
+          </a:prstGeom>
+          <a:noFill/>
+          <a:ln/>
+        </p:spPr>
+        <p:txBody>
+          <a:bodyPr wrap="square" lIns="0" tIns="0" rIns="0" bIns="0" rtlCol="0" anchor="t"/>
+          <a:lstStyle/>
+          <a:p>
+            <a:pPr algn="l" indent="0" marL="0">
+              <a:lnSpc>
+                <a:spcPct val="110000"/>
+              </a:lnSpc>
+              <a:buNone/>
+            </a:pPr>
+            <a:r>
+              <a:rPr lang="en-US" sz="1300" dirty="0">
+                <a:solidFill>
+                  <a:srgbClr val="3FB8C4"/>
                 </a:solidFill>
                 <a:latin typeface="Courier New" pitchFamily="34" charset="0"/>
                 <a:ea typeface="Courier New" pitchFamily="34" charset="-122"/>
                 <a:cs typeface="Courier New" pitchFamily="34" charset="-120"/>
               </a:rPr>
-              <a:t>0xFFFFFFFF</a:t>
-            </a:r>
-            <a:endParaRPr lang="en-US" sz="1700" dirty="0"/>
-          </a:p>
-        </p:txBody>
-      </p:sp>
-      <p:sp>
-        <p:nvSpPr>
-          <p:cNvPr id="6" name="Text 4"/>
-          <p:cNvSpPr/>
-          <p:nvPr/>
-        </p:nvSpPr>
-        <p:spPr>
-          <a:xfrm>
-            <a:off x="3840480" y="1828800"/>
-            <a:ext cx="2926080" cy="777240"/>
+              <a:t>#include "memtestG80_core.h"</a:t>
+            </a:r>
+            <a:endParaRPr lang="en-US" sz="1300" dirty="0"/>
+          </a:p>
+          <a:p>
+            <a:pPr algn="l" indent="0" marL="0">
+              <a:lnSpc>
+                <a:spcPct val="110000"/>
+              </a:lnSpc>
+              <a:buNone/>
+            </a:pPr>
+            <a:endParaRPr lang="en-US" sz="1300" dirty="0"/>
+          </a:p>
+          <a:p>
+            <a:pPr algn="l" indent="0" marL="0">
+              <a:lnSpc>
+                <a:spcPct val="110000"/>
+              </a:lnSpc>
+              <a:buNone/>
+            </a:pPr>
+            <a:r>
+              <a:rPr lang="en-US" sz="1300" dirty="0">
+                <a:solidFill>
+                  <a:srgbClr val="E7EDF5"/>
+                </a:solidFill>
+                <a:latin typeface="Courier New" pitchFamily="34" charset="0"/>
+                <a:ea typeface="Courier New" pitchFamily="34" charset="-122"/>
+                <a:cs typeface="Courier New" pitchFamily="34" charset="-120"/>
+              </a:rPr>
+              <a:t>bool gpuIsHealthy(int mb) {</a:t>
+            </a:r>
+            <a:endParaRPr lang="en-US" sz="1300" dirty="0"/>
+          </a:p>
+          <a:p>
+            <a:pPr algn="l" indent="0" marL="0">
+              <a:lnSpc>
+                <a:spcPct val="110000"/>
+              </a:lnSpc>
+              <a:buNone/>
+            </a:pPr>
+            <a:r>
+              <a:rPr lang="en-US" sz="1300" dirty="0">
+                <a:solidFill>
+                  <a:srgbClr val="F2C079"/>
+                </a:solidFill>
+                <a:latin typeface="Courier New" pitchFamily="34" charset="0"/>
+                <a:ea typeface="Courier New" pitchFamily="34" charset="-122"/>
+                <a:cs typeface="Courier New" pitchFamily="34" charset="-120"/>
+              </a:rPr>
+              <a:t>    memtestState tester;</a:t>
+            </a:r>
+            <a:endParaRPr lang="en-US" sz="1300" dirty="0"/>
+          </a:p>
+          <a:p>
+            <a:pPr algn="l" indent="0" marL="0">
+              <a:lnSpc>
+                <a:spcPct val="110000"/>
+              </a:lnSpc>
+              <a:buNone/>
+            </a:pPr>
+            <a:r>
+              <a:rPr lang="en-US" sz="1300" dirty="0">
+                <a:solidFill>
+                  <a:srgbClr val="E7EDF5"/>
+                </a:solidFill>
+                <a:latin typeface="Courier New" pitchFamily="34" charset="0"/>
+                <a:ea typeface="Courier New" pitchFamily="34" charset="-122"/>
+                <a:cs typeface="Courier New" pitchFamily="34" charset="-120"/>
+              </a:rPr>
+              <a:t>    if (!tester.allocate(mb)) return false;      // 메모리 확보 실패</a:t>
+            </a:r>
+            <a:endParaRPr lang="en-US" sz="1300" dirty="0"/>
+          </a:p>
+          <a:p>
+            <a:pPr algn="l" indent="0" marL="0">
+              <a:lnSpc>
+                <a:spcPct val="110000"/>
+              </a:lnSpc>
+              <a:buNone/>
+            </a:pPr>
+            <a:endParaRPr lang="en-US" sz="1300" dirty="0"/>
+          </a:p>
+          <a:p>
+            <a:pPr algn="l" indent="0" marL="0">
+              <a:lnSpc>
+                <a:spcPct val="110000"/>
+              </a:lnSpc>
+              <a:buNone/>
+            </a:pPr>
+            <a:r>
+              <a:rPr lang="en-US" sz="1300" dirty="0">
+                <a:solidFill>
+                  <a:srgbClr val="E7EDF5"/>
+                </a:solidFill>
+                <a:latin typeface="Courier New" pitchFamily="34" charset="0"/>
+                <a:ea typeface="Courier New" pitchFamily="34" charset="-122"/>
+                <a:cs typeface="Courier New" pitchFamily="34" charset="-120"/>
+              </a:rPr>
+              <a:t>    uint errors = 0, e;</a:t>
+            </a:r>
+            <a:endParaRPr lang="en-US" sz="1300" dirty="0"/>
+          </a:p>
+          <a:p>
+            <a:pPr algn="l" indent="0" marL="0">
+              <a:lnSpc>
+                <a:spcPct val="110000"/>
+              </a:lnSpc>
+              <a:buNone/>
+            </a:pPr>
+            <a:r>
+              <a:rPr lang="en-US" sz="1300" dirty="0">
+                <a:solidFill>
+                  <a:srgbClr val="3FB8C4"/>
+                </a:solidFill>
+                <a:latin typeface="Courier New" pitchFamily="34" charset="0"/>
+                <a:ea typeface="Courier New" pitchFamily="34" charset="-122"/>
+                <a:cs typeface="Courier New" pitchFamily="34" charset="-120"/>
+              </a:rPr>
+              <a:t>    tester.gpuMovingInversionsOnesZeros(e); errors += e;</a:t>
+            </a:r>
+            <a:endParaRPr lang="en-US" sz="1300" dirty="0"/>
+          </a:p>
+          <a:p>
+            <a:pPr algn="l" indent="0" marL="0">
+              <a:lnSpc>
+                <a:spcPct val="110000"/>
+              </a:lnSpc>
+              <a:buNone/>
+            </a:pPr>
+            <a:r>
+              <a:rPr lang="en-US" sz="1300" dirty="0">
+                <a:solidFill>
+                  <a:srgbClr val="E7EDF5"/>
+                </a:solidFill>
+                <a:latin typeface="Courier New" pitchFamily="34" charset="0"/>
+                <a:ea typeface="Courier New" pitchFamily="34" charset="-122"/>
+                <a:cs typeface="Courier New" pitchFamily="34" charset="-120"/>
+              </a:rPr>
+              <a:t>    for (uint s = 0; s &lt; 32; s++) {</a:t>
+            </a:r>
+            <a:endParaRPr lang="en-US" sz="1300" dirty="0"/>
+          </a:p>
+          <a:p>
+            <a:pPr algn="l" indent="0" marL="0">
+              <a:lnSpc>
+                <a:spcPct val="110000"/>
+              </a:lnSpc>
+              <a:buNone/>
+            </a:pPr>
+            <a:r>
+              <a:rPr lang="en-US" sz="1300" dirty="0">
+                <a:solidFill>
+                  <a:srgbClr val="3FB8C4"/>
+                </a:solidFill>
+                <a:latin typeface="Courier New" pitchFamily="34" charset="0"/>
+                <a:ea typeface="Courier New" pitchFamily="34" charset="-122"/>
+                <a:cs typeface="Courier New" pitchFamily="34" charset="-120"/>
+              </a:rPr>
+              <a:t>        tester.gpuWalking32Bit(e, true, s); errors += e;</a:t>
+            </a:r>
+            <a:endParaRPr lang="en-US" sz="1300" dirty="0"/>
+          </a:p>
+          <a:p>
+            <a:pPr algn="l" indent="0" marL="0">
+              <a:lnSpc>
+                <a:spcPct val="110000"/>
+              </a:lnSpc>
+              <a:buNone/>
+            </a:pPr>
+            <a:r>
+              <a:rPr lang="en-US" sz="1300" dirty="0">
+                <a:solidFill>
+                  <a:srgbClr val="E7EDF5"/>
+                </a:solidFill>
+                <a:latin typeface="Courier New" pitchFamily="34" charset="0"/>
+                <a:ea typeface="Courier New" pitchFamily="34" charset="-122"/>
+                <a:cs typeface="Courier New" pitchFamily="34" charset="-120"/>
+              </a:rPr>
+              <a:t>    }</a:t>
+            </a:r>
+            <a:endParaRPr lang="en-US" sz="1300" dirty="0"/>
+          </a:p>
+          <a:p>
+            <a:pPr algn="l" indent="0" marL="0">
+              <a:lnSpc>
+                <a:spcPct val="110000"/>
+              </a:lnSpc>
+              <a:buNone/>
+            </a:pPr>
+            <a:r>
+              <a:rPr lang="en-US" sz="1300" dirty="0">
+                <a:solidFill>
+                  <a:srgbClr val="F2C079"/>
+                </a:solidFill>
+                <a:latin typeface="Courier New" pitchFamily="34" charset="0"/>
+                <a:ea typeface="Courier New" pitchFamily="34" charset="-122"/>
+                <a:cs typeface="Courier New" pitchFamily="34" charset="-120"/>
+              </a:rPr>
+              <a:t>    return errors == 0;                          // 소멸자가 자동 해제</a:t>
+            </a:r>
+            <a:endParaRPr lang="en-US" sz="1300" dirty="0"/>
+          </a:p>
+          <a:p>
+            <a:pPr algn="l" indent="0" marL="0">
+              <a:lnSpc>
+                <a:spcPct val="110000"/>
+              </a:lnSpc>
+              <a:buNone/>
+            </a:pPr>
+            <a:r>
+              <a:rPr lang="en-US" sz="1300" dirty="0">
+                <a:solidFill>
+                  <a:srgbClr val="E7EDF5"/>
+                </a:solidFill>
+                <a:latin typeface="Courier New" pitchFamily="34" charset="0"/>
+                <a:ea typeface="Courier New" pitchFamily="34" charset="-122"/>
+                <a:cs typeface="Courier New" pitchFamily="34" charset="-120"/>
+              </a:rPr>
+              <a:t>}</a:t>
+            </a:r>
+            <a:endParaRPr lang="en-US" sz="1300" dirty="0"/>
+          </a:p>
+        </p:txBody>
+      </p:sp>
+      <p:sp>
+        <p:nvSpPr>
+          <p:cNvPr id="7" name="Text 5"/>
+          <p:cNvSpPr/>
+          <p:nvPr/>
+        </p:nvSpPr>
+        <p:spPr>
+          <a:xfrm>
+            <a:off x="548640" y="5257800"/>
+            <a:ext cx="11064240" cy="457200"/>
           </a:xfrm>
           <a:prstGeom prst="rect">
             <a:avLst/>
@@ -4278,420 +6096,17 @@
               <a:buNone/>
             </a:pPr>
             <a:r>
-              <a:rPr lang="en-US" sz="1600" b="1" dirty="0">
-                <a:solidFill>
-                  <a:srgbClr val="E7EDF5"/>
+              <a:rPr lang="en-US" sz="1300" i="1" dirty="0">
+                <a:solidFill>
+                  <a:srgbClr val="9FB0C4"/>
                 </a:solidFill>
                 <a:latin typeface="Malgun Gothic" pitchFamily="34" charset="0"/>
                 <a:ea typeface="Malgun Gothic" pitchFamily="34" charset="-122"/>
                 <a:cs typeface="Malgun Gothic" pitchFamily="34" charset="-120"/>
               </a:rPr>
-              <a:t>커널 launch 실패</a:t>
-            </a:r>
-            <a:endParaRPr lang="en-US" sz="1600" dirty="0"/>
-          </a:p>
-        </p:txBody>
-      </p:sp>
-      <p:sp>
-        <p:nvSpPr>
-          <p:cNvPr id="7" name="Text 5"/>
-          <p:cNvSpPr/>
-          <p:nvPr/>
-        </p:nvSpPr>
-        <p:spPr>
-          <a:xfrm>
-            <a:off x="6949440" y="1828800"/>
-            <a:ext cx="4389120" cy="777240"/>
-          </a:xfrm>
-          <a:prstGeom prst="rect">
-            <a:avLst/>
-          </a:prstGeom>
-          <a:noFill/>
-          <a:ln/>
-        </p:spPr>
-        <p:txBody>
-          <a:bodyPr wrap="square" lIns="0" tIns="0" rIns="0" bIns="0" rtlCol="0" anchor="ctr"/>
-          <a:lstStyle/>
-          <a:p>
-            <a:pPr indent="0" marL="0">
-              <a:buNone/>
-            </a:pPr>
-            <a:r>
-              <a:rPr lang="en-US" sz="1350" dirty="0">
-                <a:solidFill>
-                  <a:srgbClr val="9FB0C4"/>
-                </a:solidFill>
-                <a:latin typeface="Malgun Gothic" pitchFamily="34" charset="0"/>
-                <a:ea typeface="Malgun Gothic" pitchFamily="34" charset="-122"/>
-                <a:cs typeface="Malgun Gothic" pitchFamily="34" charset="-120"/>
-              </a:rPr>
-              <a:t>CHECK_LAUNCH_ERROR — cudaGetLastError 감지</a:t>
-            </a:r>
-            <a:endParaRPr lang="en-US" sz="1350" dirty="0"/>
-          </a:p>
-        </p:txBody>
-      </p:sp>
-      <p:sp>
-        <p:nvSpPr>
-          <p:cNvPr id="8" name="Shape 6"/>
-          <p:cNvSpPr/>
-          <p:nvPr/>
-        </p:nvSpPr>
-        <p:spPr>
-          <a:xfrm>
-            <a:off x="548640" y="2834640"/>
-            <a:ext cx="11064240" cy="960120"/>
-          </a:xfrm>
-          <a:prstGeom prst="roundRect">
-            <a:avLst>
-              <a:gd name="adj" fmla="val 7619"/>
-            </a:avLst>
-          </a:prstGeom>
-          <a:solidFill>
-            <a:srgbClr val="18212E"/>
-          </a:solidFill>
-          <a:ln/>
-        </p:spPr>
-      </p:sp>
-      <p:sp>
-        <p:nvSpPr>
-          <p:cNvPr id="9" name="Text 7"/>
-          <p:cNvSpPr/>
-          <p:nvPr/>
-        </p:nvSpPr>
-        <p:spPr>
-          <a:xfrm>
-            <a:off x="822960" y="2926080"/>
-            <a:ext cx="2926080" cy="777240"/>
-          </a:xfrm>
-          <a:prstGeom prst="rect">
-            <a:avLst/>
-          </a:prstGeom>
-          <a:noFill/>
-          <a:ln/>
-        </p:spPr>
-        <p:txBody>
-          <a:bodyPr wrap="square" lIns="0" tIns="0" rIns="0" bIns="0" rtlCol="0" anchor="ctr"/>
-          <a:lstStyle/>
-          <a:p>
-            <a:pPr indent="0" marL="0">
-              <a:buNone/>
-            </a:pPr>
-            <a:r>
-              <a:rPr lang="en-US" sz="1700" b="1" dirty="0">
-                <a:solidFill>
-                  <a:srgbClr val="E8A33D"/>
-                </a:solidFill>
-                <a:latin typeface="Courier New" pitchFamily="34" charset="0"/>
-                <a:ea typeface="Courier New" pitchFamily="34" charset="-122"/>
-                <a:cs typeface="Courier New" pitchFamily="34" charset="-120"/>
-              </a:rPr>
-              <a:t>0xFFFFFFFE</a:t>
-            </a:r>
-            <a:endParaRPr lang="en-US" sz="1700" dirty="0"/>
-          </a:p>
-        </p:txBody>
-      </p:sp>
-      <p:sp>
-        <p:nvSpPr>
-          <p:cNvPr id="10" name="Text 8"/>
-          <p:cNvSpPr/>
-          <p:nvPr/>
-        </p:nvSpPr>
-        <p:spPr>
-          <a:xfrm>
-            <a:off x="3840480" y="2926080"/>
-            <a:ext cx="2926080" cy="777240"/>
-          </a:xfrm>
-          <a:prstGeom prst="rect">
-            <a:avLst/>
-          </a:prstGeom>
-          <a:noFill/>
-          <a:ln/>
-        </p:spPr>
-        <p:txBody>
-          <a:bodyPr wrap="square" lIns="0" tIns="0" rIns="0" bIns="0" rtlCol="0" anchor="ctr"/>
-          <a:lstStyle/>
-          <a:p>
-            <a:pPr indent="0" marL="0">
-              <a:buNone/>
-            </a:pPr>
-            <a:r>
-              <a:rPr lang="en-US" sz="1600" b="1" dirty="0">
-                <a:solidFill>
-                  <a:srgbClr val="E7EDF5"/>
-                </a:solidFill>
-                <a:latin typeface="Malgun Gothic" pitchFamily="34" charset="0"/>
-                <a:ea typeface="Malgun Gothic" pitchFamily="34" charset="-122"/>
-                <a:cs typeface="Malgun Gothic" pitchFamily="34" charset="-120"/>
-              </a:rPr>
-              <a:t>커널 타임아웃</a:t>
-            </a:r>
-            <a:endParaRPr lang="en-US" sz="1600" dirty="0"/>
-          </a:p>
-        </p:txBody>
-      </p:sp>
-      <p:sp>
-        <p:nvSpPr>
-          <p:cNvPr id="11" name="Text 9"/>
-          <p:cNvSpPr/>
-          <p:nvPr/>
-        </p:nvSpPr>
-        <p:spPr>
-          <a:xfrm>
-            <a:off x="6949440" y="2926080"/>
-            <a:ext cx="4389120" cy="777240"/>
-          </a:xfrm>
-          <a:prstGeom prst="rect">
-            <a:avLst/>
-          </a:prstGeom>
-          <a:noFill/>
-          <a:ln/>
-        </p:spPr>
-        <p:txBody>
-          <a:bodyPr wrap="square" lIns="0" tIns="0" rIns="0" bIns="0" rtlCol="0" anchor="ctr"/>
-          <a:lstStyle/>
-          <a:p>
-            <a:pPr indent="0" marL="0">
-              <a:buNone/>
-            </a:pPr>
-            <a:r>
-              <a:rPr lang="en-US" sz="1350" dirty="0">
-                <a:solidFill>
-                  <a:srgbClr val="9FB0C4"/>
-                </a:solidFill>
-                <a:latin typeface="Malgun Gothic" pitchFamily="34" charset="0"/>
-                <a:ea typeface="Malgun Gothic" pitchFamily="34" charset="-122"/>
-                <a:cs typeface="Malgun Gothic" pitchFamily="34" charset="-120"/>
-              </a:rPr>
-              <a:t>SOFTWAIT 15초 초과 (디스플레이 워치독)</a:t>
-            </a:r>
-            <a:endParaRPr lang="en-US" sz="1350" dirty="0"/>
-          </a:p>
-        </p:txBody>
-      </p:sp>
-      <p:sp>
-        <p:nvSpPr>
-          <p:cNvPr id="12" name="Shape 10"/>
-          <p:cNvSpPr/>
-          <p:nvPr/>
-        </p:nvSpPr>
-        <p:spPr>
-          <a:xfrm>
-            <a:off x="548640" y="3931920"/>
-            <a:ext cx="11064240" cy="960120"/>
-          </a:xfrm>
-          <a:prstGeom prst="roundRect">
-            <a:avLst>
-              <a:gd name="adj" fmla="val 7619"/>
-            </a:avLst>
-          </a:prstGeom>
-          <a:solidFill>
-            <a:srgbClr val="18212E"/>
-          </a:solidFill>
-          <a:ln/>
-        </p:spPr>
-      </p:sp>
-      <p:sp>
-        <p:nvSpPr>
-          <p:cNvPr id="13" name="Text 11"/>
-          <p:cNvSpPr/>
-          <p:nvPr/>
-        </p:nvSpPr>
-        <p:spPr>
-          <a:xfrm>
-            <a:off x="822960" y="4023360"/>
-            <a:ext cx="2926080" cy="777240"/>
-          </a:xfrm>
-          <a:prstGeom prst="rect">
-            <a:avLst/>
-          </a:prstGeom>
-          <a:noFill/>
-          <a:ln/>
-        </p:spPr>
-        <p:txBody>
-          <a:bodyPr wrap="square" lIns="0" tIns="0" rIns="0" bIns="0" rtlCol="0" anchor="ctr"/>
-          <a:lstStyle/>
-          <a:p>
-            <a:pPr indent="0" marL="0">
-              <a:buNone/>
-            </a:pPr>
-            <a:r>
-              <a:rPr lang="en-US" sz="1700" b="1" dirty="0">
-                <a:solidFill>
-                  <a:srgbClr val="3FB8C4"/>
-                </a:solidFill>
-                <a:latin typeface="Courier New" pitchFamily="34" charset="0"/>
-                <a:ea typeface="Courier New" pitchFamily="34" charset="-122"/>
-                <a:cs typeface="Courier New" pitchFamily="34" charset="-120"/>
-              </a:rPr>
-              <a:t>정상 오류 수</a:t>
-            </a:r>
-            <a:endParaRPr lang="en-US" sz="1700" dirty="0"/>
-          </a:p>
-        </p:txBody>
-      </p:sp>
-      <p:sp>
-        <p:nvSpPr>
-          <p:cNvPr id="14" name="Text 12"/>
-          <p:cNvSpPr/>
-          <p:nvPr/>
-        </p:nvSpPr>
-        <p:spPr>
-          <a:xfrm>
-            <a:off x="3840480" y="4023360"/>
-            <a:ext cx="2926080" cy="777240"/>
-          </a:xfrm>
-          <a:prstGeom prst="rect">
-            <a:avLst/>
-          </a:prstGeom>
-          <a:noFill/>
-          <a:ln/>
-        </p:spPr>
-        <p:txBody>
-          <a:bodyPr wrap="square" lIns="0" tIns="0" rIns="0" bIns="0" rtlCol="0" anchor="ctr"/>
-          <a:lstStyle/>
-          <a:p>
-            <a:pPr indent="0" marL="0">
-              <a:buNone/>
-            </a:pPr>
-            <a:r>
-              <a:rPr lang="en-US" sz="1600" b="1" dirty="0">
-                <a:solidFill>
-                  <a:srgbClr val="E7EDF5"/>
-                </a:solidFill>
-                <a:latin typeface="Malgun Gothic" pitchFamily="34" charset="0"/>
-                <a:ea typeface="Malgun Gothic" pitchFamily="34" charset="-122"/>
-                <a:cs typeface="Malgun Gothic" pitchFamily="34" charset="-120"/>
-              </a:rPr>
-              <a:t>실제 비트 오류</a:t>
-            </a:r>
-            <a:endParaRPr lang="en-US" sz="1600" dirty="0"/>
-          </a:p>
-        </p:txBody>
-      </p:sp>
-      <p:sp>
-        <p:nvSpPr>
-          <p:cNvPr id="15" name="Text 13"/>
-          <p:cNvSpPr/>
-          <p:nvPr/>
-        </p:nvSpPr>
-        <p:spPr>
-          <a:xfrm>
-            <a:off x="6949440" y="4023360"/>
-            <a:ext cx="4389120" cy="777240"/>
-          </a:xfrm>
-          <a:prstGeom prst="rect">
-            <a:avLst/>
-          </a:prstGeom>
-          <a:noFill/>
-          <a:ln/>
-        </p:spPr>
-        <p:txBody>
-          <a:bodyPr wrap="square" lIns="0" tIns="0" rIns="0" bIns="0" rtlCol="0" anchor="ctr"/>
-          <a:lstStyle/>
-          <a:p>
-            <a:pPr indent="0" marL="0">
-              <a:buNone/>
-            </a:pPr>
-            <a:r>
-              <a:rPr lang="en-US" sz="1350" dirty="0">
-                <a:solidFill>
-                  <a:srgbClr val="9FB0C4"/>
-                </a:solidFill>
-                <a:latin typeface="Malgun Gothic" pitchFamily="34" charset="0"/>
-                <a:ea typeface="Malgun Gothic" pitchFamily="34" charset="-122"/>
-                <a:cs typeface="Malgun Gothic" pitchFamily="34" charset="-120"/>
-              </a:rPr>
-              <a:t>__popc로 센 합계 — 보통 0, 결함 시 소수</a:t>
-            </a:r>
-            <a:endParaRPr lang="en-US" sz="1350" dirty="0"/>
-          </a:p>
-        </p:txBody>
-      </p:sp>
-      <p:sp>
-        <p:nvSpPr>
-          <p:cNvPr id="16" name="Shape 14"/>
-          <p:cNvSpPr/>
-          <p:nvPr/>
-        </p:nvSpPr>
-        <p:spPr>
-          <a:xfrm>
-            <a:off x="548640" y="5120640"/>
-            <a:ext cx="11064240" cy="868680"/>
-          </a:xfrm>
-          <a:prstGeom prst="roundRect">
-            <a:avLst>
-              <a:gd name="adj" fmla="val 8421"/>
-            </a:avLst>
-          </a:prstGeom>
-          <a:solidFill>
-            <a:srgbClr val="241A16"/>
-          </a:solidFill>
-          <a:ln w="19050">
-            <a:solidFill>
-              <a:srgbClr val="E8A33D"/>
-            </a:solidFill>
-            <a:prstDash val="solid"/>
-          </a:ln>
-        </p:spPr>
-      </p:sp>
-      <p:sp>
-        <p:nvSpPr>
-          <p:cNvPr id="17" name="Text 15"/>
-          <p:cNvSpPr/>
-          <p:nvPr/>
-        </p:nvSpPr>
-        <p:spPr>
-          <a:xfrm>
-            <a:off x="822960" y="5257800"/>
-            <a:ext cx="10515600" cy="640080"/>
-          </a:xfrm>
-          <a:prstGeom prst="rect">
-            <a:avLst/>
-          </a:prstGeom>
-          <a:noFill/>
-          <a:ln/>
-        </p:spPr>
-        <p:txBody>
-          <a:bodyPr wrap="square" lIns="0" tIns="0" rIns="0" bIns="0" rtlCol="0" anchor="t"/>
-          <a:lstStyle/>
-          <a:p>
-            <a:pPr indent="0" marL="0">
-              <a:lnSpc>
-                <a:spcPct val="110000"/>
-              </a:lnSpc>
-              <a:buNone/>
-            </a:pPr>
-            <a:r>
-              <a:rPr lang="en-US" sz="1450" b="1" dirty="0">
-                <a:solidFill>
-                  <a:srgbClr val="E8A33D"/>
-                </a:solidFill>
-                <a:latin typeface="Malgun Gothic" pitchFamily="34" charset="0"/>
-                <a:ea typeface="Malgun Gothic" pitchFamily="34" charset="-122"/>
-                <a:cs typeface="Malgun Gothic" pitchFamily="34" charset="-120"/>
-              </a:rPr>
-              <a:t>README의 경고: </a:t>
-            </a:r>
-            <a:pPr indent="0" marL="0">
-              <a:lnSpc>
-                <a:spcPct val="110000"/>
-              </a:lnSpc>
-              <a:buNone/>
-            </a:pPr>
-            <a:r>
-              <a:rPr lang="en-US" sz="1450" dirty="0">
-                <a:solidFill>
-                  <a:srgbClr val="E7EDF5"/>
-                </a:solidFill>
-                <a:latin typeface="Malgun Gothic" pitchFamily="34" charset="0"/>
-                <a:ea typeface="Malgun Gothic" pitchFamily="34" charset="-122"/>
-                <a:cs typeface="Malgun Gothic" pitchFamily="34" charset="-120"/>
-              </a:rPr>
-              <a:t>오류 수가 40억을 넘으면 진짜 결함이 아니라 타임아웃 센티넬입니다. 테스트 영역을 줄이면 사라집니다.</a:t>
-            </a:r>
-            <a:endParaRPr lang="en-US" sz="1450" dirty="0"/>
+              <a:t>LGPL: 오픈소스는 정적 링크, 클로즈드 소스는 공유 라이브러리(.so/.dll)로 링크해야 합니다.</a:t>
+            </a:r>
+            <a:endParaRPr lang="en-US" sz="1300" dirty="0"/>
           </a:p>
         </p:txBody>
       </p:sp>
@@ -4744,7 +6159,7 @@
             </a:avLst>
           </a:prstGeom>
           <a:solidFill>
-            <a:srgbClr val="E8A33D"/>
+            <a:srgbClr val="3FB8C4"/>
           </a:solidFill>
           <a:ln/>
         </p:spPr>
@@ -4764,7 +6179,7 @@
                 <a:ea typeface="Courier New" pitchFamily="34" charset="-122"/>
                 <a:cs typeface="Courier New" pitchFamily="34" charset="-120"/>
               </a:rPr>
-              <a:t>6</a:t>
+              <a:t>4</a:t>
             </a:r>
             <a:endParaRPr lang="en-US" sz="2200" dirty="0"/>
           </a:p>
@@ -4803,7 +6218,7 @@
                 <a:ea typeface="Malgun Gothic" pitchFamily="34" charset="-122"/>
                 <a:cs typeface="Malgun Gothic" pitchFamily="34" charset="-120"/>
               </a:rPr>
-              <a:t>캡스톤 · 나만의 테스트 만들기</a:t>
+              <a:t>임베드 생애주기 · 객체가 자원을 감싼다</a:t>
             </a:r>
             <a:endParaRPr lang="en-US" sz="2900" dirty="0"/>
           </a:p>
@@ -4817,7 +6232,7 @@
         </p:nvSpPr>
         <p:spPr>
           <a:xfrm>
-            <a:off x="548640" y="1463040"/>
+            <a:off x="548640" y="1371600"/>
             <a:ext cx="11064240" cy="411480"/>
           </a:xfrm>
           <a:prstGeom prst="rect">
@@ -4834,7 +6249,7 @@
               <a:buNone/>
             </a:pPr>
             <a:r>
-              <a:rPr lang="en-US" sz="1600" dirty="0">
+              <a:rPr lang="en-US" sz="1450" dirty="0">
                 <a:solidFill>
                   <a:srgbClr val="9FB0C4"/>
                 </a:solidFill>
@@ -4842,9 +6257,9 @@
                 <a:ea typeface="Malgun Gothic" pitchFamily="34" charset="-122"/>
                 <a:cs typeface="Malgun Gothic" pitchFamily="34" charset="-120"/>
               </a:rPr>
-              <a:t>아래 중 하나를 골라 구현하고 5분 발표합니다.</a:t>
-            </a:r>
-            <a:endParaRPr lang="en-US" sz="1600" dirty="0"/>
+              <a:t>memtestState 객체 하나가 GPU 자원의 전체 수명을 관리합니다. 스코프를 벗어나면 자동 정리됩니다(RAII).</a:t>
+            </a:r>
+            <a:endParaRPr lang="en-US" sz="1450" dirty="0"/>
           </a:p>
         </p:txBody>
       </p:sp>
@@ -4856,12 +6271,360 @@
         </p:nvSpPr>
         <p:spPr>
           <a:xfrm>
-            <a:off x="548640" y="2057400"/>
-            <a:ext cx="11064240" cy="1143000"/>
+            <a:off x="653796" y="2148840"/>
+            <a:ext cx="1965960" cy="1554480"/>
           </a:xfrm>
           <a:prstGeom prst="roundRect">
             <a:avLst>
-              <a:gd name="adj" fmla="val 6400"/>
+              <a:gd name="adj" fmla="val 4706"/>
+            </a:avLst>
+          </a:prstGeom>
+          <a:solidFill>
+            <a:srgbClr val="18212E"/>
+          </a:solidFill>
+          <a:ln w="19050">
+            <a:solidFill>
+              <a:srgbClr val="9FB0C4"/>
+            </a:solidFill>
+            <a:prstDash val="solid"/>
+          </a:ln>
+        </p:spPr>
+      </p:sp>
+      <p:sp>
+        <p:nvSpPr>
+          <p:cNvPr id="6" name="Text 4"/>
+          <p:cNvSpPr/>
+          <p:nvPr/>
+        </p:nvSpPr>
+        <p:spPr>
+          <a:xfrm>
+            <a:off x="763524" y="2286000"/>
+            <a:ext cx="1746504" cy="365760"/>
+          </a:xfrm>
+          <a:prstGeom prst="rect">
+            <a:avLst/>
+          </a:prstGeom>
+          <a:noFill/>
+          <a:ln/>
+        </p:spPr>
+        <p:txBody>
+          <a:bodyPr wrap="square" lIns="0" tIns="0" rIns="0" bIns="0" rtlCol="0" anchor="ctr"/>
+          <a:lstStyle/>
+          <a:p>
+            <a:pPr algn="ctr" indent="0" marL="0">
+              <a:buNone/>
+            </a:pPr>
+            <a:r>
+              <a:rPr lang="en-US" sz="1600" b="1" dirty="0">
+                <a:solidFill>
+                  <a:srgbClr val="9FB0C4"/>
+                </a:solidFill>
+                <a:latin typeface="Malgun Gothic" pitchFamily="34" charset="0"/>
+                <a:ea typeface="Malgun Gothic" pitchFamily="34" charset="-122"/>
+                <a:cs typeface="Malgun Gothic" pitchFamily="34" charset="-120"/>
+              </a:rPr>
+              <a:t>생성</a:t>
+            </a:r>
+            <a:endParaRPr lang="en-US" sz="1600" dirty="0"/>
+          </a:p>
+        </p:txBody>
+      </p:sp>
+      <p:sp>
+        <p:nvSpPr>
+          <p:cNvPr id="7" name="Text 5"/>
+          <p:cNvSpPr/>
+          <p:nvPr/>
+        </p:nvSpPr>
+        <p:spPr>
+          <a:xfrm>
+            <a:off x="745236" y="2715768"/>
+            <a:ext cx="1783080" cy="502920"/>
+          </a:xfrm>
+          <a:prstGeom prst="rect">
+            <a:avLst/>
+          </a:prstGeom>
+          <a:noFill/>
+          <a:ln/>
+        </p:spPr>
+        <p:txBody>
+          <a:bodyPr wrap="square" lIns="0" tIns="0" rIns="0" bIns="0" rtlCol="0" anchor="t"/>
+          <a:lstStyle/>
+          <a:p>
+            <a:pPr algn="ctr" indent="0" marL="0">
+              <a:lnSpc>
+                <a:spcPct val="105000"/>
+              </a:lnSpc>
+              <a:buNone/>
+            </a:pPr>
+            <a:r>
+              <a:rPr lang="en-US" sz="1000" dirty="0">
+                <a:solidFill>
+                  <a:srgbClr val="E7EDF5"/>
+                </a:solidFill>
+                <a:latin typeface="Courier New" pitchFamily="34" charset="0"/>
+                <a:ea typeface="Courier New" pitchFamily="34" charset="-122"/>
+                <a:cs typeface="Courier New" pitchFamily="34" charset="-120"/>
+              </a:rPr>
+              <a:t>memtestState tester;</a:t>
+            </a:r>
+            <a:endParaRPr lang="en-US" sz="1000" dirty="0"/>
+          </a:p>
+        </p:txBody>
+      </p:sp>
+      <p:sp>
+        <p:nvSpPr>
+          <p:cNvPr id="8" name="Text 6"/>
+          <p:cNvSpPr/>
+          <p:nvPr/>
+        </p:nvSpPr>
+        <p:spPr>
+          <a:xfrm>
+            <a:off x="763524" y="3172968"/>
+            <a:ext cx="1746504" cy="457200"/>
+          </a:xfrm>
+          <a:prstGeom prst="rect">
+            <a:avLst/>
+          </a:prstGeom>
+          <a:noFill/>
+          <a:ln/>
+        </p:spPr>
+        <p:txBody>
+          <a:bodyPr wrap="square" lIns="0" tIns="0" rIns="0" bIns="0" rtlCol="0" anchor="t"/>
+          <a:lstStyle/>
+          <a:p>
+            <a:pPr algn="ctr" indent="0" marL="0">
+              <a:lnSpc>
+                <a:spcPct val="105000"/>
+              </a:lnSpc>
+              <a:buNone/>
+            </a:pPr>
+            <a:r>
+              <a:rPr lang="en-US" sz="1100" dirty="0">
+                <a:solidFill>
+                  <a:srgbClr val="9FB0C4"/>
+                </a:solidFill>
+                <a:latin typeface="Malgun Gothic" pitchFamily="34" charset="0"/>
+                <a:ea typeface="Malgun Gothic" pitchFamily="34" charset="-122"/>
+                <a:cs typeface="Malgun Gothic" pitchFamily="34" charset="-120"/>
+              </a:rPr>
+              <a:t>생성자: 상수 초기화, 아직 할당 없음</a:t>
+            </a:r>
+            <a:endParaRPr lang="en-US" sz="1100" dirty="0"/>
+          </a:p>
+        </p:txBody>
+      </p:sp>
+      <p:sp>
+        <p:nvSpPr>
+          <p:cNvPr id="9" name="Shape 7"/>
+          <p:cNvSpPr/>
+          <p:nvPr/>
+        </p:nvSpPr>
+        <p:spPr>
+          <a:xfrm>
+            <a:off x="2638044" y="2926080"/>
+            <a:ext cx="219456" cy="0"/>
+          </a:xfrm>
+          <a:prstGeom prst="line">
+            <a:avLst/>
+          </a:prstGeom>
+          <a:noFill/>
+          <a:ln w="25400">
+            <a:solidFill>
+              <a:srgbClr val="9FB0C4"/>
+            </a:solidFill>
+            <a:prstDash val="solid"/>
+            <a:tailEnd type="triangle"/>
+          </a:ln>
+        </p:spPr>
+      </p:sp>
+      <p:sp>
+        <p:nvSpPr>
+          <p:cNvPr id="10" name="Shape 8"/>
+          <p:cNvSpPr/>
+          <p:nvPr/>
+        </p:nvSpPr>
+        <p:spPr>
+          <a:xfrm>
+            <a:off x="2875788" y="2148840"/>
+            <a:ext cx="1965960" cy="1554480"/>
+          </a:xfrm>
+          <a:prstGeom prst="roundRect">
+            <a:avLst>
+              <a:gd name="adj" fmla="val 4706"/>
+            </a:avLst>
+          </a:prstGeom>
+          <a:solidFill>
+            <a:srgbClr val="18212E"/>
+          </a:solidFill>
+          <a:ln w="19050">
+            <a:solidFill>
+              <a:srgbClr val="3FB8C4"/>
+            </a:solidFill>
+            <a:prstDash val="solid"/>
+          </a:ln>
+        </p:spPr>
+      </p:sp>
+      <p:sp>
+        <p:nvSpPr>
+          <p:cNvPr id="11" name="Text 9"/>
+          <p:cNvSpPr/>
+          <p:nvPr/>
+        </p:nvSpPr>
+        <p:spPr>
+          <a:xfrm>
+            <a:off x="2985516" y="2286000"/>
+            <a:ext cx="1746504" cy="365760"/>
+          </a:xfrm>
+          <a:prstGeom prst="rect">
+            <a:avLst/>
+          </a:prstGeom>
+          <a:noFill/>
+          <a:ln/>
+        </p:spPr>
+        <p:txBody>
+          <a:bodyPr wrap="square" lIns="0" tIns="0" rIns="0" bIns="0" rtlCol="0" anchor="ctr"/>
+          <a:lstStyle/>
+          <a:p>
+            <a:pPr algn="ctr" indent="0" marL="0">
+              <a:buNone/>
+            </a:pPr>
+            <a:r>
+              <a:rPr lang="en-US" sz="1600" b="1" dirty="0">
+                <a:solidFill>
+                  <a:srgbClr val="3FB8C4"/>
+                </a:solidFill>
+                <a:latin typeface="Malgun Gothic" pitchFamily="34" charset="0"/>
+                <a:ea typeface="Malgun Gothic" pitchFamily="34" charset="-122"/>
+                <a:cs typeface="Malgun Gothic" pitchFamily="34" charset="-120"/>
+              </a:rPr>
+              <a:t>할당</a:t>
+            </a:r>
+            <a:endParaRPr lang="en-US" sz="1600" dirty="0"/>
+          </a:p>
+        </p:txBody>
+      </p:sp>
+      <p:sp>
+        <p:nvSpPr>
+          <p:cNvPr id="12" name="Text 10"/>
+          <p:cNvSpPr/>
+          <p:nvPr/>
+        </p:nvSpPr>
+        <p:spPr>
+          <a:xfrm>
+            <a:off x="2967228" y="2715768"/>
+            <a:ext cx="1783080" cy="502920"/>
+          </a:xfrm>
+          <a:prstGeom prst="rect">
+            <a:avLst/>
+          </a:prstGeom>
+          <a:noFill/>
+          <a:ln/>
+        </p:spPr>
+        <p:txBody>
+          <a:bodyPr wrap="square" lIns="0" tIns="0" rIns="0" bIns="0" rtlCol="0" anchor="t"/>
+          <a:lstStyle/>
+          <a:p>
+            <a:pPr algn="ctr" indent="0" marL="0">
+              <a:lnSpc>
+                <a:spcPct val="105000"/>
+              </a:lnSpc>
+              <a:buNone/>
+            </a:pPr>
+            <a:r>
+              <a:rPr lang="en-US" sz="1000" dirty="0">
+                <a:solidFill>
+                  <a:srgbClr val="E7EDF5"/>
+                </a:solidFill>
+                <a:latin typeface="Courier New" pitchFamily="34" charset="0"/>
+                <a:ea typeface="Courier New" pitchFamily="34" charset="-122"/>
+                <a:cs typeface="Courier New" pitchFamily="34" charset="-120"/>
+              </a:rPr>
+              <a:t>tester.allocate(mb)</a:t>
+            </a:r>
+            <a:endParaRPr lang="en-US" sz="1000" dirty="0"/>
+          </a:p>
+        </p:txBody>
+      </p:sp>
+      <p:sp>
+        <p:nvSpPr>
+          <p:cNvPr id="13" name="Text 11"/>
+          <p:cNvSpPr/>
+          <p:nvPr/>
+        </p:nvSpPr>
+        <p:spPr>
+          <a:xfrm>
+            <a:off x="2985516" y="3172968"/>
+            <a:ext cx="1746504" cy="457200"/>
+          </a:xfrm>
+          <a:prstGeom prst="rect">
+            <a:avLst/>
+          </a:prstGeom>
+          <a:noFill/>
+          <a:ln/>
+        </p:spPr>
+        <p:txBody>
+          <a:bodyPr wrap="square" lIns="0" tIns="0" rIns="0" bIns="0" rtlCol="0" anchor="t"/>
+          <a:lstStyle/>
+          <a:p>
+            <a:pPr algn="ctr" indent="0" marL="0">
+              <a:lnSpc>
+                <a:spcPct val="105000"/>
+              </a:lnSpc>
+              <a:buNone/>
+            </a:pPr>
+            <a:r>
+              <a:rPr lang="en-US" sz="1100" dirty="0">
+                <a:solidFill>
+                  <a:srgbClr val="9FB0C4"/>
+                </a:solidFill>
+                <a:latin typeface="Malgun Gothic" pitchFamily="34" charset="0"/>
+                <a:ea typeface="Malgun Gothic" pitchFamily="34" charset="-122"/>
+                <a:cs typeface="Malgun Gothic" pitchFamily="34" charset="-120"/>
+              </a:rPr>
+              <a:t>cudaMalloc으로 VRAM·임시버퍼 확보</a:t>
+            </a:r>
+            <a:endParaRPr lang="en-US" sz="1100" dirty="0"/>
+          </a:p>
+        </p:txBody>
+      </p:sp>
+      <p:sp>
+        <p:nvSpPr>
+          <p:cNvPr id="14" name="Shape 12"/>
+          <p:cNvSpPr/>
+          <p:nvPr/>
+        </p:nvSpPr>
+        <p:spPr>
+          <a:xfrm>
+            <a:off x="4860036" y="2926080"/>
+            <a:ext cx="219456" cy="0"/>
+          </a:xfrm>
+          <a:prstGeom prst="line">
+            <a:avLst/>
+          </a:prstGeom>
+          <a:noFill/>
+          <a:ln w="25400">
+            <a:solidFill>
+              <a:srgbClr val="3FB8C4"/>
+            </a:solidFill>
+            <a:prstDash val="solid"/>
+            <a:tailEnd type="triangle"/>
+          </a:ln>
+        </p:spPr>
+      </p:sp>
+      <p:sp>
+        <p:nvSpPr>
+          <p:cNvPr id="15" name="Shape 13"/>
+          <p:cNvSpPr/>
+          <p:nvPr/>
+        </p:nvSpPr>
+        <p:spPr>
+          <a:xfrm>
+            <a:off x="5097780" y="2148840"/>
+            <a:ext cx="1965960" cy="1554480"/>
+          </a:xfrm>
+          <a:prstGeom prst="roundRect">
+            <a:avLst>
+              <a:gd name="adj" fmla="val 4706"/>
             </a:avLst>
           </a:prstGeom>
           <a:solidFill>
@@ -4877,57 +6640,95 @@
       </p:sp>
       <p:sp>
         <p:nvSpPr>
-          <p:cNvPr id="6" name="Text 4"/>
-          <p:cNvSpPr/>
-          <p:nvPr/>
-        </p:nvSpPr>
-        <p:spPr>
-          <a:xfrm>
-            <a:off x="822960" y="2350008"/>
-            <a:ext cx="640080" cy="548640"/>
-          </a:xfrm>
-          <a:prstGeom prst="roundRect">
-            <a:avLst>
-              <a:gd name="adj" fmla="val 16667"/>
-            </a:avLst>
-          </a:prstGeom>
-          <a:solidFill>
-            <a:srgbClr val="E8A33D"/>
-          </a:solidFill>
-          <a:ln/>
-        </p:spPr>
-        <p:txBody>
-          <a:bodyPr wrap="square" rtlCol="0" anchor="ctr"/>
+          <p:cNvPr id="16" name="Text 14"/>
+          <p:cNvSpPr/>
+          <p:nvPr/>
+        </p:nvSpPr>
+        <p:spPr>
+          <a:xfrm>
+            <a:off x="5207508" y="2286000"/>
+            <a:ext cx="1746504" cy="365760"/>
+          </a:xfrm>
+          <a:prstGeom prst="rect">
+            <a:avLst/>
+          </a:prstGeom>
+          <a:noFill/>
+          <a:ln/>
+        </p:spPr>
+        <p:txBody>
+          <a:bodyPr wrap="square" lIns="0" tIns="0" rIns="0" bIns="0" rtlCol="0" anchor="ctr"/>
           <a:lstStyle/>
           <a:p>
             <a:pPr algn="ctr" indent="0" marL="0">
               <a:buNone/>
             </a:pPr>
             <a:r>
-              <a:rPr lang="en-US" sz="2200" b="1" dirty="0">
-                <a:solidFill>
-                  <a:srgbClr val="101722"/>
+              <a:rPr lang="en-US" sz="1600" b="1" dirty="0">
+                <a:solidFill>
+                  <a:srgbClr val="E8A33D"/>
+                </a:solidFill>
+                <a:latin typeface="Malgun Gothic" pitchFamily="34" charset="0"/>
+                <a:ea typeface="Malgun Gothic" pitchFamily="34" charset="-122"/>
+                <a:cs typeface="Malgun Gothic" pitchFamily="34" charset="-120"/>
+              </a:rPr>
+              <a:t>검사</a:t>
+            </a:r>
+            <a:endParaRPr lang="en-US" sz="1600" dirty="0"/>
+          </a:p>
+        </p:txBody>
+      </p:sp>
+      <p:sp>
+        <p:nvSpPr>
+          <p:cNvPr id="17" name="Text 15"/>
+          <p:cNvSpPr/>
+          <p:nvPr/>
+        </p:nvSpPr>
+        <p:spPr>
+          <a:xfrm>
+            <a:off x="5189220" y="2715768"/>
+            <a:ext cx="1783080" cy="502920"/>
+          </a:xfrm>
+          <a:prstGeom prst="rect">
+            <a:avLst/>
+          </a:prstGeom>
+          <a:noFill/>
+          <a:ln/>
+        </p:spPr>
+        <p:txBody>
+          <a:bodyPr wrap="square" lIns="0" tIns="0" rIns="0" bIns="0" rtlCol="0" anchor="t"/>
+          <a:lstStyle/>
+          <a:p>
+            <a:pPr algn="ctr" indent="0" marL="0">
+              <a:lnSpc>
+                <a:spcPct val="105000"/>
+              </a:lnSpc>
+              <a:buNone/>
+            </a:pPr>
+            <a:r>
+              <a:rPr lang="en-US" sz="1000" dirty="0">
+                <a:solidFill>
+                  <a:srgbClr val="E7EDF5"/>
                 </a:solidFill>
                 <a:latin typeface="Courier New" pitchFamily="34" charset="0"/>
                 <a:ea typeface="Courier New" pitchFamily="34" charset="-122"/>
                 <a:cs typeface="Courier New" pitchFamily="34" charset="-120"/>
               </a:rPr>
-              <a:t>A</a:t>
-            </a:r>
-            <a:endParaRPr lang="en-US" sz="2200" dirty="0"/>
-          </a:p>
-        </p:txBody>
-      </p:sp>
-      <p:sp>
-        <p:nvSpPr>
-          <p:cNvPr id="7" name="Text 5"/>
-          <p:cNvSpPr/>
-          <p:nvPr/>
-        </p:nvSpPr>
-        <p:spPr>
-          <a:xfrm>
-            <a:off x="1737360" y="2221992"/>
-            <a:ext cx="9601200" cy="457200"/>
+              <a:t>tester.gpuXxx(e) 반복</a:t>
+            </a:r>
+            <a:endParaRPr lang="en-US" sz="1000" dirty="0"/>
+          </a:p>
+        </p:txBody>
+      </p:sp>
+      <p:sp>
+        <p:nvSpPr>
+          <p:cNvPr id="18" name="Text 16"/>
+          <p:cNvSpPr/>
+          <p:nvPr/>
+        </p:nvSpPr>
+        <p:spPr>
+          <a:xfrm>
+            <a:off x="5207508" y="3172968"/>
+            <a:ext cx="1746504" cy="457200"/>
           </a:xfrm>
           <a:prstGeom prst="rect">
             <a:avLst/>
@@ -4939,77 +6740,65 @@
           <a:bodyPr wrap="square" lIns="0" tIns="0" rIns="0" bIns="0" rtlCol="0" anchor="t"/>
           <a:lstStyle/>
           <a:p>
-            <a:pPr indent="0" marL="0">
-              <a:buNone/>
-            </a:pPr>
-            <a:r>
-              <a:rPr lang="en-US" sz="1800" b="1" dirty="0">
-                <a:solidFill>
-                  <a:srgbClr val="E7EDF5"/>
+            <a:pPr algn="ctr" indent="0" marL="0">
+              <a:lnSpc>
+                <a:spcPct val="105000"/>
+              </a:lnSpc>
+              <a:buNone/>
+            </a:pPr>
+            <a:r>
+              <a:rPr lang="en-US" sz="1100" dirty="0">
+                <a:solidFill>
+                  <a:srgbClr val="9FB0C4"/>
                 </a:solidFill>
                 <a:latin typeface="Malgun Gothic" pitchFamily="34" charset="0"/>
                 <a:ea typeface="Malgun Gothic" pitchFamily="34" charset="-122"/>
                 <a:cs typeface="Malgun Gothic" pitchFamily="34" charset="-120"/>
               </a:rPr>
-              <a:t>새 패턴 테스트</a:t>
-            </a:r>
-            <a:endParaRPr lang="en-US" sz="1800" dirty="0"/>
-          </a:p>
-        </p:txBody>
-      </p:sp>
-      <p:sp>
-        <p:nvSpPr>
-          <p:cNvPr id="8" name="Text 6"/>
-          <p:cNvSpPr/>
-          <p:nvPr/>
-        </p:nvSpPr>
-        <p:spPr>
-          <a:xfrm>
-            <a:off x="1737360" y="2679192"/>
-            <a:ext cx="9601200" cy="457200"/>
-          </a:xfrm>
-          <a:prstGeom prst="rect">
-            <a:avLst/>
-          </a:prstGeom>
-          <a:noFill/>
-          <a:ln/>
-        </p:spPr>
-        <p:txBody>
-          <a:bodyPr wrap="square" lIns="0" tIns="0" rIns="0" bIns="0" rtlCol="0" anchor="t"/>
-          <a:lstStyle/>
-          <a:p>
-            <a:pPr indent="0" marL="0">
-              <a:buNone/>
-            </a:pPr>
-            <a:r>
-              <a:rPr lang="en-US" sz="1400" dirty="0">
-                <a:solidFill>
-                  <a:srgbClr val="9FB0C4"/>
-                </a:solidFill>
-                <a:latin typeface="Malgun Gothic" pitchFamily="34" charset="0"/>
-                <a:ea typeface="Malgun Gothic" pitchFamily="34" charset="-122"/>
-                <a:cs typeface="Malgun Gothic" pitchFamily="34" charset="-120"/>
-              </a:rPr>
-              <a:t>체커보드(0xAAAAAAAA/0x55555555 교차) 패턴 커널을 write/verify 뼈대로 추가</a:t>
-            </a:r>
-            <a:endParaRPr lang="en-US" sz="1400" dirty="0"/>
-          </a:p>
-        </p:txBody>
-      </p:sp>
-      <p:sp>
-        <p:nvSpPr>
-          <p:cNvPr id="9" name="Shape 7"/>
-          <p:cNvSpPr/>
-          <p:nvPr/>
-        </p:nvSpPr>
-        <p:spPr>
-          <a:xfrm>
-            <a:off x="548640" y="3337560"/>
-            <a:ext cx="11064240" cy="1143000"/>
+              <a:t>각 테스트 실행, 오류 수 누적</a:t>
+            </a:r>
+            <a:endParaRPr lang="en-US" sz="1100" dirty="0"/>
+          </a:p>
+        </p:txBody>
+      </p:sp>
+      <p:sp>
+        <p:nvSpPr>
+          <p:cNvPr id="19" name="Shape 17"/>
+          <p:cNvSpPr/>
+          <p:nvPr/>
+        </p:nvSpPr>
+        <p:spPr>
+          <a:xfrm>
+            <a:off x="7082028" y="2926080"/>
+            <a:ext cx="219456" cy="0"/>
+          </a:xfrm>
+          <a:prstGeom prst="line">
+            <a:avLst/>
+          </a:prstGeom>
+          <a:noFill/>
+          <a:ln w="25400">
+            <a:solidFill>
+              <a:srgbClr val="E8A33D"/>
+            </a:solidFill>
+            <a:prstDash val="solid"/>
+            <a:tailEnd type="triangle"/>
+          </a:ln>
+        </p:spPr>
+      </p:sp>
+      <p:sp>
+        <p:nvSpPr>
+          <p:cNvPr id="20" name="Shape 18"/>
+          <p:cNvSpPr/>
+          <p:nvPr/>
+        </p:nvSpPr>
+        <p:spPr>
+          <a:xfrm>
+            <a:off x="7319772" y="2148840"/>
+            <a:ext cx="1965960" cy="1554480"/>
           </a:xfrm>
           <a:prstGeom prst="roundRect">
             <a:avLst>
-              <a:gd name="adj" fmla="val 6400"/>
+              <a:gd name="adj" fmla="val 4706"/>
             </a:avLst>
           </a:prstGeom>
           <a:solidFill>
@@ -5025,57 +6814,95 @@
       </p:sp>
       <p:sp>
         <p:nvSpPr>
-          <p:cNvPr id="10" name="Text 8"/>
-          <p:cNvSpPr/>
-          <p:nvPr/>
-        </p:nvSpPr>
-        <p:spPr>
-          <a:xfrm>
-            <a:off x="822960" y="3630168"/>
-            <a:ext cx="640080" cy="548640"/>
-          </a:xfrm>
-          <a:prstGeom prst="roundRect">
-            <a:avLst>
-              <a:gd name="adj" fmla="val 16667"/>
-            </a:avLst>
-          </a:prstGeom>
-          <a:solidFill>
-            <a:srgbClr val="3FB8C4"/>
-          </a:solidFill>
-          <a:ln/>
-        </p:spPr>
-        <p:txBody>
-          <a:bodyPr wrap="square" rtlCol="0" anchor="ctr"/>
+          <p:cNvPr id="21" name="Text 19"/>
+          <p:cNvSpPr/>
+          <p:nvPr/>
+        </p:nvSpPr>
+        <p:spPr>
+          <a:xfrm>
+            <a:off x="7429500" y="2286000"/>
+            <a:ext cx="1746504" cy="365760"/>
+          </a:xfrm>
+          <a:prstGeom prst="rect">
+            <a:avLst/>
+          </a:prstGeom>
+          <a:noFill/>
+          <a:ln/>
+        </p:spPr>
+        <p:txBody>
+          <a:bodyPr wrap="square" lIns="0" tIns="0" rIns="0" bIns="0" rtlCol="0" anchor="ctr"/>
           <a:lstStyle/>
           <a:p>
             <a:pPr algn="ctr" indent="0" marL="0">
               <a:buNone/>
             </a:pPr>
             <a:r>
-              <a:rPr lang="en-US" sz="2200" b="1" dirty="0">
-                <a:solidFill>
-                  <a:srgbClr val="101722"/>
+              <a:rPr lang="en-US" sz="1600" b="1" dirty="0">
+                <a:solidFill>
+                  <a:srgbClr val="3FB8C4"/>
+                </a:solidFill>
+                <a:latin typeface="Malgun Gothic" pitchFamily="34" charset="0"/>
+                <a:ea typeface="Malgun Gothic" pitchFamily="34" charset="-122"/>
+                <a:cs typeface="Malgun Gothic" pitchFamily="34" charset="-120"/>
+              </a:rPr>
+              <a:t>판정</a:t>
+            </a:r>
+            <a:endParaRPr lang="en-US" sz="1600" dirty="0"/>
+          </a:p>
+        </p:txBody>
+      </p:sp>
+      <p:sp>
+        <p:nvSpPr>
+          <p:cNvPr id="22" name="Text 20"/>
+          <p:cNvSpPr/>
+          <p:nvPr/>
+        </p:nvSpPr>
+        <p:spPr>
+          <a:xfrm>
+            <a:off x="7411212" y="2715768"/>
+            <a:ext cx="1783080" cy="502920"/>
+          </a:xfrm>
+          <a:prstGeom prst="rect">
+            <a:avLst/>
+          </a:prstGeom>
+          <a:noFill/>
+          <a:ln/>
+        </p:spPr>
+        <p:txBody>
+          <a:bodyPr wrap="square" lIns="0" tIns="0" rIns="0" bIns="0" rtlCol="0" anchor="t"/>
+          <a:lstStyle/>
+          <a:p>
+            <a:pPr algn="ctr" indent="0" marL="0">
+              <a:lnSpc>
+                <a:spcPct val="105000"/>
+              </a:lnSpc>
+              <a:buNone/>
+            </a:pPr>
+            <a:r>
+              <a:rPr lang="en-US" sz="1000" dirty="0">
+                <a:solidFill>
+                  <a:srgbClr val="E7EDF5"/>
                 </a:solidFill>
                 <a:latin typeface="Courier New" pitchFamily="34" charset="0"/>
                 <a:ea typeface="Courier New" pitchFamily="34" charset="-122"/>
                 <a:cs typeface="Courier New" pitchFamily="34" charset="-120"/>
               </a:rPr>
-              <a:t>B</a:t>
-            </a:r>
-            <a:endParaRPr lang="en-US" sz="2200" dirty="0"/>
-          </a:p>
-        </p:txBody>
-      </p:sp>
-      <p:sp>
-        <p:nvSpPr>
-          <p:cNvPr id="11" name="Text 9"/>
-          <p:cNvSpPr/>
-          <p:nvPr/>
-        </p:nvSpPr>
-        <p:spPr>
-          <a:xfrm>
-            <a:off x="1737360" y="3502152"/>
-            <a:ext cx="9601200" cy="457200"/>
+              <a:t>return errors == 0</a:t>
+            </a:r>
+            <a:endParaRPr lang="en-US" sz="1000" dirty="0"/>
+          </a:p>
+        </p:txBody>
+      </p:sp>
+      <p:sp>
+        <p:nvSpPr>
+          <p:cNvPr id="23" name="Text 21"/>
+          <p:cNvSpPr/>
+          <p:nvPr/>
+        </p:nvSpPr>
+        <p:spPr>
+          <a:xfrm>
+            <a:off x="7429500" y="3172968"/>
+            <a:ext cx="1746504" cy="457200"/>
           </a:xfrm>
           <a:prstGeom prst="rect">
             <a:avLst/>
@@ -5087,77 +6914,65 @@
           <a:bodyPr wrap="square" lIns="0" tIns="0" rIns="0" bIns="0" rtlCol="0" anchor="t"/>
           <a:lstStyle/>
           <a:p>
-            <a:pPr indent="0" marL="0">
-              <a:buNone/>
-            </a:pPr>
-            <a:r>
-              <a:rPr lang="en-US" sz="1800" b="1" dirty="0">
-                <a:solidFill>
-                  <a:srgbClr val="E7EDF5"/>
+            <a:pPr algn="ctr" indent="0" marL="0">
+              <a:lnSpc>
+                <a:spcPct val="105000"/>
+              </a:lnSpc>
+              <a:buNone/>
+            </a:pPr>
+            <a:r>
+              <a:rPr lang="en-US" sz="1100" dirty="0">
+                <a:solidFill>
+                  <a:srgbClr val="9FB0C4"/>
                 </a:solidFill>
                 <a:latin typeface="Malgun Gothic" pitchFamily="34" charset="0"/>
                 <a:ea typeface="Malgun Gothic" pitchFamily="34" charset="-122"/>
                 <a:cs typeface="Malgun Gothic" pitchFamily="34" charset="-120"/>
               </a:rPr>
-              <a:t>오류 히스토그램</a:t>
-            </a:r>
-            <a:endParaRPr lang="en-US" sz="1800" dirty="0"/>
-          </a:p>
-        </p:txBody>
-      </p:sp>
-      <p:sp>
-        <p:nvSpPr>
-          <p:cNvPr id="12" name="Text 10"/>
-          <p:cNvSpPr/>
-          <p:nvPr/>
-        </p:nvSpPr>
-        <p:spPr>
-          <a:xfrm>
-            <a:off x="1737360" y="3959352"/>
-            <a:ext cx="9601200" cy="457200"/>
-          </a:xfrm>
-          <a:prstGeom prst="rect">
-            <a:avLst/>
-          </a:prstGeom>
-          <a:noFill/>
-          <a:ln/>
-        </p:spPr>
-        <p:txBody>
-          <a:bodyPr wrap="square" lIns="0" tIns="0" rIns="0" bIns="0" rtlCol="0" anchor="t"/>
-          <a:lstStyle/>
-          <a:p>
-            <a:pPr indent="0" marL="0">
-              <a:buNone/>
-            </a:pPr>
-            <a:r>
-              <a:rPr lang="en-US" sz="1400" dirty="0">
-                <a:solidFill>
-                  <a:srgbClr val="9FB0C4"/>
-                </a:solidFill>
-                <a:latin typeface="Malgun Gothic" pitchFamily="34" charset="0"/>
-                <a:ea typeface="Malgun Gothic" pitchFamily="34" charset="-122"/>
-                <a:cs typeface="Malgun Gothic" pitchFamily="34" charset="-120"/>
-              </a:rPr>
-              <a:t>오류가 난 word의 비트 위치 분포를 집계해 출력하는 기능 추가</a:t>
-            </a:r>
-            <a:endParaRPr lang="en-US" sz="1400" dirty="0"/>
-          </a:p>
-        </p:txBody>
-      </p:sp>
-      <p:sp>
-        <p:nvSpPr>
-          <p:cNvPr id="13" name="Shape 11"/>
-          <p:cNvSpPr/>
-          <p:nvPr/>
-        </p:nvSpPr>
-        <p:spPr>
-          <a:xfrm>
-            <a:off x="548640" y="4617720"/>
-            <a:ext cx="11064240" cy="1143000"/>
+              <a:t>bool로 GPU 건전성 반환</a:t>
+            </a:r>
+            <a:endParaRPr lang="en-US" sz="1100" dirty="0"/>
+          </a:p>
+        </p:txBody>
+      </p:sp>
+      <p:sp>
+        <p:nvSpPr>
+          <p:cNvPr id="24" name="Shape 22"/>
+          <p:cNvSpPr/>
+          <p:nvPr/>
+        </p:nvSpPr>
+        <p:spPr>
+          <a:xfrm>
+            <a:off x="9304020" y="2926080"/>
+            <a:ext cx="219456" cy="0"/>
+          </a:xfrm>
+          <a:prstGeom prst="line">
+            <a:avLst/>
+          </a:prstGeom>
+          <a:noFill/>
+          <a:ln w="25400">
+            <a:solidFill>
+              <a:srgbClr val="3FB8C4"/>
+            </a:solidFill>
+            <a:prstDash val="solid"/>
+            <a:tailEnd type="triangle"/>
+          </a:ln>
+        </p:spPr>
+      </p:sp>
+      <p:sp>
+        <p:nvSpPr>
+          <p:cNvPr id="25" name="Shape 23"/>
+          <p:cNvSpPr/>
+          <p:nvPr/>
+        </p:nvSpPr>
+        <p:spPr>
+          <a:xfrm>
+            <a:off x="9541764" y="2148840"/>
+            <a:ext cx="1965960" cy="1554480"/>
           </a:xfrm>
           <a:prstGeom prst="roundRect">
             <a:avLst>
-              <a:gd name="adj" fmla="val 6400"/>
+              <a:gd name="adj" fmla="val 4706"/>
             </a:avLst>
           </a:prstGeom>
           <a:solidFill>
@@ -5173,57 +6988,95 @@
       </p:sp>
       <p:sp>
         <p:nvSpPr>
-          <p:cNvPr id="14" name="Text 12"/>
-          <p:cNvSpPr/>
-          <p:nvPr/>
-        </p:nvSpPr>
-        <p:spPr>
-          <a:xfrm>
-            <a:off x="822960" y="4910328"/>
-            <a:ext cx="640080" cy="548640"/>
-          </a:xfrm>
-          <a:prstGeom prst="roundRect">
-            <a:avLst>
-              <a:gd name="adj" fmla="val 16667"/>
-            </a:avLst>
-          </a:prstGeom>
-          <a:solidFill>
-            <a:srgbClr val="E8A33D"/>
-          </a:solidFill>
-          <a:ln/>
-        </p:spPr>
-        <p:txBody>
-          <a:bodyPr wrap="square" rtlCol="0" anchor="ctr"/>
+          <p:cNvPr id="26" name="Text 24"/>
+          <p:cNvSpPr/>
+          <p:nvPr/>
+        </p:nvSpPr>
+        <p:spPr>
+          <a:xfrm>
+            <a:off x="9651492" y="2286000"/>
+            <a:ext cx="1746504" cy="365760"/>
+          </a:xfrm>
+          <a:prstGeom prst="rect">
+            <a:avLst/>
+          </a:prstGeom>
+          <a:noFill/>
+          <a:ln/>
+        </p:spPr>
+        <p:txBody>
+          <a:bodyPr wrap="square" lIns="0" tIns="0" rIns="0" bIns="0" rtlCol="0" anchor="ctr"/>
           <a:lstStyle/>
           <a:p>
             <a:pPr algn="ctr" indent="0" marL="0">
               <a:buNone/>
             </a:pPr>
             <a:r>
-              <a:rPr lang="en-US" sz="2200" b="1" dirty="0">
-                <a:solidFill>
-                  <a:srgbClr val="101722"/>
+              <a:rPr lang="en-US" sz="1600" b="1" dirty="0">
+                <a:solidFill>
+                  <a:srgbClr val="E8A33D"/>
+                </a:solidFill>
+                <a:latin typeface="Malgun Gothic" pitchFamily="34" charset="0"/>
+                <a:ea typeface="Malgun Gothic" pitchFamily="34" charset="-122"/>
+                <a:cs typeface="Malgun Gothic" pitchFamily="34" charset="-120"/>
+              </a:rPr>
+              <a:t>소멸</a:t>
+            </a:r>
+            <a:endParaRPr lang="en-US" sz="1600" dirty="0"/>
+          </a:p>
+        </p:txBody>
+      </p:sp>
+      <p:sp>
+        <p:nvSpPr>
+          <p:cNvPr id="27" name="Text 25"/>
+          <p:cNvSpPr/>
+          <p:nvPr/>
+        </p:nvSpPr>
+        <p:spPr>
+          <a:xfrm>
+            <a:off x="9633204" y="2715768"/>
+            <a:ext cx="1783080" cy="502920"/>
+          </a:xfrm>
+          <a:prstGeom prst="rect">
+            <a:avLst/>
+          </a:prstGeom>
+          <a:noFill/>
+          <a:ln/>
+        </p:spPr>
+        <p:txBody>
+          <a:bodyPr wrap="square" lIns="0" tIns="0" rIns="0" bIns="0" rtlCol="0" anchor="t"/>
+          <a:lstStyle/>
+          <a:p>
+            <a:pPr algn="ctr" indent="0" marL="0">
+              <a:lnSpc>
+                <a:spcPct val="105000"/>
+              </a:lnSpc>
+              <a:buNone/>
+            </a:pPr>
+            <a:r>
+              <a:rPr lang="en-US" sz="1000" dirty="0">
+                <a:solidFill>
+                  <a:srgbClr val="E7EDF5"/>
                 </a:solidFill>
                 <a:latin typeface="Courier New" pitchFamily="34" charset="0"/>
                 <a:ea typeface="Courier New" pitchFamily="34" charset="-122"/>
                 <a:cs typeface="Courier New" pitchFamily="34" charset="-120"/>
               </a:rPr>
-              <a:t>C</a:t>
-            </a:r>
-            <a:endParaRPr lang="en-US" sz="2200" dirty="0"/>
-          </a:p>
-        </p:txBody>
-      </p:sp>
-      <p:sp>
-        <p:nvSpPr>
-          <p:cNvPr id="15" name="Text 13"/>
-          <p:cNvSpPr/>
-          <p:nvPr/>
-        </p:nvSpPr>
-        <p:spPr>
-          <a:xfrm>
-            <a:off x="1737360" y="4782312"/>
-            <a:ext cx="9601200" cy="457200"/>
+              <a:t>} // 스코프 종료</a:t>
+            </a:r>
+            <a:endParaRPr lang="en-US" sz="1000" dirty="0"/>
+          </a:p>
+        </p:txBody>
+      </p:sp>
+      <p:sp>
+        <p:nvSpPr>
+          <p:cNvPr id="28" name="Text 26"/>
+          <p:cNvSpPr/>
+          <p:nvPr/>
+        </p:nvSpPr>
+        <p:spPr>
+          <a:xfrm>
+            <a:off x="9651492" y="3172968"/>
+            <a:ext cx="1746504" cy="457200"/>
           </a:xfrm>
           <a:prstGeom prst="rect">
             <a:avLst/>
@@ -5235,34 +7088,64 @@
           <a:bodyPr wrap="square" lIns="0" tIns="0" rIns="0" bIns="0" rtlCol="0" anchor="t"/>
           <a:lstStyle/>
           <a:p>
-            <a:pPr indent="0" marL="0">
-              <a:buNone/>
-            </a:pPr>
-            <a:r>
-              <a:rPr lang="en-US" sz="1800" b="1" dirty="0">
-                <a:solidFill>
-                  <a:srgbClr val="E7EDF5"/>
+            <a:pPr algn="ctr" indent="0" marL="0">
+              <a:lnSpc>
+                <a:spcPct val="105000"/>
+              </a:lnSpc>
+              <a:buNone/>
+            </a:pPr>
+            <a:r>
+              <a:rPr lang="en-US" sz="1100" dirty="0">
+                <a:solidFill>
+                  <a:srgbClr val="9FB0C4"/>
                 </a:solidFill>
                 <a:latin typeface="Malgun Gothic" pitchFamily="34" charset="0"/>
                 <a:ea typeface="Malgun Gothic" pitchFamily="34" charset="-122"/>
                 <a:cs typeface="Malgun Gothic" pitchFamily="34" charset="-120"/>
               </a:rPr>
-              <a:t>선택적 테스트 실행</a:t>
-            </a:r>
-            <a:endParaRPr lang="en-US" sz="1800" dirty="0"/>
-          </a:p>
-        </p:txBody>
-      </p:sp>
-      <p:sp>
-        <p:nvSpPr>
-          <p:cNvPr id="16" name="Text 14"/>
-          <p:cNvSpPr/>
-          <p:nvPr/>
-        </p:nvSpPr>
-        <p:spPr>
-          <a:xfrm>
-            <a:off x="1737360" y="5239512"/>
-            <a:ext cx="9601200" cy="457200"/>
+              <a:t>소멸자가 deallocate() 자동 호출</a:t>
+            </a:r>
+            <a:endParaRPr lang="en-US" sz="1100" dirty="0"/>
+          </a:p>
+        </p:txBody>
+      </p:sp>
+      <p:sp>
+        <p:nvSpPr>
+          <p:cNvPr id="29" name="Shape 27"/>
+          <p:cNvSpPr/>
+          <p:nvPr/>
+        </p:nvSpPr>
+        <p:spPr>
+          <a:xfrm>
+            <a:off x="653796" y="4114800"/>
+            <a:ext cx="10853928" cy="914400"/>
+          </a:xfrm>
+          <a:prstGeom prst="roundRect">
+            <a:avLst>
+              <a:gd name="adj" fmla="val 8000"/>
+            </a:avLst>
+          </a:prstGeom>
+          <a:solidFill>
+            <a:srgbClr val="241A16"/>
+          </a:solidFill>
+          <a:ln w="19050">
+            <a:solidFill>
+              <a:srgbClr val="E8A33D"/>
+            </a:solidFill>
+            <a:prstDash val="solid"/>
+          </a:ln>
+        </p:spPr>
+      </p:sp>
+      <p:sp>
+        <p:nvSpPr>
+          <p:cNvPr id="30" name="Text 28"/>
+          <p:cNvSpPr/>
+          <p:nvPr/>
+        </p:nvSpPr>
+        <p:spPr>
+          <a:xfrm>
+            <a:off x="928116" y="4279392"/>
+            <a:ext cx="10305288" cy="640080"/>
           </a:xfrm>
           <a:prstGeom prst="rect">
             <a:avLst/>
@@ -5275,18 +7158,38 @@
           <a:lstStyle/>
           <a:p>
             <a:pPr indent="0" marL="0">
-              <a:buNone/>
-            </a:pPr>
-            <a:r>
-              <a:rPr lang="en-US" sz="1400" dirty="0">
-                <a:solidFill>
-                  <a:srgbClr val="9FB0C4"/>
+              <a:lnSpc>
+                <a:spcPct val="110000"/>
+              </a:lnSpc>
+              <a:buNone/>
+            </a:pPr>
+            <a:r>
+              <a:rPr lang="en-US" sz="1400" b="1" dirty="0">
+                <a:solidFill>
+                  <a:srgbClr val="E8A33D"/>
                 </a:solidFill>
                 <a:latin typeface="Malgun Gothic" pitchFamily="34" charset="0"/>
                 <a:ea typeface="Malgun Gothic" pitchFamily="34" charset="-122"/>
                 <a:cs typeface="Malgun Gothic" pitchFamily="34" charset="-120"/>
               </a:rPr>
-              <a:t>CLI에 --only 플래그를 추가해 특정 테스트만 돌리도록 확장</a:t>
+              <a:t>핵심: </a:t>
+            </a:r>
+            <a:pPr indent="0" marL="0">
+              <a:lnSpc>
+                <a:spcPct val="110000"/>
+              </a:lnSpc>
+              <a:buNone/>
+            </a:pPr>
+            <a:r>
+              <a:rPr lang="en-US" sz="1400" dirty="0">
+                <a:solidFill>
+                  <a:srgbClr val="E7EDF5"/>
+                </a:solidFill>
+                <a:latin typeface="Malgun Gothic" pitchFamily="34" charset="0"/>
+                <a:ea typeface="Malgun Gothic" pitchFamily="34" charset="-122"/>
+                <a:cs typeface="Malgun Gothic" pitchFamily="34" charset="-120"/>
+              </a:rPr>
+              <a:t>cudaFree를 직접 부르지 않아도, 객체 소멸자가 모든 GPU 메모리를 해제합니다. 예외가 나도, 일찍 return해도 누수가 없습니다.</a:t>
             </a:r>
             <a:endParaRPr lang="en-US" sz="1400" dirty="0"/>
           </a:p>
@@ -5361,7 +7264,7 @@
                 <a:ea typeface="Courier New" pitchFamily="34" charset="-122"/>
                 <a:cs typeface="Courier New" pitchFamily="34" charset="-120"/>
               </a:rPr>
-              <a:t>7</a:t>
+              <a:t>5</a:t>
             </a:r>
             <a:endParaRPr lang="en-US" sz="2200" dirty="0"/>
           </a:p>
@@ -5400,7 +7303,7 @@
                 <a:ea typeface="Malgun Gothic" pitchFamily="34" charset="-122"/>
                 <a:cs typeface="Malgun Gothic" pitchFamily="34" charset="-120"/>
               </a:rPr>
-              <a:t>시리즈 총정리</a:t>
+              <a:t>오류 관례 · 4억을 넘는 '오류'의 정체</a:t>
             </a:r>
             <a:endParaRPr lang="en-US" sz="2900" dirty="0"/>
           </a:p>
@@ -5415,11 +7318,11 @@
         <p:spPr>
           <a:xfrm>
             <a:off x="548640" y="1737360"/>
-            <a:ext cx="11064240" cy="749808"/>
+            <a:ext cx="11064240" cy="960120"/>
           </a:xfrm>
           <a:prstGeom prst="roundRect">
             <a:avLst>
-              <a:gd name="adj" fmla="val 9756"/>
+              <a:gd name="adj" fmla="val 7619"/>
             </a:avLst>
           </a:prstGeom>
           <a:solidFill>
@@ -5436,8 +7339,8 @@
         </p:nvSpPr>
         <p:spPr>
           <a:xfrm>
-            <a:off x="822960" y="1810512"/>
-            <a:ext cx="1463040" cy="603504"/>
+            <a:off x="822960" y="1828800"/>
+            <a:ext cx="2926080" cy="777240"/>
           </a:xfrm>
           <a:prstGeom prst="rect">
             <a:avLst/>
@@ -5453,17 +7356,17 @@
               <a:buNone/>
             </a:pPr>
             <a:r>
-              <a:rPr lang="en-US" sz="1600" b="1" dirty="0">
-                <a:solidFill>
-                  <a:srgbClr val="3FB8C4"/>
+              <a:rPr lang="en-US" sz="1700" b="1" dirty="0">
+                <a:solidFill>
+                  <a:srgbClr val="E6604F"/>
                 </a:solidFill>
                 <a:latin typeface="Courier New" pitchFamily="34" charset="0"/>
                 <a:ea typeface="Courier New" pitchFamily="34" charset="-122"/>
                 <a:cs typeface="Courier New" pitchFamily="34" charset="-120"/>
               </a:rPr>
-              <a:t>세션 1</a:t>
-            </a:r>
-            <a:endParaRPr lang="en-US" sz="1600" dirty="0"/>
+              <a:t>0xFFFFFFFF</a:t>
+            </a:r>
+            <a:endParaRPr lang="en-US" sz="1700" dirty="0"/>
           </a:p>
         </p:txBody>
       </p:sp>
@@ -5475,8 +7378,8 @@
         </p:nvSpPr>
         <p:spPr>
           <a:xfrm>
-            <a:off x="2468880" y="1810512"/>
-            <a:ext cx="8869680" cy="603504"/>
+            <a:off x="3840480" y="1828800"/>
+            <a:ext cx="2926080" cy="777240"/>
           </a:xfrm>
           <a:prstGeom prst="rect">
             <a:avLst/>
@@ -5492,7 +7395,7 @@
               <a:buNone/>
             </a:pPr>
             <a:r>
-              <a:rPr lang="en-US" sz="1550" dirty="0">
+              <a:rPr lang="en-US" sz="1600" b="1" dirty="0">
                 <a:solidFill>
                   <a:srgbClr val="E7EDF5"/>
                 </a:solidFill>
@@ -5500,26 +7403,65 @@
                 <a:ea typeface="Malgun Gothic" pitchFamily="34" charset="-122"/>
                 <a:cs typeface="Malgun Gothic" pitchFamily="34" charset="-120"/>
               </a:rPr>
-              <a:t>스레드 모델 · THREAD_ADDRESS · coalescing</a:t>
-            </a:r>
-            <a:endParaRPr lang="en-US" sz="1550" dirty="0"/>
-          </a:p>
-        </p:txBody>
-      </p:sp>
-      <p:sp>
-        <p:nvSpPr>
-          <p:cNvPr id="7" name="Shape 5"/>
-          <p:cNvSpPr/>
-          <p:nvPr/>
-        </p:nvSpPr>
-        <p:spPr>
-          <a:xfrm>
-            <a:off x="548640" y="2606040"/>
-            <a:ext cx="11064240" cy="749808"/>
+              <a:t>커널 launch 실패</a:t>
+            </a:r>
+            <a:endParaRPr lang="en-US" sz="1600" dirty="0"/>
+          </a:p>
+        </p:txBody>
+      </p:sp>
+      <p:sp>
+        <p:nvSpPr>
+          <p:cNvPr id="7" name="Text 5"/>
+          <p:cNvSpPr/>
+          <p:nvPr/>
+        </p:nvSpPr>
+        <p:spPr>
+          <a:xfrm>
+            <a:off x="6949440" y="1828800"/>
+            <a:ext cx="4389120" cy="777240"/>
+          </a:xfrm>
+          <a:prstGeom prst="rect">
+            <a:avLst/>
+          </a:prstGeom>
+          <a:noFill/>
+          <a:ln/>
+        </p:spPr>
+        <p:txBody>
+          <a:bodyPr wrap="square" lIns="0" tIns="0" rIns="0" bIns="0" rtlCol="0" anchor="ctr"/>
+          <a:lstStyle/>
+          <a:p>
+            <a:pPr indent="0" marL="0">
+              <a:buNone/>
+            </a:pPr>
+            <a:r>
+              <a:rPr lang="en-US" sz="1350" dirty="0">
+                <a:solidFill>
+                  <a:srgbClr val="9FB0C4"/>
+                </a:solidFill>
+                <a:latin typeface="Malgun Gothic" pitchFamily="34" charset="0"/>
+                <a:ea typeface="Malgun Gothic" pitchFamily="34" charset="-122"/>
+                <a:cs typeface="Malgun Gothic" pitchFamily="34" charset="-120"/>
+              </a:rPr>
+              <a:t>CHECK_LAUNCH_ERROR — cudaGetLastError 감지</a:t>
+            </a:r>
+            <a:endParaRPr lang="en-US" sz="1350" dirty="0"/>
+          </a:p>
+        </p:txBody>
+      </p:sp>
+      <p:sp>
+        <p:nvSpPr>
+          <p:cNvPr id="8" name="Shape 6"/>
+          <p:cNvSpPr/>
+          <p:nvPr/>
+        </p:nvSpPr>
+        <p:spPr>
+          <a:xfrm>
+            <a:off x="548640" y="2834640"/>
+            <a:ext cx="11064240" cy="960120"/>
           </a:xfrm>
           <a:prstGeom prst="roundRect">
             <a:avLst>
-              <a:gd name="adj" fmla="val 9756"/>
+              <a:gd name="adj" fmla="val 7619"/>
             </a:avLst>
           </a:prstGeom>
           <a:solidFill>
@@ -5530,14 +7472,14 @@
       </p:sp>
       <p:sp>
         <p:nvSpPr>
-          <p:cNvPr id="8" name="Text 6"/>
-          <p:cNvSpPr/>
-          <p:nvPr/>
-        </p:nvSpPr>
-        <p:spPr>
-          <a:xfrm>
-            <a:off x="822960" y="2679192"/>
-            <a:ext cx="1463040" cy="603504"/>
+          <p:cNvPr id="9" name="Text 7"/>
+          <p:cNvSpPr/>
+          <p:nvPr/>
+        </p:nvSpPr>
+        <p:spPr>
+          <a:xfrm>
+            <a:off x="822960" y="2926080"/>
+            <a:ext cx="2926080" cy="777240"/>
           </a:xfrm>
           <a:prstGeom prst="rect">
             <a:avLst/>
@@ -5553,7 +7495,7 @@
               <a:buNone/>
             </a:pPr>
             <a:r>
-              <a:rPr lang="en-US" sz="1600" b="1" dirty="0">
+              <a:rPr lang="en-US" sz="1700" b="1" dirty="0">
                 <a:solidFill>
                   <a:srgbClr val="E8A33D"/>
                 </a:solidFill>
@@ -5561,22 +7503,22 @@
                 <a:ea typeface="Courier New" pitchFamily="34" charset="-122"/>
                 <a:cs typeface="Courier New" pitchFamily="34" charset="-120"/>
               </a:rPr>
-              <a:t>세션 2</a:t>
-            </a:r>
-            <a:endParaRPr lang="en-US" sz="1600" dirty="0"/>
-          </a:p>
-        </p:txBody>
-      </p:sp>
-      <p:sp>
-        <p:nvSpPr>
-          <p:cNvPr id="9" name="Text 7"/>
-          <p:cNvSpPr/>
-          <p:nvPr/>
-        </p:nvSpPr>
-        <p:spPr>
-          <a:xfrm>
-            <a:off x="2468880" y="2679192"/>
-            <a:ext cx="8869680" cy="603504"/>
+              <a:t>0xFFFFFFFE</a:t>
+            </a:r>
+            <a:endParaRPr lang="en-US" sz="1700" dirty="0"/>
+          </a:p>
+        </p:txBody>
+      </p:sp>
+      <p:sp>
+        <p:nvSpPr>
+          <p:cNvPr id="10" name="Text 8"/>
+          <p:cNvSpPr/>
+          <p:nvPr/>
+        </p:nvSpPr>
+        <p:spPr>
+          <a:xfrm>
+            <a:off x="3840480" y="2926080"/>
+            <a:ext cx="2926080" cy="777240"/>
           </a:xfrm>
           <a:prstGeom prst="rect">
             <a:avLst/>
@@ -5592,7 +7534,7 @@
               <a:buNone/>
             </a:pPr>
             <a:r>
-              <a:rPr lang="en-US" sz="1550" dirty="0">
+              <a:rPr lang="en-US" sz="1600" b="1" dirty="0">
                 <a:solidFill>
                   <a:srgbClr val="E7EDF5"/>
                 </a:solidFill>
@@ -5600,26 +7542,65 @@
                 <a:ea typeface="Malgun Gothic" pitchFamily="34" charset="-122"/>
                 <a:cs typeface="Malgun Gothic" pitchFamily="34" charset="-120"/>
               </a:rPr>
-              <a:t>메모리 계층 · 쓰기→검증 · Moving Inversions</a:t>
-            </a:r>
-            <a:endParaRPr lang="en-US" sz="1550" dirty="0"/>
-          </a:p>
-        </p:txBody>
-      </p:sp>
-      <p:sp>
-        <p:nvSpPr>
-          <p:cNvPr id="10" name="Shape 8"/>
-          <p:cNvSpPr/>
-          <p:nvPr/>
-        </p:nvSpPr>
-        <p:spPr>
-          <a:xfrm>
-            <a:off x="548640" y="3474720"/>
-            <a:ext cx="11064240" cy="749808"/>
+              <a:t>커널 타임아웃</a:t>
+            </a:r>
+            <a:endParaRPr lang="en-US" sz="1600" dirty="0"/>
+          </a:p>
+        </p:txBody>
+      </p:sp>
+      <p:sp>
+        <p:nvSpPr>
+          <p:cNvPr id="11" name="Text 9"/>
+          <p:cNvSpPr/>
+          <p:nvPr/>
+        </p:nvSpPr>
+        <p:spPr>
+          <a:xfrm>
+            <a:off x="6949440" y="2926080"/>
+            <a:ext cx="4389120" cy="777240"/>
+          </a:xfrm>
+          <a:prstGeom prst="rect">
+            <a:avLst/>
+          </a:prstGeom>
+          <a:noFill/>
+          <a:ln/>
+        </p:spPr>
+        <p:txBody>
+          <a:bodyPr wrap="square" lIns="0" tIns="0" rIns="0" bIns="0" rtlCol="0" anchor="ctr"/>
+          <a:lstStyle/>
+          <a:p>
+            <a:pPr indent="0" marL="0">
+              <a:buNone/>
+            </a:pPr>
+            <a:r>
+              <a:rPr lang="en-US" sz="1350" dirty="0">
+                <a:solidFill>
+                  <a:srgbClr val="9FB0C4"/>
+                </a:solidFill>
+                <a:latin typeface="Malgun Gothic" pitchFamily="34" charset="0"/>
+                <a:ea typeface="Malgun Gothic" pitchFamily="34" charset="-122"/>
+                <a:cs typeface="Malgun Gothic" pitchFamily="34" charset="-120"/>
+              </a:rPr>
+              <a:t>SOFTWAIT 15초 초과 (디스플레이 워치독)</a:t>
+            </a:r>
+            <a:endParaRPr lang="en-US" sz="1350" dirty="0"/>
+          </a:p>
+        </p:txBody>
+      </p:sp>
+      <p:sp>
+        <p:nvSpPr>
+          <p:cNvPr id="12" name="Shape 10"/>
+          <p:cNvSpPr/>
+          <p:nvPr/>
+        </p:nvSpPr>
+        <p:spPr>
+          <a:xfrm>
+            <a:off x="548640" y="3931920"/>
+            <a:ext cx="11064240" cy="960120"/>
           </a:xfrm>
           <a:prstGeom prst="roundRect">
             <a:avLst>
-              <a:gd name="adj" fmla="val 9756"/>
+              <a:gd name="adj" fmla="val 7619"/>
             </a:avLst>
           </a:prstGeom>
           <a:solidFill>
@@ -5630,14 +7611,14 @@
       </p:sp>
       <p:sp>
         <p:nvSpPr>
-          <p:cNvPr id="11" name="Text 9"/>
-          <p:cNvSpPr/>
-          <p:nvPr/>
-        </p:nvSpPr>
-        <p:spPr>
-          <a:xfrm>
-            <a:off x="822960" y="3547872"/>
-            <a:ext cx="1463040" cy="603504"/>
+          <p:cNvPr id="13" name="Text 11"/>
+          <p:cNvSpPr/>
+          <p:nvPr/>
+        </p:nvSpPr>
+        <p:spPr>
+          <a:xfrm>
+            <a:off x="822960" y="4023360"/>
+            <a:ext cx="2926080" cy="777240"/>
           </a:xfrm>
           <a:prstGeom prst="rect">
             <a:avLst/>
@@ -5653,7 +7634,7 @@
               <a:buNone/>
             </a:pPr>
             <a:r>
-              <a:rPr lang="en-US" sz="1600" b="1" dirty="0">
+              <a:rPr lang="en-US" sz="1700" b="1" dirty="0">
                 <a:solidFill>
                   <a:srgbClr val="3FB8C4"/>
                 </a:solidFill>
@@ -5661,22 +7642,22 @@
                 <a:ea typeface="Courier New" pitchFamily="34" charset="-122"/>
                 <a:cs typeface="Courier New" pitchFamily="34" charset="-120"/>
               </a:rPr>
-              <a:t>세션 3</a:t>
-            </a:r>
-            <a:endParaRPr lang="en-US" sz="1600" dirty="0"/>
-          </a:p>
-        </p:txBody>
-      </p:sp>
-      <p:sp>
-        <p:nvSpPr>
-          <p:cNvPr id="12" name="Text 10"/>
-          <p:cNvSpPr/>
-          <p:nvPr/>
-        </p:nvSpPr>
-        <p:spPr>
-          <a:xfrm>
-            <a:off x="2468880" y="3547872"/>
-            <a:ext cx="8869680" cy="603504"/>
+              <a:t>정상 오류 수</a:t>
+            </a:r>
+            <a:endParaRPr lang="en-US" sz="1700" dirty="0"/>
+          </a:p>
+        </p:txBody>
+      </p:sp>
+      <p:sp>
+        <p:nvSpPr>
+          <p:cNvPr id="14" name="Text 12"/>
+          <p:cNvSpPr/>
+          <p:nvPr/>
+        </p:nvSpPr>
+        <p:spPr>
+          <a:xfrm>
+            <a:off x="3840480" y="4023360"/>
+            <a:ext cx="2926080" cy="777240"/>
           </a:xfrm>
           <a:prstGeom prst="rect">
             <a:avLst/>
@@ -5692,7 +7673,7 @@
               <a:buNone/>
             </a:pPr>
             <a:r>
-              <a:rPr lang="en-US" sz="1550" dirty="0">
+              <a:rPr lang="en-US" sz="1600" b="1" dirty="0">
                 <a:solidFill>
                   <a:srgbClr val="E7EDF5"/>
                 </a:solidFill>
@@ -5700,44 +7681,22 @@
                 <a:ea typeface="Malgun Gothic" pitchFamily="34" charset="-122"/>
                 <a:cs typeface="Malgun Gothic" pitchFamily="34" charset="-120"/>
               </a:rPr>
-              <a:t>공유 메모리 · __popc · 병렬 리덕션</a:t>
-            </a:r>
-            <a:endParaRPr lang="en-US" sz="1550" dirty="0"/>
-          </a:p>
-        </p:txBody>
-      </p:sp>
-      <p:sp>
-        <p:nvSpPr>
-          <p:cNvPr id="13" name="Shape 11"/>
-          <p:cNvSpPr/>
-          <p:nvPr/>
-        </p:nvSpPr>
-        <p:spPr>
-          <a:xfrm>
-            <a:off x="548640" y="4343400"/>
-            <a:ext cx="11064240" cy="749808"/>
-          </a:xfrm>
-          <a:prstGeom prst="roundRect">
-            <a:avLst>
-              <a:gd name="adj" fmla="val 9756"/>
-            </a:avLst>
-          </a:prstGeom>
-          <a:solidFill>
-            <a:srgbClr val="18212E"/>
-          </a:solidFill>
-          <a:ln/>
-        </p:spPr>
-      </p:sp>
-      <p:sp>
-        <p:nvSpPr>
-          <p:cNvPr id="14" name="Text 12"/>
-          <p:cNvSpPr/>
-          <p:nvPr/>
-        </p:nvSpPr>
-        <p:spPr>
-          <a:xfrm>
-            <a:off x="822960" y="4416552"/>
-            <a:ext cx="1463040" cy="603504"/>
+              <a:t>실제 비트 오류</a:t>
+            </a:r>
+            <a:endParaRPr lang="en-US" sz="1600" dirty="0"/>
+          </a:p>
+        </p:txBody>
+      </p:sp>
+      <p:sp>
+        <p:nvSpPr>
+          <p:cNvPr id="15" name="Text 13"/>
+          <p:cNvSpPr/>
+          <p:nvPr/>
+        </p:nvSpPr>
+        <p:spPr>
+          <a:xfrm>
+            <a:off x="6949440" y="4023360"/>
+            <a:ext cx="4389120" cy="777240"/>
           </a:xfrm>
           <a:prstGeom prst="rect">
             <a:avLst/>
@@ -5753,56 +7712,17 @@
               <a:buNone/>
             </a:pPr>
             <a:r>
-              <a:rPr lang="en-US" sz="1600" b="1" dirty="0">
-                <a:solidFill>
-                  <a:srgbClr val="E8A33D"/>
-                </a:solidFill>
-                <a:latin typeface="Courier New" pitchFamily="34" charset="0"/>
-                <a:ea typeface="Courier New" pitchFamily="34" charset="-122"/>
-                <a:cs typeface="Courier New" pitchFamily="34" charset="-120"/>
-              </a:rPr>
-              <a:t>세션 4</a:t>
-            </a:r>
-            <a:endParaRPr lang="en-US" sz="1600" dirty="0"/>
-          </a:p>
-        </p:txBody>
-      </p:sp>
-      <p:sp>
-        <p:nvSpPr>
-          <p:cNvPr id="15" name="Text 13"/>
-          <p:cNvSpPr/>
-          <p:nvPr/>
-        </p:nvSpPr>
-        <p:spPr>
-          <a:xfrm>
-            <a:off x="2468880" y="4416552"/>
-            <a:ext cx="8869680" cy="603504"/>
-          </a:xfrm>
-          <a:prstGeom prst="rect">
-            <a:avLst/>
-          </a:prstGeom>
-          <a:noFill/>
-          <a:ln/>
-        </p:spPr>
-        <p:txBody>
-          <a:bodyPr wrap="square" lIns="0" tIns="0" rIns="0" bIns="0" rtlCol="0" anchor="ctr"/>
-          <a:lstStyle/>
-          <a:p>
-            <a:pPr indent="0" marL="0">
-              <a:buNone/>
-            </a:pPr>
-            <a:r>
-              <a:rPr lang="en-US" sz="1550" dirty="0">
-                <a:solidFill>
-                  <a:srgbClr val="E7EDF5"/>
+              <a:rPr lang="en-US" sz="1350" dirty="0">
+                <a:solidFill>
+                  <a:srgbClr val="9FB0C4"/>
                 </a:solidFill>
                 <a:latin typeface="Malgun Gothic" pitchFamily="34" charset="0"/>
                 <a:ea typeface="Malgun Gothic" pitchFamily="34" charset="-122"/>
                 <a:cs typeface="Malgun Gothic" pitchFamily="34" charset="-120"/>
               </a:rPr>
-              <a:t>13종 테스트 카탈로그 · 패턴 생성 · 대역폭</a:t>
-            </a:r>
-            <a:endParaRPr lang="en-US" sz="1550" dirty="0"/>
+              <a:t>__popc로 센 합계 — 보통 0, 결함 시 소수</a:t>
+            </a:r>
+            <a:endParaRPr lang="en-US" sz="1350" dirty="0"/>
           </a:p>
         </p:txBody>
       </p:sp>
@@ -5814,18 +7734,23 @@
         </p:nvSpPr>
         <p:spPr>
           <a:xfrm>
-            <a:off x="548640" y="5212080"/>
-            <a:ext cx="11064240" cy="749808"/>
+            <a:off x="548640" y="5120640"/>
+            <a:ext cx="11064240" cy="868680"/>
           </a:xfrm>
           <a:prstGeom prst="roundRect">
             <a:avLst>
-              <a:gd name="adj" fmla="val 9756"/>
+              <a:gd name="adj" fmla="val 8421"/>
             </a:avLst>
           </a:prstGeom>
           <a:solidFill>
-            <a:srgbClr val="18212E"/>
+            <a:srgbClr val="241A16"/>
           </a:solidFill>
-          <a:ln/>
+          <a:ln w="19050">
+            <a:solidFill>
+              <a:srgbClr val="E8A33D"/>
+            </a:solidFill>
+            <a:prstDash val="solid"/>
+          </a:ln>
         </p:spPr>
       </p:sp>
       <p:sp>
@@ -5836,112 +7761,54 @@
         </p:nvSpPr>
         <p:spPr>
           <a:xfrm>
-            <a:off x="822960" y="5285232"/>
-            <a:ext cx="1463040" cy="603504"/>
-          </a:xfrm>
-          <a:prstGeom prst="rect">
-            <a:avLst/>
-          </a:prstGeom>
-          <a:noFill/>
-          <a:ln/>
-        </p:spPr>
-        <p:txBody>
-          <a:bodyPr wrap="square" lIns="0" tIns="0" rIns="0" bIns="0" rtlCol="0" anchor="ctr"/>
+            <a:off x="822960" y="5257800"/>
+            <a:ext cx="10515600" cy="640080"/>
+          </a:xfrm>
+          <a:prstGeom prst="rect">
+            <a:avLst/>
+          </a:prstGeom>
+          <a:noFill/>
+          <a:ln/>
+        </p:spPr>
+        <p:txBody>
+          <a:bodyPr wrap="square" lIns="0" tIns="0" rIns="0" bIns="0" rtlCol="0" anchor="t"/>
           <a:lstStyle/>
           <a:p>
             <a:pPr indent="0" marL="0">
-              <a:buNone/>
-            </a:pPr>
-            <a:r>
-              <a:rPr lang="en-US" sz="1600" b="1" dirty="0">
-                <a:solidFill>
-                  <a:srgbClr val="3FB8C4"/>
-                </a:solidFill>
-                <a:latin typeface="Courier New" pitchFamily="34" charset="0"/>
-                <a:ea typeface="Courier New" pitchFamily="34" charset="-122"/>
-                <a:cs typeface="Courier New" pitchFamily="34" charset="-120"/>
-              </a:rPr>
-              <a:t>세션 5</a:t>
-            </a:r>
-            <a:endParaRPr lang="en-US" sz="1600" dirty="0"/>
-          </a:p>
-        </p:txBody>
-      </p:sp>
-      <p:sp>
-        <p:nvSpPr>
-          <p:cNvPr id="18" name="Text 16"/>
-          <p:cNvSpPr/>
-          <p:nvPr/>
-        </p:nvSpPr>
-        <p:spPr>
-          <a:xfrm>
-            <a:off x="2468880" y="5285232"/>
-            <a:ext cx="8869680" cy="603504"/>
-          </a:xfrm>
-          <a:prstGeom prst="rect">
-            <a:avLst/>
-          </a:prstGeom>
-          <a:noFill/>
-          <a:ln/>
-        </p:spPr>
-        <p:txBody>
-          <a:bodyPr wrap="square" lIns="0" tIns="0" rIns="0" bIns="0" rtlCol="0" anchor="ctr"/>
-          <a:lstStyle/>
-          <a:p>
-            <a:pPr indent="0" marL="0">
-              <a:buNone/>
-            </a:pPr>
-            <a:r>
-              <a:rPr lang="en-US" sz="1550" dirty="0">
-                <a:solidFill>
-                  <a:srgbClr val="E7EDF5"/>
+              <a:lnSpc>
+                <a:spcPct val="110000"/>
+              </a:lnSpc>
+              <a:buNone/>
+            </a:pPr>
+            <a:r>
+              <a:rPr lang="en-US" sz="1450" b="1" dirty="0">
+                <a:solidFill>
+                  <a:srgbClr val="E8A33D"/>
                 </a:solidFill>
                 <a:latin typeface="Malgun Gothic" pitchFamily="34" charset="0"/>
                 <a:ea typeface="Malgun Gothic" pitchFamily="34" charset="-122"/>
                 <a:cs typeface="Malgun Gothic" pitchFamily="34" charset="-120"/>
               </a:rPr>
-              <a:t>3계층 API · RAII · 라이브러리 임베드 · 캡스톤</a:t>
-            </a:r>
-            <a:endParaRPr lang="en-US" sz="1550" dirty="0"/>
-          </a:p>
-        </p:txBody>
-      </p:sp>
-      <p:sp>
-        <p:nvSpPr>
-          <p:cNvPr id="19" name="Text 17"/>
-          <p:cNvSpPr/>
-          <p:nvPr/>
-        </p:nvSpPr>
-        <p:spPr>
-          <a:xfrm>
-            <a:off x="548640" y="5989320"/>
-            <a:ext cx="11064240" cy="365760"/>
-          </a:xfrm>
-          <a:prstGeom prst="rect">
-            <a:avLst/>
-          </a:prstGeom>
-          <a:noFill/>
-          <a:ln/>
-        </p:spPr>
-        <p:txBody>
-          <a:bodyPr wrap="square" lIns="0" tIns="0" rIns="0" bIns="0" rtlCol="0" anchor="ctr"/>
-          <a:lstStyle/>
-          <a:p>
-            <a:pPr algn="ctr" indent="0" marL="0">
-              <a:buNone/>
-            </a:pPr>
-            <a:r>
-              <a:rPr lang="en-US" sz="1400" i="1" dirty="0">
-                <a:solidFill>
-                  <a:srgbClr val="9FB0C4"/>
+              <a:t>README의 경고: </a:t>
+            </a:r>
+            <a:pPr indent="0" marL="0">
+              <a:lnSpc>
+                <a:spcPct val="110000"/>
+              </a:lnSpc>
+              <a:buNone/>
+            </a:pPr>
+            <a:r>
+              <a:rPr lang="en-US" sz="1450" dirty="0">
+                <a:solidFill>
+                  <a:srgbClr val="E7EDF5"/>
                 </a:solidFill>
                 <a:latin typeface="Malgun Gothic" pitchFamily="34" charset="0"/>
                 <a:ea typeface="Malgun Gothic" pitchFamily="34" charset="-122"/>
                 <a:cs typeface="Malgun Gothic" pitchFamily="34" charset="-120"/>
               </a:rPr>
-              <a:t>500줄의 실제 코드로 CUDA의 핵심을 모두 만졌습니다.</a:t>
-            </a:r>
-            <a:endParaRPr lang="en-US" sz="1400" dirty="0"/>
+              <a:t>오류 수가 40억을 넘으면 진짜 결함이 아니라 타임아웃 센티넬입니다. 테스트 영역을 줄이면 사라집니다.</a:t>
+            </a:r>
+            <a:endParaRPr lang="en-US" sz="1450" dirty="0"/>
           </a:p>
         </p:txBody>
       </p:sp>
@@ -5985,8 +7852,51 @@
         </p:nvSpPr>
         <p:spPr>
           <a:xfrm>
-            <a:off x="548640" y="1463040"/>
-            <a:ext cx="10058400" cy="457200"/>
+            <a:off x="548640" y="411480"/>
+            <a:ext cx="658368" cy="658368"/>
+          </a:xfrm>
+          <a:prstGeom prst="roundRect">
+            <a:avLst>
+              <a:gd name="adj" fmla="val 13889"/>
+            </a:avLst>
+          </a:prstGeom>
+          <a:solidFill>
+            <a:srgbClr val="E8A33D"/>
+          </a:solidFill>
+          <a:ln/>
+        </p:spPr>
+        <p:txBody>
+          <a:bodyPr wrap="square" rtlCol="0" anchor="ctr"/>
+          <a:lstStyle/>
+          <a:p>
+            <a:pPr algn="ctr" indent="0" marL="0">
+              <a:buNone/>
+            </a:pPr>
+            <a:r>
+              <a:rPr lang="en-US" sz="2200" b="1" dirty="0">
+                <a:solidFill>
+                  <a:srgbClr val="101722"/>
+                </a:solidFill>
+                <a:latin typeface="Courier New" pitchFamily="34" charset="0"/>
+                <a:ea typeface="Courier New" pitchFamily="34" charset="-122"/>
+                <a:cs typeface="Courier New" pitchFamily="34" charset="-120"/>
+              </a:rPr>
+              <a:t>6</a:t>
+            </a:r>
+            <a:endParaRPr lang="en-US" sz="2200" dirty="0"/>
+          </a:p>
+        </p:txBody>
+      </p:sp>
+      <p:sp>
+        <p:nvSpPr>
+          <p:cNvPr id="3" name="Text 1"/>
+          <p:cNvSpPr/>
+          <p:nvPr/>
+        </p:nvSpPr>
+        <p:spPr>
+          <a:xfrm>
+            <a:off x="1371600" y="384048"/>
+            <a:ext cx="10241280" cy="713232"/>
           </a:xfrm>
           <a:prstGeom prst="rect">
             <a:avLst/>
@@ -5998,34 +7908,34 @@
           <a:bodyPr wrap="square" lIns="0" tIns="0" rIns="0" bIns="0" rtlCol="0" anchor="ctr"/>
           <a:lstStyle/>
           <a:p>
-            <a:pPr indent="0" marL="0">
-              <a:buNone/>
-            </a:pPr>
-            <a:r>
-              <a:rPr lang="en-US" sz="1800" b="1" dirty="0">
-                <a:solidFill>
-                  <a:srgbClr val="E8A33D"/>
+            <a:pPr algn="l" indent="0" marL="0">
+              <a:buNone/>
+            </a:pPr>
+            <a:r>
+              <a:rPr lang="en-US" sz="2900" b="1" dirty="0">
+                <a:solidFill>
+                  <a:srgbClr val="E7EDF5"/>
                 </a:solidFill>
                 <a:latin typeface="Malgun Gothic" pitchFamily="34" charset="0"/>
                 <a:ea typeface="Malgun Gothic" pitchFamily="34" charset="-122"/>
                 <a:cs typeface="Malgun Gothic" pitchFamily="34" charset="-120"/>
               </a:rPr>
-              <a:t>수고하셨습니다</a:t>
-            </a:r>
-            <a:endParaRPr lang="en-US" sz="1800" dirty="0"/>
-          </a:p>
-        </p:txBody>
-      </p:sp>
-      <p:sp>
-        <p:nvSpPr>
-          <p:cNvPr id="3" name="Text 1"/>
-          <p:cNvSpPr/>
-          <p:nvPr/>
-        </p:nvSpPr>
-        <p:spPr>
-          <a:xfrm>
-            <a:off x="548640" y="1965960"/>
-            <a:ext cx="10972800" cy="914400"/>
+              <a:t>캡스톤 · 나만의 테스트 만들기</a:t>
+            </a:r>
+            <a:endParaRPr lang="en-US" sz="2900" dirty="0"/>
+          </a:p>
+        </p:txBody>
+      </p:sp>
+      <p:sp>
+        <p:nvSpPr>
+          <p:cNvPr id="4" name="Text 2"/>
+          <p:cNvSpPr/>
+          <p:nvPr/>
+        </p:nvSpPr>
+        <p:spPr>
+          <a:xfrm>
+            <a:off x="548640" y="1463040"/>
+            <a:ext cx="11064240" cy="411480"/>
           </a:xfrm>
           <a:prstGeom prst="rect">
             <a:avLst/>
@@ -6041,30 +7951,100 @@
               <a:buNone/>
             </a:pPr>
             <a:r>
-              <a:rPr lang="en-US" sz="3700" b="1" dirty="0">
-                <a:solidFill>
-                  <a:srgbClr val="E7EDF5"/>
+              <a:rPr lang="en-US" sz="1600" dirty="0">
+                <a:solidFill>
+                  <a:srgbClr val="9FB0C4"/>
                 </a:solidFill>
                 <a:latin typeface="Malgun Gothic" pitchFamily="34" charset="0"/>
                 <a:ea typeface="Malgun Gothic" pitchFamily="34" charset="-122"/>
                 <a:cs typeface="Malgun Gothic" pitchFamily="34" charset="-120"/>
               </a:rPr>
-              <a:t>이제 당신은 GPU를 검증할 수 있습니다</a:t>
-            </a:r>
-            <a:endParaRPr lang="en-US" sz="3700" dirty="0"/>
-          </a:p>
-        </p:txBody>
-      </p:sp>
-      <p:sp>
-        <p:nvSpPr>
-          <p:cNvPr id="4" name="Text 2"/>
-          <p:cNvSpPr/>
-          <p:nvPr/>
-        </p:nvSpPr>
-        <p:spPr>
-          <a:xfrm>
-            <a:off x="548640" y="3063240"/>
-            <a:ext cx="10972800" cy="1280160"/>
+              <a:t>아래 중 하나를 골라 구현하고 5분 발표합니다.</a:t>
+            </a:r>
+            <a:endParaRPr lang="en-US" sz="1600" dirty="0"/>
+          </a:p>
+        </p:txBody>
+      </p:sp>
+      <p:sp>
+        <p:nvSpPr>
+          <p:cNvPr id="5" name="Shape 3"/>
+          <p:cNvSpPr/>
+          <p:nvPr/>
+        </p:nvSpPr>
+        <p:spPr>
+          <a:xfrm>
+            <a:off x="548640" y="2057400"/>
+            <a:ext cx="11064240" cy="1143000"/>
+          </a:xfrm>
+          <a:prstGeom prst="roundRect">
+            <a:avLst>
+              <a:gd name="adj" fmla="val 6400"/>
+            </a:avLst>
+          </a:prstGeom>
+          <a:solidFill>
+            <a:srgbClr val="18212E"/>
+          </a:solidFill>
+          <a:ln w="19050">
+            <a:solidFill>
+              <a:srgbClr val="E8A33D"/>
+            </a:solidFill>
+            <a:prstDash val="solid"/>
+          </a:ln>
+        </p:spPr>
+      </p:sp>
+      <p:sp>
+        <p:nvSpPr>
+          <p:cNvPr id="6" name="Text 4"/>
+          <p:cNvSpPr/>
+          <p:nvPr/>
+        </p:nvSpPr>
+        <p:spPr>
+          <a:xfrm>
+            <a:off x="822960" y="2350008"/>
+            <a:ext cx="640080" cy="548640"/>
+          </a:xfrm>
+          <a:prstGeom prst="roundRect">
+            <a:avLst>
+              <a:gd name="adj" fmla="val 16667"/>
+            </a:avLst>
+          </a:prstGeom>
+          <a:solidFill>
+            <a:srgbClr val="E8A33D"/>
+          </a:solidFill>
+          <a:ln/>
+        </p:spPr>
+        <p:txBody>
+          <a:bodyPr wrap="square" rtlCol="0" anchor="ctr"/>
+          <a:lstStyle/>
+          <a:p>
+            <a:pPr algn="ctr" indent="0" marL="0">
+              <a:buNone/>
+            </a:pPr>
+            <a:r>
+              <a:rPr lang="en-US" sz="2200" b="1" dirty="0">
+                <a:solidFill>
+                  <a:srgbClr val="101722"/>
+                </a:solidFill>
+                <a:latin typeface="Courier New" pitchFamily="34" charset="0"/>
+                <a:ea typeface="Courier New" pitchFamily="34" charset="-122"/>
+                <a:cs typeface="Courier New" pitchFamily="34" charset="-120"/>
+              </a:rPr>
+              <a:t>A</a:t>
+            </a:r>
+            <a:endParaRPr lang="en-US" sz="2200" dirty="0"/>
+          </a:p>
+        </p:txBody>
+      </p:sp>
+      <p:sp>
+        <p:nvSpPr>
+          <p:cNvPr id="7" name="Text 5"/>
+          <p:cNvSpPr/>
+          <p:nvPr/>
+        </p:nvSpPr>
+        <p:spPr>
+          <a:xfrm>
+            <a:off x="1737360" y="2221992"/>
+            <a:ext cx="9601200" cy="457200"/>
           </a:xfrm>
           <a:prstGeom prst="rect">
             <a:avLst/>
@@ -6077,16 +8057,10 @@
           <a:lstStyle/>
           <a:p>
             <a:pPr indent="0" marL="0">
-              <a:lnSpc>
-                <a:spcPct val="120000"/>
-              </a:lnSpc>
-              <a:spcAft>
-                <a:spcPts val="600"/>
-              </a:spcAft>
-              <a:buNone/>
-            </a:pPr>
-            <a:r>
-              <a:rPr lang="en-US" sz="1700" dirty="0">
+              <a:buNone/>
+            </a:pPr>
+            <a:r>
+              <a:rPr lang="en-US" sz="1800" b="1" dirty="0">
                 <a:solidFill>
                   <a:srgbClr val="E7EDF5"/>
                 </a:solidFill>
@@ -6094,19 +8068,38 @@
                 <a:ea typeface="Malgun Gothic" pitchFamily="34" charset="-122"/>
                 <a:cs typeface="Malgun Gothic" pitchFamily="34" charset="-120"/>
               </a:rPr>
-              <a:t>읽을 순서 제안: cli.cu 메인 루프 → core.cu의 THREAD_ADDRESS → deviceVerifyConstant 리덕션.</a:t>
-            </a:r>
-            <a:endParaRPr lang="en-US" sz="1700" dirty="0"/>
-          </a:p>
+              <a:t>새 패턴 테스트</a:t>
+            </a:r>
+            <a:endParaRPr lang="en-US" sz="1800" dirty="0"/>
+          </a:p>
+        </p:txBody>
+      </p:sp>
+      <p:sp>
+        <p:nvSpPr>
+          <p:cNvPr id="8" name="Text 6"/>
+          <p:cNvSpPr/>
+          <p:nvPr/>
+        </p:nvSpPr>
+        <p:spPr>
+          <a:xfrm>
+            <a:off x="1737360" y="2679192"/>
+            <a:ext cx="9601200" cy="457200"/>
+          </a:xfrm>
+          <a:prstGeom prst="rect">
+            <a:avLst/>
+          </a:prstGeom>
+          <a:noFill/>
+          <a:ln/>
+        </p:spPr>
+        <p:txBody>
+          <a:bodyPr wrap="square" lIns="0" tIns="0" rIns="0" bIns="0" rtlCol="0" anchor="t"/>
+          <a:lstStyle/>
           <a:p>
             <a:pPr indent="0" marL="0">
-              <a:lnSpc>
-                <a:spcPct val="120000"/>
-              </a:lnSpc>
-              <a:buNone/>
-            </a:pPr>
-            <a:r>
-              <a:rPr lang="en-US" sz="1700" dirty="0">
+              <a:buNone/>
+            </a:pPr>
+            <a:r>
+              <a:rPr lang="en-US" sz="1400" dirty="0">
                 <a:solidFill>
                   <a:srgbClr val="9FB0C4"/>
                 </a:solidFill>
@@ -6114,34 +8107,34 @@
                 <a:ea typeface="Malgun Gothic" pitchFamily="34" charset="-122"/>
                 <a:cs typeface="Malgun Gothic" pitchFamily="34" charset="-120"/>
               </a:rPr>
-              <a:t>이 세 곳이 MemtestG80 전체를 관통합니다.</a:t>
-            </a:r>
-            <a:endParaRPr lang="en-US" sz="1700" dirty="0"/>
-          </a:p>
-        </p:txBody>
-      </p:sp>
-      <p:sp>
-        <p:nvSpPr>
-          <p:cNvPr id="5" name="Shape 3"/>
-          <p:cNvSpPr/>
-          <p:nvPr/>
-        </p:nvSpPr>
-        <p:spPr>
-          <a:xfrm>
-            <a:off x="548640" y="4937760"/>
-            <a:ext cx="8412480" cy="1005840"/>
+              <a:t>체커보드(0xAAAAAAAA/0x55555555 교차) 패턴 커널을 write/verify 뼈대로 추가</a:t>
+            </a:r>
+            <a:endParaRPr lang="en-US" sz="1400" dirty="0"/>
+          </a:p>
+        </p:txBody>
+      </p:sp>
+      <p:sp>
+        <p:nvSpPr>
+          <p:cNvPr id="9" name="Shape 7"/>
+          <p:cNvSpPr/>
+          <p:nvPr/>
+        </p:nvSpPr>
+        <p:spPr>
+          <a:xfrm>
+            <a:off x="548640" y="3337560"/>
+            <a:ext cx="11064240" cy="1143000"/>
           </a:xfrm>
           <a:prstGeom prst="roundRect">
             <a:avLst>
-              <a:gd name="adj" fmla="val 4545"/>
+              <a:gd name="adj" fmla="val 6400"/>
             </a:avLst>
           </a:prstGeom>
           <a:solidFill>
-            <a:srgbClr val="0B1119"/>
+            <a:srgbClr val="18212E"/>
           </a:solidFill>
-          <a:ln w="12700">
+          <a:ln w="19050">
             <a:solidFill>
-              <a:srgbClr val="2C3A4E"/>
+              <a:srgbClr val="3FB8C4"/>
             </a:solidFill>
             <a:prstDash val="solid"/>
           </a:ln>
@@ -6149,102 +8142,270 @@
       </p:sp>
       <p:sp>
         <p:nvSpPr>
-          <p:cNvPr id="6" name="Text 4"/>
-          <p:cNvSpPr/>
-          <p:nvPr/>
-        </p:nvSpPr>
-        <p:spPr>
-          <a:xfrm>
-            <a:off x="768096" y="5084064"/>
-            <a:ext cx="7973568" cy="713232"/>
-          </a:xfrm>
-          <a:prstGeom prst="rect">
-            <a:avLst/>
-          </a:prstGeom>
-          <a:noFill/>
-          <a:ln/>
-        </p:spPr>
-        <p:txBody>
-          <a:bodyPr wrap="square" lIns="0" tIns="0" rIns="0" bIns="0" rtlCol="0" anchor="t"/>
-          <a:lstStyle/>
-          <a:p>
-            <a:pPr algn="l" indent="0" marL="0">
-              <a:lnSpc>
-                <a:spcPct val="110000"/>
-              </a:lnSpc>
-              <a:buNone/>
-            </a:pPr>
-            <a:r>
-              <a:rPr lang="en-US" sz="1250" dirty="0">
-                <a:solidFill>
-                  <a:srgbClr val="F2C079"/>
+          <p:cNvPr id="10" name="Text 8"/>
+          <p:cNvSpPr/>
+          <p:nvPr/>
+        </p:nvSpPr>
+        <p:spPr>
+          <a:xfrm>
+            <a:off x="822960" y="3630168"/>
+            <a:ext cx="640080" cy="548640"/>
+          </a:xfrm>
+          <a:prstGeom prst="roundRect">
+            <a:avLst>
+              <a:gd name="adj" fmla="val 16667"/>
+            </a:avLst>
+          </a:prstGeom>
+          <a:solidFill>
+            <a:srgbClr val="3FB8C4"/>
+          </a:solidFill>
+          <a:ln/>
+        </p:spPr>
+        <p:txBody>
+          <a:bodyPr wrap="square" rtlCol="0" anchor="ctr"/>
+          <a:lstStyle/>
+          <a:p>
+            <a:pPr algn="ctr" indent="0" marL="0">
+              <a:buNone/>
+            </a:pPr>
+            <a:r>
+              <a:rPr lang="en-US" sz="2200" b="1" dirty="0">
+                <a:solidFill>
+                  <a:srgbClr val="101722"/>
                 </a:solidFill>
                 <a:latin typeface="Courier New" pitchFamily="34" charset="0"/>
                 <a:ea typeface="Courier New" pitchFamily="34" charset="-122"/>
                 <a:cs typeface="Courier New" pitchFamily="34" charset="-120"/>
               </a:rPr>
-              <a:t>원본: github.com/ihaque/memtestG80   ·   라이선스: LGPL v3</a:t>
-            </a:r>
-            <a:endParaRPr lang="en-US" sz="1250" dirty="0"/>
-          </a:p>
-          <a:p>
-            <a:pPr algn="l" indent="0" marL="0">
-              <a:lnSpc>
-                <a:spcPct val="110000"/>
-              </a:lnSpc>
-              <a:buNone/>
-            </a:pPr>
-            <a:r>
-              <a:rPr lang="en-US" sz="1250" dirty="0">
-                <a:solidFill>
-                  <a:srgbClr val="3FB8C4"/>
+              <a:t>B</a:t>
+            </a:r>
+            <a:endParaRPr lang="en-US" sz="2200" dirty="0"/>
+          </a:p>
+        </p:txBody>
+      </p:sp>
+      <p:sp>
+        <p:nvSpPr>
+          <p:cNvPr id="11" name="Text 9"/>
+          <p:cNvSpPr/>
+          <p:nvPr/>
+        </p:nvSpPr>
+        <p:spPr>
+          <a:xfrm>
+            <a:off x="1737360" y="3502152"/>
+            <a:ext cx="9601200" cy="457200"/>
+          </a:xfrm>
+          <a:prstGeom prst="rect">
+            <a:avLst/>
+          </a:prstGeom>
+          <a:noFill/>
+          <a:ln/>
+        </p:spPr>
+        <p:txBody>
+          <a:bodyPr wrap="square" lIns="0" tIns="0" rIns="0" bIns="0" rtlCol="0" anchor="t"/>
+          <a:lstStyle/>
+          <a:p>
+            <a:pPr indent="0" marL="0">
+              <a:buNone/>
+            </a:pPr>
+            <a:r>
+              <a:rPr lang="en-US" sz="1800" b="1" dirty="0">
+                <a:solidFill>
+                  <a:srgbClr val="E7EDF5"/>
+                </a:solidFill>
+                <a:latin typeface="Malgun Gothic" pitchFamily="34" charset="0"/>
+                <a:ea typeface="Malgun Gothic" pitchFamily="34" charset="-122"/>
+                <a:cs typeface="Malgun Gothic" pitchFamily="34" charset="-120"/>
+              </a:rPr>
+              <a:t>오류 히스토그램</a:t>
+            </a:r>
+            <a:endParaRPr lang="en-US" sz="1800" dirty="0"/>
+          </a:p>
+        </p:txBody>
+      </p:sp>
+      <p:sp>
+        <p:nvSpPr>
+          <p:cNvPr id="12" name="Text 10"/>
+          <p:cNvSpPr/>
+          <p:nvPr/>
+        </p:nvSpPr>
+        <p:spPr>
+          <a:xfrm>
+            <a:off x="1737360" y="3959352"/>
+            <a:ext cx="9601200" cy="457200"/>
+          </a:xfrm>
+          <a:prstGeom prst="rect">
+            <a:avLst/>
+          </a:prstGeom>
+          <a:noFill/>
+          <a:ln/>
+        </p:spPr>
+        <p:txBody>
+          <a:bodyPr wrap="square" lIns="0" tIns="0" rIns="0" bIns="0" rtlCol="0" anchor="t"/>
+          <a:lstStyle/>
+          <a:p>
+            <a:pPr indent="0" marL="0">
+              <a:buNone/>
+            </a:pPr>
+            <a:r>
+              <a:rPr lang="en-US" sz="1400" dirty="0">
+                <a:solidFill>
+                  <a:srgbClr val="9FB0C4"/>
+                </a:solidFill>
+                <a:latin typeface="Malgun Gothic" pitchFamily="34" charset="0"/>
+                <a:ea typeface="Malgun Gothic" pitchFamily="34" charset="-122"/>
+                <a:cs typeface="Malgun Gothic" pitchFamily="34" charset="-120"/>
+              </a:rPr>
+              <a:t>오류가 난 word의 비트 위치 분포를 집계해 출력하는 기능 추가</a:t>
+            </a:r>
+            <a:endParaRPr lang="en-US" sz="1400" dirty="0"/>
+          </a:p>
+        </p:txBody>
+      </p:sp>
+      <p:sp>
+        <p:nvSpPr>
+          <p:cNvPr id="13" name="Shape 11"/>
+          <p:cNvSpPr/>
+          <p:nvPr/>
+        </p:nvSpPr>
+        <p:spPr>
+          <a:xfrm>
+            <a:off x="548640" y="4617720"/>
+            <a:ext cx="11064240" cy="1143000"/>
+          </a:xfrm>
+          <a:prstGeom prst="roundRect">
+            <a:avLst>
+              <a:gd name="adj" fmla="val 6400"/>
+            </a:avLst>
+          </a:prstGeom>
+          <a:solidFill>
+            <a:srgbClr val="18212E"/>
+          </a:solidFill>
+          <a:ln w="19050">
+            <a:solidFill>
+              <a:srgbClr val="E8A33D"/>
+            </a:solidFill>
+            <a:prstDash val="solid"/>
+          </a:ln>
+        </p:spPr>
+      </p:sp>
+      <p:sp>
+        <p:nvSpPr>
+          <p:cNvPr id="14" name="Text 12"/>
+          <p:cNvSpPr/>
+          <p:nvPr/>
+        </p:nvSpPr>
+        <p:spPr>
+          <a:xfrm>
+            <a:off x="822960" y="4910328"/>
+            <a:ext cx="640080" cy="548640"/>
+          </a:xfrm>
+          <a:prstGeom prst="roundRect">
+            <a:avLst>
+              <a:gd name="adj" fmla="val 16667"/>
+            </a:avLst>
+          </a:prstGeom>
+          <a:solidFill>
+            <a:srgbClr val="E8A33D"/>
+          </a:solidFill>
+          <a:ln/>
+        </p:spPr>
+        <p:txBody>
+          <a:bodyPr wrap="square" rtlCol="0" anchor="ctr"/>
+          <a:lstStyle/>
+          <a:p>
+            <a:pPr algn="ctr" indent="0" marL="0">
+              <a:buNone/>
+            </a:pPr>
+            <a:r>
+              <a:rPr lang="en-US" sz="2200" b="1" dirty="0">
+                <a:solidFill>
+                  <a:srgbClr val="101722"/>
                 </a:solidFill>
                 <a:latin typeface="Courier New" pitchFamily="34" charset="0"/>
                 <a:ea typeface="Courier New" pitchFamily="34" charset="-122"/>
                 <a:cs typeface="Courier New" pitchFamily="34" charset="-120"/>
               </a:rPr>
-              <a:t>NVIDIA CUDA C++ Programming Guide — 다음 학습 자료</a:t>
-            </a:r>
-            <a:endParaRPr lang="en-US" sz="1250" dirty="0"/>
-          </a:p>
-        </p:txBody>
-      </p:sp>
-      <p:sp>
-        <p:nvSpPr>
-          <p:cNvPr id="7" name="Text 5"/>
-          <p:cNvSpPr/>
-          <p:nvPr/>
-        </p:nvSpPr>
-        <p:spPr>
-          <a:xfrm>
-            <a:off x="548640" y="6126480"/>
-            <a:ext cx="10972800" cy="365760"/>
-          </a:xfrm>
-          <a:prstGeom prst="rect">
-            <a:avLst/>
-          </a:prstGeom>
-          <a:noFill/>
-          <a:ln/>
-        </p:spPr>
-        <p:txBody>
-          <a:bodyPr wrap="square" lIns="0" tIns="0" rIns="0" bIns="0" rtlCol="0" anchor="ctr"/>
+              <a:t>C</a:t>
+            </a:r>
+            <a:endParaRPr lang="en-US" sz="2200" dirty="0"/>
+          </a:p>
+        </p:txBody>
+      </p:sp>
+      <p:sp>
+        <p:nvSpPr>
+          <p:cNvPr id="15" name="Text 13"/>
+          <p:cNvSpPr/>
+          <p:nvPr/>
+        </p:nvSpPr>
+        <p:spPr>
+          <a:xfrm>
+            <a:off x="1737360" y="4782312"/>
+            <a:ext cx="9601200" cy="457200"/>
+          </a:xfrm>
+          <a:prstGeom prst="rect">
+            <a:avLst/>
+          </a:prstGeom>
+          <a:noFill/>
+          <a:ln/>
+        </p:spPr>
+        <p:txBody>
+          <a:bodyPr wrap="square" lIns="0" tIns="0" rIns="0" bIns="0" rtlCol="0" anchor="t"/>
           <a:lstStyle/>
           <a:p>
             <a:pPr indent="0" marL="0">
               <a:buNone/>
             </a:pPr>
             <a:r>
-              <a:rPr lang="en-US" sz="1350" i="1" dirty="0">
-                <a:solidFill>
-                  <a:srgbClr val="9FB0C4"/>
+              <a:rPr lang="en-US" sz="1800" b="1" dirty="0">
+                <a:solidFill>
+                  <a:srgbClr val="E7EDF5"/>
                 </a:solidFill>
                 <a:latin typeface="Malgun Gothic" pitchFamily="34" charset="0"/>
                 <a:ea typeface="Malgun Gothic" pitchFamily="34" charset="-122"/>
                 <a:cs typeface="Malgun Gothic" pitchFamily="34" charset="-120"/>
               </a:rPr>
-              <a:t>질문 환영합니다 · 캡스톤 발표를 기대합니다</a:t>
-            </a:r>
-            <a:endParaRPr lang="en-US" sz="1350" dirty="0"/>
+              <a:t>선택적 테스트 실행</a:t>
+            </a:r>
+            <a:endParaRPr lang="en-US" sz="1800" dirty="0"/>
+          </a:p>
+        </p:txBody>
+      </p:sp>
+      <p:sp>
+        <p:nvSpPr>
+          <p:cNvPr id="16" name="Text 14"/>
+          <p:cNvSpPr/>
+          <p:nvPr/>
+        </p:nvSpPr>
+        <p:spPr>
+          <a:xfrm>
+            <a:off x="1737360" y="5239512"/>
+            <a:ext cx="9601200" cy="457200"/>
+          </a:xfrm>
+          <a:prstGeom prst="rect">
+            <a:avLst/>
+          </a:prstGeom>
+          <a:noFill/>
+          <a:ln/>
+        </p:spPr>
+        <p:txBody>
+          <a:bodyPr wrap="square" lIns="0" tIns="0" rIns="0" bIns="0" rtlCol="0" anchor="t"/>
+          <a:lstStyle/>
+          <a:p>
+            <a:pPr indent="0" marL="0">
+              <a:buNone/>
+            </a:pPr>
+            <a:r>
+              <a:rPr lang="en-US" sz="1400" dirty="0">
+                <a:solidFill>
+                  <a:srgbClr val="9FB0C4"/>
+                </a:solidFill>
+                <a:latin typeface="Malgun Gothic" pitchFamily="34" charset="0"/>
+                <a:ea typeface="Malgun Gothic" pitchFamily="34" charset="-122"/>
+                <a:cs typeface="Malgun Gothic" pitchFamily="34" charset="-120"/>
+              </a:rPr>
+              <a:t>CLI에 --only 플래그를 추가해 특정 테스트만 돌리도록 확장</a:t>
+            </a:r>
+            <a:endParaRPr lang="en-US" sz="1400" dirty="0"/>
           </a:p>
         </p:txBody>
       </p:sp>
